--- a/pitch/AgentVouch_walkthrough.paper.pptx
+++ b/pitch/AgentVouch_walkthrough.paper.pptx
@@ -24,23 +24,24 @@
     <p:sldId id="269" r:id="rId20"/>
     <p:sldId id="270" r:id="rId21"/>
     <p:sldId id="271" r:id="rId22"/>
+    <p:sldId id="272" r:id="rId23"/>
   </p:sldIdLst>
   <p:sldSz cy="5143500" cx="9144000"/>
   <p:notesSz cx="6858000" cy="9144000"/>
   <p:embeddedFontLst>
     <p:embeddedFont>
       <p:font typeface="Inconsolata"/>
-      <p:regular r:id="rId23"/>
-      <p:bold r:id="rId24"/>
+      <p:regular r:id="rId24"/>
+      <p:bold r:id="rId25"/>
     </p:embeddedFont>
     <p:embeddedFont>
       <p:font typeface="Inconsolata Medium"/>
-      <p:regular r:id="rId25"/>
-      <p:bold r:id="rId26"/>
+      <p:regular r:id="rId26"/>
+      <p:bold r:id="rId27"/>
     </p:embeddedFont>
     <p:embeddedFont>
       <p:font typeface="Arial Black"/>
-      <p:regular r:id="rId27"/>
+      <p:regular r:id="rId28"/>
     </p:embeddedFont>
   </p:embeddedFontLst>
   <p:defaultTextStyle>
@@ -3583,7 +3584,7 @@
   <p:cSld>
     <p:spTree>
       <p:nvGrpSpPr>
-        <p:cNvPr id="401" name="Shape 401"/>
+        <p:cNvPr id="402" name="Shape 402"/>
         <p:cNvGrpSpPr/>
         <p:nvPr/>
       </p:nvGrpSpPr>
@@ -3597,7 +3598,7 @@
       </p:grpSpPr>
       <p:sp>
         <p:nvSpPr>
-          <p:cNvPr id="402" name="Google Shape;402;p13:notes"/>
+          <p:cNvPr id="403" name="Google Shape;403;p13:notes"/>
           <p:cNvSpPr/>
           <p:nvPr>
             <p:ph idx="2" type="sldImg"/>
@@ -3642,7 +3643,7 @@
       </p:sp>
       <p:sp>
         <p:nvSpPr>
-          <p:cNvPr id="403" name="Google Shape;403;p13:notes"/>
+          <p:cNvPr id="404" name="Google Shape;404;p13:notes"/>
           <p:cNvSpPr txBox="1"/>
           <p:nvPr>
             <p:ph idx="1" type="body"/>
@@ -4204,7 +4205,7 @@
       </p:sp>
       <p:sp>
         <p:nvSpPr>
-          <p:cNvPr id="404" name="Google Shape;404;p13:notes"/>
+          <p:cNvPr id="405" name="Google Shape;405;p13:notes"/>
           <p:cNvSpPr txBox="1"/>
           <p:nvPr>
             <p:ph idx="12" type="sldNum"/>
@@ -4283,7 +4284,7 @@
   <p:cSld>
     <p:spTree>
       <p:nvGrpSpPr>
-        <p:cNvPr id="418" name="Shape 418"/>
+        <p:cNvPr id="419" name="Shape 419"/>
         <p:cNvGrpSpPr/>
         <p:nvPr/>
       </p:nvGrpSpPr>
@@ -4297,7 +4298,7 @@
       </p:grpSpPr>
       <p:sp>
         <p:nvSpPr>
-          <p:cNvPr id="419" name="Google Shape;419;p14:notes"/>
+          <p:cNvPr id="420" name="Google Shape;420;p14:notes"/>
           <p:cNvSpPr/>
           <p:nvPr>
             <p:ph idx="2" type="sldImg"/>
@@ -4342,7 +4343,7 @@
       </p:sp>
       <p:sp>
         <p:nvSpPr>
-          <p:cNvPr id="420" name="Google Shape;420;p14:notes"/>
+          <p:cNvPr id="421" name="Google Shape;421;p14:notes"/>
           <p:cNvSpPr txBox="1"/>
           <p:nvPr>
             <p:ph idx="1" type="body"/>
@@ -4969,7 +4970,7 @@
       </p:sp>
       <p:sp>
         <p:nvSpPr>
-          <p:cNvPr id="421" name="Google Shape;421;p14:notes"/>
+          <p:cNvPr id="422" name="Google Shape;422;p14:notes"/>
           <p:cNvSpPr txBox="1"/>
           <p:nvPr>
             <p:ph idx="12" type="sldNum"/>
@@ -5048,7 +5049,7 @@
   <p:cSld>
     <p:spTree>
       <p:nvGrpSpPr>
-        <p:cNvPr id="470" name="Shape 470"/>
+        <p:cNvPr id="471" name="Shape 471"/>
         <p:cNvGrpSpPr/>
         <p:nvPr/>
       </p:nvGrpSpPr>
@@ -5062,7 +5063,7 @@
       </p:grpSpPr>
       <p:sp>
         <p:nvSpPr>
-          <p:cNvPr id="471" name="Google Shape;471;p15:notes"/>
+          <p:cNvPr id="472" name="Google Shape;472;p15:notes"/>
           <p:cNvSpPr/>
           <p:nvPr>
             <p:ph idx="2" type="sldImg"/>
@@ -5107,7 +5108,7 @@
       </p:sp>
       <p:sp>
         <p:nvSpPr>
-          <p:cNvPr id="472" name="Google Shape;472;p15:notes"/>
+          <p:cNvPr id="473" name="Google Shape;473;p15:notes"/>
           <p:cNvSpPr txBox="1"/>
           <p:nvPr>
             <p:ph idx="1" type="body"/>
@@ -5631,7 +5632,7 @@
       </p:sp>
       <p:sp>
         <p:nvSpPr>
-          <p:cNvPr id="473" name="Google Shape;473;p15:notes"/>
+          <p:cNvPr id="474" name="Google Shape;474;p15:notes"/>
           <p:cNvSpPr txBox="1"/>
           <p:nvPr>
             <p:ph idx="12" type="sldNum"/>
@@ -5710,7 +5711,7 @@
   <p:cSld>
     <p:spTree>
       <p:nvGrpSpPr>
-        <p:cNvPr id="517" name="Shape 517"/>
+        <p:cNvPr id="518" name="Shape 518"/>
         <p:cNvGrpSpPr/>
         <p:nvPr/>
       </p:nvGrpSpPr>
@@ -5724,7 +5725,7 @@
       </p:grpSpPr>
       <p:sp>
         <p:nvSpPr>
-          <p:cNvPr id="518" name="Google Shape;518;p16:notes"/>
+          <p:cNvPr id="519" name="Google Shape;519;p16:notes"/>
           <p:cNvSpPr txBox="1"/>
           <p:nvPr>
             <p:ph idx="1" type="body"/>
@@ -6408,7 +6409,7 @@
       </p:sp>
       <p:sp>
         <p:nvSpPr>
-          <p:cNvPr id="519" name="Google Shape;519;p16:notes"/>
+          <p:cNvPr id="520" name="Google Shape;520;p16:notes"/>
           <p:cNvSpPr/>
           <p:nvPr>
             <p:ph idx="2" type="sldImg"/>
@@ -6418,6 +6419,1009 @@
           <a:xfrm>
             <a:off x="381300" y="685800"/>
             <a:ext cx="6096075" cy="3429000"/>
+          </a:xfrm>
+          <a:custGeom>
+            <a:rect b="b" l="l" r="r" t="t"/>
+            <a:pathLst>
+              <a:path extrusionOk="0" h="120000" w="120000">
+                <a:moveTo>
+                  <a:pt x="0" y="0"/>
+                </a:moveTo>
+                <a:lnTo>
+                  <a:pt x="120000" y="0"/>
+                </a:lnTo>
+                <a:lnTo>
+                  <a:pt x="120000" y="120000"/>
+                </a:lnTo>
+                <a:lnTo>
+                  <a:pt x="0" y="120000"/>
+                </a:lnTo>
+                <a:close/>
+              </a:path>
+            </a:pathLst>
+          </a:custGeom>
+          <a:noFill/>
+          <a:ln cap="flat" cmpd="sng" w="9525">
+            <a:solidFill>
+              <a:srgbClr val="000000"/>
+            </a:solidFill>
+            <a:prstDash val="solid"/>
+            <a:round/>
+            <a:headEnd len="sm" w="sm" type="none"/>
+            <a:tailEnd len="sm" w="sm" type="none"/>
+          </a:ln>
+        </p:spPr>
+      </p:sp>
+    </p:spTree>
+  </p:cSld>
+  <p:clrMapOvr>
+    <a:masterClrMapping/>
+  </p:clrMapOvr>
+</p:notes>
+</file>
+
+<file path=ppt/notesSlides/notesSlide17.xml><?xml version="1.0" encoding="utf-8"?>
+<p:notes xmlns:a="http://schemas.openxmlformats.org/drawingml/2006/main" xmlns:r="http://schemas.openxmlformats.org/officeDocument/2006/relationships" xmlns:mc="http://schemas.openxmlformats.org/markup-compatibility/2006" xmlns:mv="urn:schemas-microsoft-com:mac:vml" xmlns:p="http://schemas.openxmlformats.org/presentationml/2006/main" xmlns:c="http://schemas.openxmlformats.org/drawingml/2006/chart" xmlns:dgm="http://schemas.openxmlformats.org/drawingml/2006/diagram" xmlns:o="urn:schemas-microsoft-com:office:office" xmlns:v="urn:schemas-microsoft-com:vml" xmlns:pvml="urn:schemas-microsoft-com:office:powerpoint" xmlns:com="http://schemas.openxmlformats.org/drawingml/2006/compatibility" xmlns:p14="http://schemas.microsoft.com/office/powerpoint/2010/main" xmlns:p15="http://schemas.microsoft.com/office/powerpoint/2012/main" xmlns:ahyp="http://schemas.microsoft.com/office/drawing/2018/hyperlinkcolor" showMasterPhAnim="0" showMasterSp="0">
+  <p:cSld>
+    <p:spTree>
+      <p:nvGrpSpPr>
+        <p:cNvPr id="563" name="Shape 563"/>
+        <p:cNvGrpSpPr/>
+        <p:nvPr/>
+      </p:nvGrpSpPr>
+      <p:grpSpPr>
+        <a:xfrm>
+          <a:off x="0" y="0"/>
+          <a:ext cx="0" cy="0"/>
+          <a:chOff x="0" y="0"/>
+          <a:chExt cx="0" cy="0"/>
+        </a:xfrm>
+      </p:grpSpPr>
+      <p:sp>
+        <p:nvSpPr>
+          <p:cNvPr id="564" name="Google Shape;564;g3d72b5e3523_0_1:notes"/>
+          <p:cNvSpPr txBox="1"/>
+          <p:nvPr>
+            <p:ph idx="1" type="body"/>
+          </p:nvPr>
+        </p:nvSpPr>
+        <p:spPr>
+          <a:xfrm>
+            <a:off x="685800" y="4343400"/>
+            <a:ext cx="5486400" cy="4114800"/>
+          </a:xfrm>
+          <a:prstGeom prst="rect">
+            <a:avLst/>
+          </a:prstGeom>
+          <a:noFill/>
+          <a:ln>
+            <a:noFill/>
+          </a:ln>
+        </p:spPr>
+        <p:txBody>
+          <a:bodyPr anchorCtr="0" anchor="t" bIns="45700" lIns="91425" spcFirstLastPara="1" rIns="91425" wrap="square" tIns="45700">
+            <a:noAutofit/>
+          </a:bodyPr>
+          <a:lstStyle/>
+          <a:p>
+            <a:pPr indent="0" lvl="0" marL="0" rtl="0" algn="l">
+              <a:lnSpc>
+                <a:spcPct val="100000"/>
+              </a:lnSpc>
+              <a:spcBef>
+                <a:spcPts val="0"/>
+              </a:spcBef>
+              <a:spcAft>
+                <a:spcPts val="0"/>
+              </a:spcAft>
+              <a:buSzPts val="1100"/>
+              <a:buNone/>
+            </a:pPr>
+            <a:r>
+              <a:rPr b="1" i="0" lang="en" sz="1000" u="none" cap="none" strike="noStrike">
+                <a:solidFill>
+                  <a:srgbClr val="F28A61"/>
+                </a:solidFill>
+                <a:latin typeface="Calibri"/>
+                <a:ea typeface="Calibri"/>
+                <a:cs typeface="Calibri"/>
+                <a:sym typeface="Calibri"/>
+              </a:rPr>
+              <a:t>Appendix 3/3  |  Open Design Questions</a:t>
+            </a:r>
+            <a:endParaRPr/>
+          </a:p>
+          <a:p>
+            <a:pPr indent="0" lvl="0" marL="0" rtl="0" algn="l">
+              <a:lnSpc>
+                <a:spcPct val="100000"/>
+              </a:lnSpc>
+              <a:spcBef>
+                <a:spcPts val="0"/>
+              </a:spcBef>
+              <a:spcAft>
+                <a:spcPts val="0"/>
+              </a:spcAft>
+              <a:buSzPts val="1100"/>
+              <a:buNone/>
+            </a:pPr>
+            <a:r>
+              <a:t/>
+            </a:r>
+            <a:endParaRPr/>
+          </a:p>
+          <a:p>
+            <a:pPr indent="0" lvl="0" marL="0" rtl="0" algn="l">
+              <a:lnSpc>
+                <a:spcPct val="100000"/>
+              </a:lnSpc>
+              <a:spcBef>
+                <a:spcPts val="0"/>
+              </a:spcBef>
+              <a:spcAft>
+                <a:spcPts val="0"/>
+              </a:spcAft>
+              <a:buSzPts val="1100"/>
+              <a:buNone/>
+            </a:pPr>
+            <a:r>
+              <a:rPr b="1" lang="en">
+                <a:solidFill>
+                  <a:srgbClr val="F28A61"/>
+                </a:solidFill>
+                <a:latin typeface="Calibri"/>
+                <a:ea typeface="Calibri"/>
+                <a:cs typeface="Calibri"/>
+                <a:sym typeface="Calibri"/>
+              </a:rPr>
+              <a:t>FAQ:</a:t>
+            </a:r>
+            <a:endParaRPr/>
+          </a:p>
+          <a:p>
+            <a:pPr indent="0" lvl="0" marL="0" rtl="0" algn="l">
+              <a:lnSpc>
+                <a:spcPct val="100000"/>
+              </a:lnSpc>
+              <a:spcBef>
+                <a:spcPts val="0"/>
+              </a:spcBef>
+              <a:spcAft>
+                <a:spcPts val="0"/>
+              </a:spcAft>
+              <a:buSzPts val="1100"/>
+              <a:buNone/>
+            </a:pPr>
+            <a:r>
+              <a:t/>
+            </a:r>
+            <a:endParaRPr>
+              <a:solidFill>
+                <a:srgbClr val="1F2937"/>
+              </a:solidFill>
+              <a:latin typeface="Calibri"/>
+              <a:ea typeface="Calibri"/>
+              <a:cs typeface="Calibri"/>
+              <a:sym typeface="Calibri"/>
+            </a:endParaRPr>
+          </a:p>
+          <a:p>
+            <a:pPr indent="0" lvl="0" marL="0" rtl="0" algn="l">
+              <a:lnSpc>
+                <a:spcPct val="100000"/>
+              </a:lnSpc>
+              <a:spcBef>
+                <a:spcPts val="0"/>
+              </a:spcBef>
+              <a:spcAft>
+                <a:spcPts val="0"/>
+              </a:spcAft>
+              <a:buSzPts val="1100"/>
+              <a:buNone/>
+            </a:pPr>
+            <a:r>
+              <a:rPr lang="en">
+                <a:solidFill>
+                  <a:srgbClr val="1F2937"/>
+                </a:solidFill>
+                <a:latin typeface="Calibri"/>
+                <a:ea typeface="Calibri"/>
+                <a:cs typeface="Calibri"/>
+                <a:sym typeface="Calibri"/>
+              </a:rPr>
+              <a:t>What stops someone from just copying the file?</a:t>
+            </a:r>
+            <a:endParaRPr>
+              <a:solidFill>
+                <a:srgbClr val="1F2937"/>
+              </a:solidFill>
+              <a:latin typeface="Calibri"/>
+              <a:ea typeface="Calibri"/>
+              <a:cs typeface="Calibri"/>
+              <a:sym typeface="Calibri"/>
+            </a:endParaRPr>
+          </a:p>
+          <a:p>
+            <a:pPr indent="0" lvl="0" marL="0" rtl="0" algn="l">
+              <a:lnSpc>
+                <a:spcPct val="100000"/>
+              </a:lnSpc>
+              <a:spcBef>
+                <a:spcPts val="0"/>
+              </a:spcBef>
+              <a:spcAft>
+                <a:spcPts val="0"/>
+              </a:spcAft>
+              <a:buSzPts val="1100"/>
+              <a:buNone/>
+            </a:pPr>
+            <a:r>
+              <a:rPr lang="en">
+                <a:solidFill>
+                  <a:srgbClr val="1F2937"/>
+                </a:solidFill>
+                <a:latin typeface="Calibri"/>
+                <a:ea typeface="Calibri"/>
+                <a:cs typeface="Calibri"/>
+                <a:sym typeface="Calibri"/>
+              </a:rPr>
+              <a:t>What stops someone from distributing the file once copied?</a:t>
+            </a:r>
+            <a:endParaRPr>
+              <a:solidFill>
+                <a:srgbClr val="1F2937"/>
+              </a:solidFill>
+              <a:latin typeface="Calibri"/>
+              <a:ea typeface="Calibri"/>
+              <a:cs typeface="Calibri"/>
+              <a:sym typeface="Calibri"/>
+            </a:endParaRPr>
+          </a:p>
+          <a:p>
+            <a:pPr indent="0" lvl="0" marL="0" rtl="0" algn="l">
+              <a:lnSpc>
+                <a:spcPct val="100000"/>
+              </a:lnSpc>
+              <a:spcBef>
+                <a:spcPts val="0"/>
+              </a:spcBef>
+              <a:spcAft>
+                <a:spcPts val="0"/>
+              </a:spcAft>
+              <a:buSzPts val="1100"/>
+              <a:buNone/>
+            </a:pPr>
+            <a:r>
+              <a:t/>
+            </a:r>
+            <a:endParaRPr>
+              <a:solidFill>
+                <a:srgbClr val="1F2937"/>
+              </a:solidFill>
+              <a:latin typeface="Calibri"/>
+              <a:ea typeface="Calibri"/>
+              <a:cs typeface="Calibri"/>
+              <a:sym typeface="Calibri"/>
+            </a:endParaRPr>
+          </a:p>
+          <a:p>
+            <a:pPr indent="0" lvl="0" marL="0" rtl="0" algn="l">
+              <a:lnSpc>
+                <a:spcPct val="100000"/>
+              </a:lnSpc>
+              <a:spcBef>
+                <a:spcPts val="0"/>
+              </a:spcBef>
+              <a:spcAft>
+                <a:spcPts val="0"/>
+              </a:spcAft>
+              <a:buSzPts val="1100"/>
+              <a:buNone/>
+            </a:pPr>
+            <a:r>
+              <a:rPr lang="en">
+                <a:solidFill>
+                  <a:srgbClr val="1F2937"/>
+                </a:solidFill>
+                <a:latin typeface="Calibri"/>
+                <a:ea typeface="Calibri"/>
+                <a:cs typeface="Calibri"/>
+                <a:sym typeface="Calibri"/>
+              </a:rPr>
+              <a:t>Short answer: nothing stops the bits from being copied — but what buyers are paying for isn't really the bits, and the part they're paying for doesn't photocopy.</a:t>
+            </a:r>
+            <a:endParaRPr>
+              <a:solidFill>
+                <a:srgbClr val="1F2937"/>
+              </a:solidFill>
+              <a:latin typeface="Calibri"/>
+              <a:ea typeface="Calibri"/>
+              <a:cs typeface="Calibri"/>
+              <a:sym typeface="Calibri"/>
+            </a:endParaRPr>
+          </a:p>
+          <a:p>
+            <a:pPr indent="0" lvl="0" marL="0" rtl="0" algn="l">
+              <a:lnSpc>
+                <a:spcPct val="100000"/>
+              </a:lnSpc>
+              <a:spcBef>
+                <a:spcPts val="0"/>
+              </a:spcBef>
+              <a:spcAft>
+                <a:spcPts val="0"/>
+              </a:spcAft>
+              <a:buSzPts val="1100"/>
+              <a:buNone/>
+            </a:pPr>
+            <a:r>
+              <a:t/>
+            </a:r>
+            <a:endParaRPr>
+              <a:solidFill>
+                <a:srgbClr val="1F2937"/>
+              </a:solidFill>
+              <a:latin typeface="Calibri"/>
+              <a:ea typeface="Calibri"/>
+              <a:cs typeface="Calibri"/>
+              <a:sym typeface="Calibri"/>
+            </a:endParaRPr>
+          </a:p>
+          <a:p>
+            <a:pPr indent="0" lvl="0" marL="0" rtl="0" algn="l">
+              <a:lnSpc>
+                <a:spcPct val="100000"/>
+              </a:lnSpc>
+              <a:spcBef>
+                <a:spcPts val="0"/>
+              </a:spcBef>
+              <a:spcAft>
+                <a:spcPts val="0"/>
+              </a:spcAft>
+              <a:buSzPts val="1100"/>
+              <a:buNone/>
+            </a:pPr>
+            <a:r>
+              <a:rPr lang="en">
+                <a:solidFill>
+                  <a:srgbClr val="1F2937"/>
+                </a:solidFill>
+                <a:latin typeface="Calibri"/>
+                <a:ea typeface="Calibri"/>
+                <a:cs typeface="Calibri"/>
+                <a:sym typeface="Calibri"/>
+              </a:rPr>
+              <a:t>The Michelin star analogy. A 3-star restaurant's recipes can be xeroxed out the back door tomorrow. The star stays at the restaurant. That's because the star is a staked attestation by a credible authority — it travels with the kitchen, not the paper. AgentVouch sells the star, not the recipe. The Purchase account is your cryptographic proof that Author X has staked their AuthorBond on this skill working, and that N vouchers have staked Vouches on top. A pirated copy of skill.md has none of that envelope. It's just text.</a:t>
+            </a:r>
+            <a:endParaRPr>
+              <a:solidFill>
+                <a:srgbClr val="1F2937"/>
+              </a:solidFill>
+              <a:latin typeface="Calibri"/>
+              <a:ea typeface="Calibri"/>
+              <a:cs typeface="Calibri"/>
+              <a:sym typeface="Calibri"/>
+            </a:endParaRPr>
+          </a:p>
+          <a:p>
+            <a:pPr indent="0" lvl="0" marL="0" rtl="0" algn="l">
+              <a:lnSpc>
+                <a:spcPct val="100000"/>
+              </a:lnSpc>
+              <a:spcBef>
+                <a:spcPts val="0"/>
+              </a:spcBef>
+              <a:spcAft>
+                <a:spcPts val="0"/>
+              </a:spcAft>
+              <a:buSzPts val="1100"/>
+              <a:buNone/>
+            </a:pPr>
+            <a:r>
+              <a:t/>
+            </a:r>
+            <a:endParaRPr>
+              <a:solidFill>
+                <a:srgbClr val="1F2937"/>
+              </a:solidFill>
+              <a:latin typeface="Calibri"/>
+              <a:ea typeface="Calibri"/>
+              <a:cs typeface="Calibri"/>
+              <a:sym typeface="Calibri"/>
+            </a:endParaRPr>
+          </a:p>
+          <a:p>
+            <a:pPr indent="0" lvl="0" marL="0" rtl="0" algn="l">
+              <a:lnSpc>
+                <a:spcPct val="100000"/>
+              </a:lnSpc>
+              <a:spcBef>
+                <a:spcPts val="0"/>
+              </a:spcBef>
+              <a:spcAft>
+                <a:spcPts val="0"/>
+              </a:spcAft>
+              <a:buSzPts val="1100"/>
+              <a:buNone/>
+            </a:pPr>
+            <a:r>
+              <a:rPr lang="en">
+                <a:solidFill>
+                  <a:srgbClr val="1F2937"/>
+                </a:solidFill>
+                <a:latin typeface="Calibri"/>
+                <a:ea typeface="Calibri"/>
+                <a:cs typeface="Calibri"/>
+                <a:sym typeface="Calibri"/>
+              </a:rPr>
+              <a:t>From there, four reinforcing layers:</a:t>
+            </a:r>
+            <a:endParaRPr>
+              <a:solidFill>
+                <a:srgbClr val="1F2937"/>
+              </a:solidFill>
+              <a:latin typeface="Calibri"/>
+              <a:ea typeface="Calibri"/>
+              <a:cs typeface="Calibri"/>
+              <a:sym typeface="Calibri"/>
+            </a:endParaRPr>
+          </a:p>
+          <a:p>
+            <a:pPr indent="0" lvl="0" marL="0" rtl="0" algn="l">
+              <a:lnSpc>
+                <a:spcPct val="100000"/>
+              </a:lnSpc>
+              <a:spcBef>
+                <a:spcPts val="0"/>
+              </a:spcBef>
+              <a:spcAft>
+                <a:spcPts val="0"/>
+              </a:spcAft>
+              <a:buSzPts val="1100"/>
+              <a:buNone/>
+            </a:pPr>
+            <a:r>
+              <a:t/>
+            </a:r>
+            <a:endParaRPr>
+              <a:solidFill>
+                <a:srgbClr val="1F2937"/>
+              </a:solidFill>
+              <a:latin typeface="Calibri"/>
+              <a:ea typeface="Calibri"/>
+              <a:cs typeface="Calibri"/>
+              <a:sym typeface="Calibri"/>
+            </a:endParaRPr>
+          </a:p>
+          <a:p>
+            <a:pPr indent="0" lvl="0" marL="0" rtl="0" algn="l">
+              <a:lnSpc>
+                <a:spcPct val="100000"/>
+              </a:lnSpc>
+              <a:spcBef>
+                <a:spcPts val="0"/>
+              </a:spcBef>
+              <a:spcAft>
+                <a:spcPts val="0"/>
+              </a:spcAft>
+              <a:buSzPts val="1100"/>
+              <a:buNone/>
+            </a:pPr>
+            <a:r>
+              <a:rPr lang="en">
+                <a:solidFill>
+                  <a:srgbClr val="1F2937"/>
+                </a:solidFill>
+                <a:latin typeface="Calibri"/>
+                <a:ea typeface="Calibri"/>
+                <a:cs typeface="Calibri"/>
+                <a:sym typeface="Calibri"/>
+              </a:rPr>
+              <a:t>Per-purchase fingerprinting. Each Purchase can be bound to the buyer's wallet and (optionally) to a watermarked variant of the file. A leaked copy traces back to the wallet that bought it — which is the same wallet staking on the author's reputation. Leak it, and your own stake is at risk via open_author_dispute → slash. Think of it like leaked screeners in Hollywood: the copy is perfect, but the metadata burned into frame 12,847 tells Universal exactly which Academy member to sue.</a:t>
+            </a:r>
+            <a:endParaRPr>
+              <a:solidFill>
+                <a:srgbClr val="1F2937"/>
+              </a:solidFill>
+              <a:latin typeface="Calibri"/>
+              <a:ea typeface="Calibri"/>
+              <a:cs typeface="Calibri"/>
+              <a:sym typeface="Calibri"/>
+            </a:endParaRPr>
+          </a:p>
+          <a:p>
+            <a:pPr indent="0" lvl="0" marL="0" rtl="0" algn="l">
+              <a:lnSpc>
+                <a:spcPct val="100000"/>
+              </a:lnSpc>
+              <a:spcBef>
+                <a:spcPts val="0"/>
+              </a:spcBef>
+              <a:spcAft>
+                <a:spcPts val="0"/>
+              </a:spcAft>
+              <a:buSzPts val="1100"/>
+              <a:buNone/>
+            </a:pPr>
+            <a:r>
+              <a:rPr lang="en">
+                <a:solidFill>
+                  <a:srgbClr val="1F2937"/>
+                </a:solidFill>
+                <a:latin typeface="Calibri"/>
+                <a:ea typeface="Calibri"/>
+                <a:cs typeface="Calibri"/>
+                <a:sym typeface="Calibri"/>
+              </a:rPr>
+              <a:t>Runtime verification. Agents that actually care about quality (the ones with their own reputation on the line) will check the Purchase account on-chain before executing the skill — the same way macOS refuses to run unsigned binaries. You can pirate the code; you can't pirate the signature. This raises the friction: the pirate audience shrinks to hobbyist agents that don't care about reputation, which is exactly the audience that wasn't going to pay anyway.</a:t>
+            </a:r>
+            <a:endParaRPr>
+              <a:solidFill>
+                <a:srgbClr val="1F2937"/>
+              </a:solidFill>
+              <a:latin typeface="Calibri"/>
+              <a:ea typeface="Calibri"/>
+              <a:cs typeface="Calibri"/>
+              <a:sym typeface="Calibri"/>
+            </a:endParaRPr>
+          </a:p>
+          <a:p>
+            <a:pPr indent="0" lvl="0" marL="0" rtl="0" algn="l">
+              <a:lnSpc>
+                <a:spcPct val="100000"/>
+              </a:lnSpc>
+              <a:spcBef>
+                <a:spcPts val="0"/>
+              </a:spcBef>
+              <a:spcAft>
+                <a:spcPts val="0"/>
+              </a:spcAft>
+              <a:buSzPts val="1100"/>
+              <a:buNone/>
+            </a:pPr>
+            <a:r>
+              <a:rPr lang="en">
+                <a:solidFill>
+                  <a:srgbClr val="1F2937"/>
+                </a:solidFill>
+                <a:latin typeface="Calibri"/>
+                <a:ea typeface="Calibri"/>
+                <a:cs typeface="Calibri"/>
+                <a:sym typeface="Calibri"/>
+              </a:rPr>
+              <a:t>The file rots; the subscription doesn't. Skills aren't static — authors push fixes, adapt to new model versions, patch jailbreaks. Only legitimate Purchase holders get the updates, disputes, and voucher-backed support. Pirated Photoshop vs. Creative Cloud is the exact same dynamic: one goes stale, one keeps earning its keep.</a:t>
+            </a:r>
+            <a:endParaRPr>
+              <a:solidFill>
+                <a:srgbClr val="1F2937"/>
+              </a:solidFill>
+              <a:latin typeface="Calibri"/>
+              <a:ea typeface="Calibri"/>
+              <a:cs typeface="Calibri"/>
+              <a:sym typeface="Calibri"/>
+            </a:endParaRPr>
+          </a:p>
+          <a:p>
+            <a:pPr indent="0" lvl="0" marL="0" rtl="0" algn="l">
+              <a:lnSpc>
+                <a:spcPct val="100000"/>
+              </a:lnSpc>
+              <a:spcBef>
+                <a:spcPts val="0"/>
+              </a:spcBef>
+              <a:spcAft>
+                <a:spcPts val="0"/>
+              </a:spcAft>
+              <a:buSzPts val="1100"/>
+              <a:buNone/>
+            </a:pPr>
+            <a:r>
+              <a:rPr lang="en">
+                <a:solidFill>
+                  <a:srgbClr val="1F2937"/>
+                </a:solidFill>
+                <a:latin typeface="Calibri"/>
+                <a:ea typeface="Calibri"/>
+                <a:cs typeface="Calibri"/>
+                <a:sym typeface="Calibri"/>
+              </a:rPr>
+              <a:t>The vouchers are your enforcement army. Vouchers earn a revenue share when purchases land through their attestation. Every pirated copy is a purchase they didn't earn on. You've turned the people with the best signal about the skill's provenance into economically-motivated narcs — they're the ones most likely to spot and report a leaked copy, and the first open_author_dispute gets filed by whoever cares most.</a:t>
+            </a:r>
+            <a:endParaRPr>
+              <a:solidFill>
+                <a:srgbClr val="1F2937"/>
+              </a:solidFill>
+              <a:latin typeface="Calibri"/>
+              <a:ea typeface="Calibri"/>
+              <a:cs typeface="Calibri"/>
+              <a:sym typeface="Calibri"/>
+            </a:endParaRPr>
+          </a:p>
+          <a:p>
+            <a:pPr indent="0" lvl="0" marL="0" rtl="0" algn="l">
+              <a:lnSpc>
+                <a:spcPct val="100000"/>
+              </a:lnSpc>
+              <a:spcBef>
+                <a:spcPts val="0"/>
+              </a:spcBef>
+              <a:spcAft>
+                <a:spcPts val="0"/>
+              </a:spcAft>
+              <a:buSzPts val="1100"/>
+              <a:buNone/>
+            </a:pPr>
+            <a:r>
+              <a:rPr lang="en">
+                <a:solidFill>
+                  <a:srgbClr val="1F2937"/>
+                </a:solidFill>
+                <a:latin typeface="Calibri"/>
+                <a:ea typeface="Calibri"/>
+                <a:cs typeface="Calibri"/>
+                <a:sym typeface="Calibri"/>
+              </a:rPr>
+              <a:t>The honest caveat to bake into the answer: we're not claiming DRM. We're claiming that the valuable part of the transaction — the reputation badge, the update stream, the dispute protection, the runtime verifiability — is the part that physically cannot be copied, because it lives on-chain and is bound to a specific wallet. Copying the file gets you the least valuable artifact in the bundle.</a:t>
+            </a:r>
+            <a:endParaRPr>
+              <a:solidFill>
+                <a:srgbClr val="1F2937"/>
+              </a:solidFill>
+              <a:latin typeface="Calibri"/>
+              <a:ea typeface="Calibri"/>
+              <a:cs typeface="Calibri"/>
+              <a:sym typeface="Calibri"/>
+            </a:endParaRPr>
+          </a:p>
+          <a:p>
+            <a:pPr indent="0" lvl="0" marL="0" rtl="0" algn="l">
+              <a:lnSpc>
+                <a:spcPct val="100000"/>
+              </a:lnSpc>
+              <a:spcBef>
+                <a:spcPts val="0"/>
+              </a:spcBef>
+              <a:spcAft>
+                <a:spcPts val="0"/>
+              </a:spcAft>
+              <a:buSzPts val="1100"/>
+              <a:buNone/>
+            </a:pPr>
+            <a:r>
+              <a:t/>
+            </a:r>
+            <a:endParaRPr>
+              <a:solidFill>
+                <a:srgbClr val="1F2937"/>
+              </a:solidFill>
+              <a:latin typeface="Calibri"/>
+              <a:ea typeface="Calibri"/>
+              <a:cs typeface="Calibri"/>
+              <a:sym typeface="Calibri"/>
+            </a:endParaRPr>
+          </a:p>
+          <a:p>
+            <a:pPr indent="0" lvl="0" marL="0" rtl="0" algn="l">
+              <a:lnSpc>
+                <a:spcPct val="100000"/>
+              </a:lnSpc>
+              <a:spcBef>
+                <a:spcPts val="0"/>
+              </a:spcBef>
+              <a:spcAft>
+                <a:spcPts val="0"/>
+              </a:spcAft>
+              <a:buSzPts val="1100"/>
+              <a:buNone/>
+            </a:pPr>
+            <a:r>
+              <a:rPr lang="en">
+                <a:solidFill>
+                  <a:srgbClr val="1F2937"/>
+                </a:solidFill>
+                <a:latin typeface="Calibri"/>
+                <a:ea typeface="Calibri"/>
+                <a:cs typeface="Calibri"/>
+                <a:sym typeface="Calibri"/>
+              </a:rPr>
+              <a:t>If you want a one-liner for the judges: "You can copy the file, but you can't copy the stake behind it. We're selling the stake."</a:t>
+            </a:r>
+            <a:endParaRPr>
+              <a:solidFill>
+                <a:srgbClr val="1F2937"/>
+              </a:solidFill>
+              <a:latin typeface="Calibri"/>
+              <a:ea typeface="Calibri"/>
+              <a:cs typeface="Calibri"/>
+              <a:sym typeface="Calibri"/>
+            </a:endParaRPr>
+          </a:p>
+          <a:p>
+            <a:pPr indent="0" lvl="0" marL="0" rtl="0" algn="l">
+              <a:lnSpc>
+                <a:spcPct val="100000"/>
+              </a:lnSpc>
+              <a:spcBef>
+                <a:spcPts val="0"/>
+              </a:spcBef>
+              <a:spcAft>
+                <a:spcPts val="0"/>
+              </a:spcAft>
+              <a:buSzPts val="1100"/>
+              <a:buNone/>
+            </a:pPr>
+            <a:r>
+              <a:t/>
+            </a:r>
+            <a:endParaRPr/>
+          </a:p>
+          <a:p>
+            <a:pPr indent="0" lvl="0" marL="0" rtl="0" algn="l">
+              <a:lnSpc>
+                <a:spcPct val="100000"/>
+              </a:lnSpc>
+              <a:spcBef>
+                <a:spcPts val="0"/>
+              </a:spcBef>
+              <a:spcAft>
+                <a:spcPts val="0"/>
+              </a:spcAft>
+              <a:buSzPts val="1100"/>
+              <a:buNone/>
+            </a:pPr>
+            <a:r>
+              <a:rPr b="0" i="0" lang="en" sz="1100" u="none" cap="none" strike="noStrike">
+                <a:solidFill>
+                  <a:srgbClr val="1F2937"/>
+                </a:solidFill>
+                <a:latin typeface="Calibri"/>
+                <a:ea typeface="Calibri"/>
+                <a:cs typeface="Calibri"/>
+                <a:sym typeface="Calibri"/>
+              </a:rPr>
+              <a:t>(4) GOVERN?</a:t>
+            </a:r>
+            <a:endParaRPr/>
+          </a:p>
+          <a:p>
+            <a:pPr indent="0" lvl="0" marL="0" rtl="0" algn="l">
+              <a:lnSpc>
+                <a:spcPct val="100000"/>
+              </a:lnSpc>
+              <a:spcBef>
+                <a:spcPts val="0"/>
+              </a:spcBef>
+              <a:spcAft>
+                <a:spcPts val="0"/>
+              </a:spcAft>
+              <a:buSzPts val="1100"/>
+              <a:buNone/>
+            </a:pPr>
+            <a:r>
+              <a:rPr b="0" i="0" lang="en" sz="1100" u="none" cap="none" strike="noStrike">
+                <a:solidFill>
+                  <a:srgbClr val="1F2937"/>
+                </a:solidFill>
+                <a:latin typeface="Calibri"/>
+                <a:ea typeface="Calibri"/>
+                <a:cs typeface="Calibri"/>
+                <a:sym typeface="Calibri"/>
+              </a:rPr>
+              <a:t>• Multi-sig or DAO for dispute resolution at scale?</a:t>
+            </a:r>
+            <a:endParaRPr/>
+          </a:p>
+          <a:p>
+            <a:pPr indent="0" lvl="0" marL="0" rtl="0" algn="l">
+              <a:lnSpc>
+                <a:spcPct val="100000"/>
+              </a:lnSpc>
+              <a:spcBef>
+                <a:spcPts val="0"/>
+              </a:spcBef>
+              <a:spcAft>
+                <a:spcPts val="0"/>
+              </a:spcAft>
+              <a:buSzPts val="1100"/>
+              <a:buNone/>
+            </a:pPr>
+            <a:r>
+              <a:rPr b="0" i="0" lang="en" sz="1100" u="none" cap="none" strike="noStrike">
+                <a:solidFill>
+                  <a:srgbClr val="1F2937"/>
+                </a:solidFill>
+                <a:latin typeface="Calibri"/>
+                <a:ea typeface="Calibri"/>
+                <a:cs typeface="Calibri"/>
+                <a:sym typeface="Calibri"/>
+              </a:rPr>
+              <a:t>• Today: program authority. Options: multi-sig, stake-weighted voting, full DAO.</a:t>
+            </a:r>
+            <a:endParaRPr/>
+          </a:p>
+          <a:p>
+            <a:pPr indent="0" lvl="0" marL="0" rtl="0" algn="l">
+              <a:lnSpc>
+                <a:spcPct val="100000"/>
+              </a:lnSpc>
+              <a:spcBef>
+                <a:spcPts val="0"/>
+              </a:spcBef>
+              <a:spcAft>
+                <a:spcPts val="0"/>
+              </a:spcAft>
+              <a:buSzPts val="1100"/>
+              <a:buNone/>
+            </a:pPr>
+            <a:r>
+              <a:t/>
+            </a:r>
+            <a:endParaRPr/>
+          </a:p>
+          <a:p>
+            <a:pPr indent="0" lvl="0" marL="0" rtl="0" algn="l">
+              <a:lnSpc>
+                <a:spcPct val="100000"/>
+              </a:lnSpc>
+              <a:spcBef>
+                <a:spcPts val="0"/>
+              </a:spcBef>
+              <a:spcAft>
+                <a:spcPts val="0"/>
+              </a:spcAft>
+              <a:buSzPts val="1100"/>
+              <a:buNone/>
+            </a:pPr>
+            <a:r>
+              <a:rPr b="1" i="0" lang="en" sz="1100" u="none" cap="none" strike="noStrike">
+                <a:solidFill>
+                  <a:srgbClr val="F28A61"/>
+                </a:solidFill>
+                <a:latin typeface="Calibri"/>
+                <a:ea typeface="Calibri"/>
+                <a:cs typeface="Calibri"/>
+                <a:sym typeface="Calibri"/>
+              </a:rPr>
+              <a:t>CONTRIBUTE:</a:t>
+            </a:r>
+            <a:endParaRPr/>
+          </a:p>
+          <a:p>
+            <a:pPr indent="0" lvl="0" marL="0" rtl="0" algn="l">
+              <a:lnSpc>
+                <a:spcPct val="100000"/>
+              </a:lnSpc>
+              <a:spcBef>
+                <a:spcPts val="0"/>
+              </a:spcBef>
+              <a:spcAft>
+                <a:spcPts val="0"/>
+              </a:spcAft>
+              <a:buSzPts val="1100"/>
+              <a:buNone/>
+            </a:pPr>
+            <a:r>
+              <a:rPr b="0" i="0" lang="en" sz="1100" u="none" cap="none" strike="noStrike">
+                <a:solidFill>
+                  <a:srgbClr val="1F2937"/>
+                </a:solidFill>
+                <a:latin typeface="Calibri"/>
+                <a:ea typeface="Calibri"/>
+                <a:cs typeface="Calibri"/>
+                <a:sym typeface="Calibri"/>
+              </a:rPr>
+              <a:t>• github.com/dirtybits/agent-reputation-oracle</a:t>
+            </a:r>
+            <a:endParaRPr/>
+          </a:p>
+          <a:p>
+            <a:pPr indent="0" lvl="0" marL="0" rtl="0" algn="l">
+              <a:lnSpc>
+                <a:spcPct val="100000"/>
+              </a:lnSpc>
+              <a:spcBef>
+                <a:spcPts val="0"/>
+              </a:spcBef>
+              <a:spcAft>
+                <a:spcPts val="0"/>
+              </a:spcAft>
+              <a:buSzPts val="1100"/>
+              <a:buNone/>
+            </a:pPr>
+            <a:r>
+              <a:t/>
+            </a:r>
+            <a:endParaRPr/>
+          </a:p>
+          <a:p>
+            <a:pPr indent="0" lvl="0" marL="0" rtl="0" algn="l">
+              <a:lnSpc>
+                <a:spcPct val="100000"/>
+              </a:lnSpc>
+              <a:spcBef>
+                <a:spcPts val="0"/>
+              </a:spcBef>
+              <a:spcAft>
+                <a:spcPts val="0"/>
+              </a:spcAft>
+              <a:buSzPts val="1100"/>
+              <a:buNone/>
+            </a:pPr>
+            <a:r>
+              <a:rPr b="0" i="1" lang="en" sz="1000" u="none" cap="none" strike="noStrike">
+                <a:solidFill>
+                  <a:srgbClr val="F28A61"/>
+                </a:solidFill>
+                <a:latin typeface="Calibri"/>
+                <a:ea typeface="Calibri"/>
+                <a:cs typeface="Calibri"/>
+                <a:sym typeface="Calibri"/>
+              </a:rPr>
+              <a:t>Great slide to leave up during Q&amp;A.</a:t>
+            </a:r>
+            <a:endParaRPr/>
+          </a:p>
+          <a:p>
+            <a:pPr indent="0" lvl="0" marL="0" rtl="0" algn="l">
+              <a:lnSpc>
+                <a:spcPct val="100000"/>
+              </a:lnSpc>
+              <a:spcBef>
+                <a:spcPts val="0"/>
+              </a:spcBef>
+              <a:spcAft>
+                <a:spcPts val="0"/>
+              </a:spcAft>
+              <a:buSzPts val="1100"/>
+              <a:buNone/>
+            </a:pPr>
+            <a:r>
+              <a:t/>
+            </a:r>
+            <a:endParaRPr/>
+          </a:p>
+          <a:p>
+            <a:pPr indent="0" lvl="0" marL="0" rtl="0" algn="l">
+              <a:lnSpc>
+                <a:spcPct val="100000"/>
+              </a:lnSpc>
+              <a:spcBef>
+                <a:spcPts val="0"/>
+              </a:spcBef>
+              <a:spcAft>
+                <a:spcPts val="0"/>
+              </a:spcAft>
+              <a:buSzPts val="1100"/>
+              <a:buNone/>
+            </a:pPr>
+            <a:r>
+              <a:rPr b="0" i="0" lang="en" sz="1100" u="none" cap="none" strike="noStrike">
+                <a:solidFill>
+                  <a:srgbClr val="1F2937"/>
+                </a:solidFill>
+                <a:latin typeface="Calibri"/>
+                <a:ea typeface="Calibri"/>
+                <a:cs typeface="Calibri"/>
+                <a:sym typeface="Calibri"/>
+              </a:rPr>
+              <a:t>[SKELETON — REVIEW + REWRITE]</a:t>
+            </a:r>
+            <a:endParaRPr/>
+          </a:p>
+        </p:txBody>
+      </p:sp>
+      <p:sp>
+        <p:nvSpPr>
+          <p:cNvPr id="565" name="Google Shape;565;g3d72b5e3523_0_1:notes"/>
+          <p:cNvSpPr/>
+          <p:nvPr>
+            <p:ph idx="2" type="sldImg"/>
+          </p:nvPr>
+        </p:nvSpPr>
+        <p:spPr>
+          <a:xfrm>
+            <a:off x="381300" y="685800"/>
+            <a:ext cx="6096000" cy="3429000"/>
           </a:xfrm>
           <a:custGeom>
             <a:rect b="b" l="l" r="r" t="t"/>
@@ -19332,7 +20336,7 @@
 </file>
 
 <file path=ppt/slides/slide1.xml><?xml version="1.0" encoding="utf-8"?>
-<p:sld xmlns:a="http://schemas.openxmlformats.org/drawingml/2006/main" xmlns:r="http://schemas.openxmlformats.org/officeDocument/2006/relationships" xmlns:mc="http://schemas.openxmlformats.org/markup-compatibility/2006" xmlns:mv="urn:schemas-microsoft-com:mac:vml" xmlns:p="http://schemas.openxmlformats.org/presentationml/2006/main" xmlns:c="http://schemas.openxmlformats.org/drawingml/2006/chart" xmlns:dgm="http://schemas.openxmlformats.org/drawingml/2006/diagram" xmlns:o="urn:schemas-microsoft-com:office:office" xmlns:v="urn:schemas-microsoft-com:vml" xmlns:pvml="urn:schemas-microsoft-com:office:powerpoint" xmlns:com="http://schemas.openxmlformats.org/drawingml/2006/compatibility" xmlns:p14="http://schemas.microsoft.com/office/powerpoint/2010/main" xmlns:p15="http://schemas.microsoft.com/office/powerpoint/2012/main" xmlns:ahyp="http://schemas.microsoft.com/office/drawing/2018/hyperlinkcolor">
+<p:sld xmlns:a="http://schemas.openxmlformats.org/drawingml/2006/main" xmlns:p="http://schemas.openxmlformats.org/presentationml/2006/main" xmlns:r="http://schemas.openxmlformats.org/officeDocument/2006/relationships">
   <p:cSld>
     <p:bg>
       <p:bgPr>
@@ -19664,7 +20668,7 @@
                 <a:cs typeface="Inconsolata"/>
                 <a:sym typeface="Inconsolata"/>
               </a:rPr>
-              <a:t>Skills Marketplace  ·  Stake-based Vouching  ·  Programmable Trust</a:t>
+              <a:t>Skills Marketplace  ·  USDC-backed Vouching  ·  Programmable Trust</a:t>
             </a:r>
             <a:endParaRPr b="0" i="0" sz="1300" u="none" cap="none" strike="noStrike">
               <a:solidFill>
@@ -19733,7 +20737,7 @@
                 <a:cs typeface="Inconsolata"/>
                 <a:sym typeface="Inconsolata"/>
               </a:rPr>
-              <a:t>Colosseum Agent Hackathon  ·  Built for agents and people  ·  Solana Devnet</a:t>
+              <a:t>USDC-native v0.2.0  ·  Built for agents and people  ·  Solana Devnet</a:t>
             </a:r>
             <a:endParaRPr b="0" i="0" sz="1100" u="none" cap="none" strike="noStrike">
               <a:solidFill>
@@ -20250,7 +21254,7 @@
                 <a:cs typeface="Calibri"/>
                 <a:sym typeface="Calibri"/>
               </a:rPr>
-              <a:t>Two dispute paths — both backed by real economic consequences</a:t>
+              <a:t>Reports are skill-linked and backed by real economic consequences</a:t>
             </a:r>
             <a:endParaRPr b="0" i="0" sz="1400" u="none" cap="none" strike="noStrike">
               <a:solidFill>
@@ -20468,7 +21472,7 @@
                 <a:cs typeface="Inconsolata"/>
                 <a:sym typeface="Inconsolata"/>
               </a:rPr>
-              <a:t>Vouch</a:t>
+              <a:t>Free Skill</a:t>
             </a:r>
             <a:endParaRPr b="0" i="0" sz="1600" u="none" cap="none" strike="noStrike">
               <a:solidFill>
@@ -20574,7 +21578,7 @@
                 <a:cs typeface="Calibri"/>
                 <a:sym typeface="Calibri"/>
               </a:rPr>
-              <a:t>Challenger targets author citing malicious skill. Upheld: voucher stake slashed to challenger + bond returned. Vouch marked Slashed.</a:t>
+              <a:t>Challenger targets an author citing a bad free listing. Upheld: AuthorBond is first-loss capital; backing vouches are snapshot-linked for transparency.</a:t>
             </a:r>
             <a:endParaRPr b="0" i="0" sz="1200" u="none" cap="none" strike="noStrike">
               <a:solidFill>
@@ -20792,7 +21796,7 @@
                 <a:cs typeface="Inconsolata"/>
                 <a:sym typeface="Inconsolata"/>
               </a:rPr>
-              <a:t>Author</a:t>
+              <a:t>Paid Skill</a:t>
             </a:r>
             <a:endParaRPr b="0" i="0" sz="1600" u="none" cap="none" strike="noStrike">
               <a:solidFill>
@@ -20898,7 +21902,7 @@
                 <a:cs typeface="Calibri"/>
                 <a:sym typeface="Calibri"/>
               </a:rPr>
-              <a:t>Targets full author backing set atomically. AuthorBond slashed first, then backing vouchers proportionally. Upheld: bond returned to challenger.</a:t>
+              <a:t>Paid-skill disputes use AuthorBond first, then eligible linked backing vouchers according to stored liability scope.</a:t>
             </a:r>
             <a:endParaRPr b="0" i="0" sz="1200" u="none" cap="none" strike="noStrike">
               <a:solidFill>
@@ -21195,7 +22199,7 @@
                 <a:cs typeface="Calibri"/>
                 <a:sym typeface="Calibri"/>
               </a:rPr>
-              <a:t>Authors self-stake SOL as first-loss capital. Free-skill disputes: AuthorBond only. Paid-skill: AuthorBond then vouchers.</a:t>
+              <a:t>Authors post USDC AuthorBond as first-loss capital. Free listings require the configured bond floor.</a:t>
             </a:r>
             <a:endParaRPr b="0" i="0" sz="1200" u="none" cap="none" strike="noStrike">
               <a:solidFill>
@@ -21261,7 +22265,7 @@
                 <a:cs typeface="Calibri"/>
                 <a:sym typeface="Calibri"/>
               </a:rPr>
-              <a:t>Admin resolves disputes today  ·  Multi-sig / DAO governance on the roadmap</a:t>
+              <a:t>Authorized resolver today  ·  Multi-sig / DAO governance is a mainnet-readiness item</a:t>
             </a:r>
             <a:endParaRPr b="0" i="0" sz="1100" u="none" cap="none" strike="noStrike">
               <a:solidFill>
@@ -21777,7 +22781,7 @@
                 <a:cs typeface="Calibri"/>
                 <a:sym typeface="Calibri"/>
               </a:rPr>
-              <a:t>On-chain reputation — register, vouch, revoke, dispute, resolve</a:t>
+              <a:t>USDC-native reputation — register, bond, vouch, revoke, dispute, resolve</a:t>
             </a:r>
             <a:endParaRPr b="0" i="0" sz="1200" u="none" cap="none" strike="noStrike">
               <a:solidFill>
@@ -21973,7 +22977,7 @@
                 <a:cs typeface="Consolas"/>
                 <a:sym typeface="Consolas"/>
               </a:rPr>
-              <a:t>Skill marketplace — list, purchase, claim revenue</a:t>
+              <a:t>Skill marketplace — list, purchase, claim USDC rewards</a:t>
             </a:r>
             <a:endParaRPr b="0" i="0" sz="900" u="none" cap="none" strike="noStrike">
               <a:solidFill>
@@ -22093,7 +23097,7 @@
                 <a:cs typeface="Consolas"/>
                 <a:sym typeface="Consolas"/>
               </a:rPr>
-              <a:t>x402 payment flow — agents buy skills natively</a:t>
+              <a:t>Repo-backed x402 USDC flow — agents buy raw skills natively</a:t>
             </a:r>
             <a:endParaRPr b="0" i="0" sz="900" u="none" cap="none" strike="noStrike">
               <a:solidFill>
@@ -22253,7 +23257,7 @@
         <p:spPr>
           <a:xfrm>
             <a:off x="4846320" y="1691640"/>
-            <a:ext cx="3931920" cy="640080"/>
+            <a:ext cx="3931800" cy="640200"/>
           </a:xfrm>
           <a:prstGeom prst="rect">
             <a:avLst/>
@@ -22325,7 +23329,7 @@
             <a:avLst/>
           </a:prstGeom>
           <a:solidFill>
-            <a:srgbClr val="EF4444"/>
+            <a:srgbClr val="8FB5BF"/>
           </a:solidFill>
           <a:ln>
             <a:noFill/>
@@ -22450,7 +23454,7 @@
             <a:avLst/>
           </a:prstGeom>
           <a:solidFill>
-            <a:srgbClr val="EF4444"/>
+            <a:srgbClr val="8FB5BF"/>
           </a:solidFill>
           <a:ln>
             <a:noFill/>
@@ -22575,7 +23579,7 @@
             <a:avLst/>
           </a:prstGeom>
           <a:solidFill>
-            <a:srgbClr val="F59E0B"/>
+            <a:srgbClr val="8FB5BF"/>
           </a:solidFill>
           <a:ln>
             <a:noFill/>
@@ -22671,7 +23675,7 @@
                 <a:cs typeface="Calibri"/>
                 <a:sym typeface="Calibri"/>
               </a:rPr>
-              <a:t>Marketplace payout escrow (author proceeds PDA)</a:t>
+              <a:t>Milestone 13: escrowed proceeds + purchaser refunds (WIP)</a:t>
             </a:r>
             <a:endParaRPr b="0" i="0" sz="1100" u="none" cap="none" strike="noStrike">
               <a:solidFill>
@@ -22700,7 +23704,7 @@
             <a:avLst/>
           </a:prstGeom>
           <a:solidFill>
-            <a:srgbClr val="EF4444"/>
+            <a:srgbClr val="8FB5BF"/>
           </a:solidFill>
           <a:ln>
             <a:noFill/>
@@ -22796,7 +23800,31 @@
                 <a:cs typeface="Calibri"/>
                 <a:sym typeface="Calibri"/>
               </a:rPr>
-              <a:t>Multi-sig / DAO dispute governance</a:t>
+              <a:t>Multi-sig / DAO / Agent DON dispute governance</a:t>
+            </a:r>
+            <a:r>
+              <a:rPr lang="en" sz="1100">
+                <a:solidFill>
+                  <a:schemeClr val="dk2"/>
+                </a:solidFill>
+                <a:latin typeface="Calibri"/>
+                <a:ea typeface="Calibri"/>
+                <a:cs typeface="Calibri"/>
+                <a:sym typeface="Calibri"/>
+              </a:rPr>
+              <a:t/>
+            </a:r>
+            <a:r>
+              <a:rPr b="0" i="0" lang="en" sz="1100" u="none" cap="none" strike="noStrike">
+                <a:solidFill>
+                  <a:schemeClr val="dk2"/>
+                </a:solidFill>
+                <a:latin typeface="Calibri"/>
+                <a:ea typeface="Calibri"/>
+                <a:cs typeface="Calibri"/>
+                <a:sym typeface="Calibri"/>
+              </a:rPr>
+              <a:t/>
             </a:r>
             <a:endParaRPr b="0" i="0" sz="1100" u="none" cap="none" strike="noStrike">
               <a:solidFill>
@@ -22825,7 +23853,7 @@
             <a:avLst/>
           </a:prstGeom>
           <a:solidFill>
-            <a:srgbClr val="EF4444"/>
+            <a:srgbClr val="8FB5BF"/>
           </a:solidFill>
           <a:ln>
             <a:noFill/>
@@ -22912,7 +23940,7 @@
               <a:buNone/>
             </a:pPr>
             <a:r>
-              <a:rPr b="0" i="0" lang="en" sz="1100" u="none" cap="none" strike="noStrike">
+              <a:rPr lang="en" sz="1100">
                 <a:solidFill>
                   <a:schemeClr val="dk2"/>
                 </a:solidFill>
@@ -22921,7 +23949,43 @@
                 <a:cs typeface="Calibri"/>
                 <a:sym typeface="Calibri"/>
               </a:rPr>
-              <a:t>Multi-asset staking (USDC) — deferred to v2</a:t>
+              <a:t>SEO + LLM-facing docs</a:t>
+            </a:r>
+            <a:r>
+              <a:rPr b="0" i="0" lang="en" sz="1100" u="none" cap="none" strike="noStrike">
+                <a:solidFill>
+                  <a:schemeClr val="dk2"/>
+                </a:solidFill>
+                <a:latin typeface="Calibri"/>
+                <a:ea typeface="Calibri"/>
+                <a:cs typeface="Calibri"/>
+                <a:sym typeface="Calibri"/>
+              </a:rPr>
+              <a:t> refreshed in Milestone 14; </a:t>
+            </a:r>
+            <a:r>
+              <a:rPr lang="en" sz="1100">
+                <a:solidFill>
+                  <a:schemeClr val="dk2"/>
+                </a:solidFill>
+                <a:latin typeface="Calibri"/>
+                <a:ea typeface="Calibri"/>
+                <a:cs typeface="Calibri"/>
+                <a:sym typeface="Calibri"/>
+              </a:rPr>
+              <a:t>deck alignment </a:t>
+            </a:r>
+            <a:r>
+              <a:rPr b="0" i="0" lang="en" sz="1100" u="none" cap="none" strike="noStrike">
+                <a:solidFill>
+                  <a:schemeClr val="dk2"/>
+                </a:solidFill>
+                <a:latin typeface="Calibri"/>
+                <a:ea typeface="Calibri"/>
+                <a:cs typeface="Calibri"/>
+                <a:sym typeface="Calibri"/>
+              </a:rPr>
+              <a:t>is Milestone 15</a:t>
             </a:r>
             <a:endParaRPr b="0" i="0" sz="1100" u="none" cap="none" strike="noStrike">
               <a:solidFill>
@@ -22950,7 +24014,7 @@
             <a:avLst/>
           </a:prstGeom>
           <a:solidFill>
-            <a:srgbClr val="EF4444"/>
+            <a:srgbClr val="8FB5BF"/>
           </a:solidFill>
           <a:ln>
             <a:noFill/>
@@ -23119,23 +24183,16 @@
           </a:p>
         </p:txBody>
       </p:sp>
-      <p:pic>
-        <p:nvPicPr>
-          <p:cNvPr descr="preencoded.png" id="368" name="Google Shape;368;p24"/>
-          <p:cNvPicPr preferRelativeResize="0"/>
+      <p:sp>
+        <p:nvSpPr>
+          <p:cNvPr id="368" name="Google Shape;368;p24"/>
+          <p:cNvSpPr/>
           <p:nvPr/>
-        </p:nvPicPr>
-        <p:blipFill rotWithShape="1">
-          <a:blip r:embed="rId4">
-            <a:alphaModFix/>
-          </a:blip>
-          <a:srcRect b="0" l="0" r="0" t="0"/>
-          <a:stretch/>
-        </p:blipFill>
-        <p:spPr>
-          <a:xfrm>
-            <a:off x="640080" y="4293058"/>
-            <a:ext cx="320040" cy="320040"/>
+        </p:nvSpPr>
+        <p:spPr>
+          <a:xfrm>
+            <a:off x="1097275" y="4224525"/>
+            <a:ext cx="7315200" cy="480000"/>
           </a:xfrm>
           <a:prstGeom prst="rect">
             <a:avLst/>
@@ -23145,26 +24202,6 @@
             <a:noFill/>
           </a:ln>
         </p:spPr>
-      </p:pic>
-      <p:sp>
-        <p:nvSpPr>
-          <p:cNvPr id="369" name="Google Shape;369;p24"/>
-          <p:cNvSpPr/>
-          <p:nvPr/>
-        </p:nvSpPr>
-        <p:spPr>
-          <a:xfrm>
-            <a:off x="1097275" y="4224525"/>
-            <a:ext cx="7315200" cy="480000"/>
-          </a:xfrm>
-          <a:prstGeom prst="rect">
-            <a:avLst/>
-          </a:prstGeom>
-          <a:noFill/>
-          <a:ln>
-            <a:noFill/>
-          </a:ln>
-        </p:spPr>
         <p:txBody>
           <a:bodyPr anchorCtr="0" anchor="ctr" bIns="0" lIns="0" spcFirstLastPara="1" rIns="0" wrap="square" tIns="0">
             <a:noAutofit/>
@@ -23191,18 +24228,18 @@
             <a:r>
               <a:rPr b="0" i="0" lang="en" sz="1100" u="none" cap="none" strike="noStrike">
                 <a:solidFill>
-                  <a:srgbClr val="EF4444"/>
+                  <a:srgbClr val="8FB5BF"/>
                 </a:solidFill>
                 <a:latin typeface="Inconsolata"/>
                 <a:ea typeface="Inconsolata"/>
                 <a:cs typeface="Inconsolata"/>
                 <a:sym typeface="Inconsolata"/>
               </a:rPr>
-              <a:t>Program: ELmVnLSNuwNca4PfPqeqNowoUF8aDdtfto3rF9d89wf  •  Deployed: Solana Devnet</a:t>
+              <a:t>Program: AgNtCcWfeMYUzHxvGdZP5BJszQhx6NJGB4pQ7AN6XVWz  •  Deployed: Solana Devnet</a:t>
             </a:r>
             <a:endParaRPr b="0" i="0" sz="1100" u="none" cap="none" strike="noStrike">
               <a:solidFill>
-                <a:schemeClr val="dk1"/>
+                <a:srgbClr val="8FB5BF"/>
               </a:solidFill>
               <a:latin typeface="Inconsolata"/>
               <a:ea typeface="Inconsolata"/>
@@ -23214,7 +24251,7 @@
       </p:sp>
       <p:sp>
         <p:nvSpPr>
-          <p:cNvPr id="370" name="Google Shape;370;p24"/>
+          <p:cNvPr id="369" name="Google Shape;369;p24"/>
           <p:cNvSpPr/>
           <p:nvPr/>
         </p:nvSpPr>
@@ -23280,7 +24317,7 @@
       </p:sp>
       <p:sp>
         <p:nvSpPr>
-          <p:cNvPr id="371" name="Google Shape;371;p24"/>
+          <p:cNvPr id="370" name="Google Shape;370;p24"/>
           <p:cNvSpPr/>
           <p:nvPr/>
         </p:nvSpPr>
@@ -23344,6 +24381,34 @@
           </a:p>
         </p:txBody>
       </p:sp>
+      <p:pic>
+        <p:nvPicPr>
+          <p:cNvPr id="371" name="Google Shape;371;p24"/>
+          <p:cNvPicPr preferRelativeResize="0"/>
+          <p:nvPr/>
+        </p:nvPicPr>
+        <p:blipFill>
+          <a:blip r:embed="rId4">
+            <a:alphaModFix/>
+          </a:blip>
+          <a:stretch>
+            <a:fillRect/>
+          </a:stretch>
+        </p:blipFill>
+        <p:spPr>
+          <a:xfrm>
+            <a:off x="663150" y="4304475"/>
+            <a:ext cx="320100" cy="320100"/>
+          </a:xfrm>
+          <a:prstGeom prst="rect">
+            <a:avLst/>
+          </a:prstGeom>
+          <a:noFill/>
+          <a:ln>
+            <a:noFill/>
+          </a:ln>
+        </p:spPr>
+      </p:pic>
     </p:spTree>
   </p:cSld>
   <p:clrMapOvr>
@@ -23612,25 +24677,37 @@
               <a:buNone/>
             </a:pPr>
             <a:r>
-              <a:rPr b="0" i="0" lang="en" sz="1600" u="none" cap="none" strike="noStrike">
+              <a:rPr i="0" lang="en" sz="1500" u="none" cap="none" strike="noStrike">
                 <a:solidFill>
                   <a:srgbClr val="FD522F"/>
                 </a:solidFill>
-                <a:latin typeface="Calibri"/>
-                <a:ea typeface="Calibri"/>
-                <a:cs typeface="Calibri"/>
-                <a:sym typeface="Calibri"/>
-              </a:rPr>
-              <a:t>Watch an agent get vouched, disputed, and slashed on-chain in real-time</a:t>
-            </a:r>
-            <a:endParaRPr b="0" i="0" sz="1600" u="none" cap="none" strike="noStrike">
+                <a:latin typeface="Inconsolata"/>
+                <a:ea typeface="Inconsolata"/>
+                <a:cs typeface="Inconsolata"/>
+                <a:sym typeface="Inconsolata"/>
+              </a:rPr>
+              <a:t>Watch an agent </a:t>
+            </a:r>
+            <a:r>
+              <a:rPr lang="en" sz="1500">
+                <a:solidFill>
+                  <a:srgbClr val="FD522F"/>
+                </a:solidFill>
+                <a:latin typeface="Inconsolata"/>
+                <a:ea typeface="Inconsolata"/>
+                <a:cs typeface="Inconsolata"/>
+                <a:sym typeface="Inconsolata"/>
+              </a:rPr>
+              <a:t>find a skill and install it, publish a skill, vouch with USDC, and file a report</a:t>
+            </a:r>
+            <a:endParaRPr i="0" sz="1500" u="none" cap="none" strike="noStrike">
               <a:solidFill>
                 <a:srgbClr val="FD522F"/>
               </a:solidFill>
-              <a:latin typeface="Calibri"/>
-              <a:ea typeface="Calibri"/>
-              <a:cs typeface="Calibri"/>
-              <a:sym typeface="Calibri"/>
+              <a:latin typeface="Inconsolata"/>
+              <a:ea typeface="Inconsolata"/>
+              <a:cs typeface="Inconsolata"/>
+              <a:sym typeface="Inconsolata"/>
             </a:endParaRPr>
           </a:p>
         </p:txBody>
@@ -23643,8 +24720,8 @@
         </p:nvSpPr>
         <p:spPr>
           <a:xfrm>
-            <a:off x="457200" y="1920240"/>
-            <a:ext cx="1920240" cy="1645920"/>
+            <a:off x="457200" y="1920250"/>
+            <a:ext cx="1920300" cy="1645800"/>
           </a:xfrm>
           <a:prstGeom prst="rect">
             <a:avLst/>
@@ -23701,23 +24778,16 @@
           </a:p>
         </p:txBody>
       </p:sp>
-      <p:pic>
-        <p:nvPicPr>
-          <p:cNvPr descr="preencoded.png" id="382" name="Google Shape;382;p25"/>
-          <p:cNvPicPr preferRelativeResize="0"/>
+      <p:sp>
+        <p:nvSpPr>
+          <p:cNvPr id="382" name="Google Shape;382;p25"/>
+          <p:cNvSpPr/>
           <p:nvPr/>
-        </p:nvPicPr>
-        <p:blipFill rotWithShape="1">
-          <a:blip r:embed="rId4">
-            <a:alphaModFix/>
-          </a:blip>
-          <a:srcRect b="0" l="0" r="0" t="0"/>
-          <a:stretch/>
-        </p:blipFill>
-        <p:spPr>
-          <a:xfrm>
-            <a:off x="594360" y="2057400"/>
-            <a:ext cx="365760" cy="365760"/>
+        </p:nvSpPr>
+        <p:spPr>
+          <a:xfrm>
+            <a:off x="594360" y="2514600"/>
+            <a:ext cx="1645800" cy="320100"/>
           </a:xfrm>
           <a:prstGeom prst="rect">
             <a:avLst/>
@@ -23727,26 +24797,6 @@
             <a:noFill/>
           </a:ln>
         </p:spPr>
-      </p:pic>
-      <p:sp>
-        <p:nvSpPr>
-          <p:cNvPr id="383" name="Google Shape;383;p25"/>
-          <p:cNvSpPr/>
-          <p:nvPr/>
-        </p:nvSpPr>
-        <p:spPr>
-          <a:xfrm>
-            <a:off x="594360" y="2514600"/>
-            <a:ext cx="1645920" cy="320040"/>
-          </a:xfrm>
-          <a:prstGeom prst="rect">
-            <a:avLst/>
-          </a:prstGeom>
-          <a:noFill/>
-          <a:ln>
-            <a:noFill/>
-          </a:ln>
-        </p:spPr>
         <p:txBody>
           <a:bodyPr anchorCtr="0" anchor="ctr" bIns="0" lIns="0" spcFirstLastPara="1" rIns="0" wrap="square" tIns="0">
             <a:noAutofit/>
@@ -23771,7 +24821,7 @@
               <a:buNone/>
             </a:pPr>
             <a:r>
-              <a:rPr b="0" i="0" lang="en" sz="1400" u="none" cap="none" strike="noStrike">
+              <a:rPr lang="en">
                 <a:solidFill>
                   <a:srgbClr val="1F2937"/>
                 </a:solidFill>
@@ -23780,7 +24830,7 @@
                 <a:cs typeface="Inconsolata"/>
                 <a:sym typeface="Inconsolata"/>
               </a:rPr>
-              <a:t>Register Agent</a:t>
+              <a:t>Find Skill + Install</a:t>
             </a:r>
             <a:endParaRPr b="0" i="0" sz="1400" u="none" cap="none" strike="noStrike">
               <a:solidFill>
@@ -23796,14 +24846,14 @@
       </p:sp>
       <p:sp>
         <p:nvSpPr>
-          <p:cNvPr id="384" name="Google Shape;384;p25"/>
+          <p:cNvPr id="383" name="Google Shape;383;p25"/>
           <p:cNvSpPr/>
           <p:nvPr/>
         </p:nvSpPr>
         <p:spPr>
           <a:xfrm>
-            <a:off x="594360" y="2880360"/>
-            <a:ext cx="1645920" cy="502920"/>
+            <a:off x="594485" y="2926110"/>
+            <a:ext cx="1645800" cy="502800"/>
           </a:xfrm>
           <a:prstGeom prst="rect">
             <a:avLst/>
@@ -23837,7 +24887,7 @@
               <a:buNone/>
             </a:pPr>
             <a:r>
-              <a:rPr b="0" i="0" lang="en" sz="1100" u="none" cap="none" strike="noStrike">
+              <a:rPr lang="en" sz="1100">
                 <a:solidFill>
                   <a:srgbClr val="1F2937"/>
                 </a:solidFill>
@@ -23846,7 +24896,32 @@
                 <a:cs typeface="Calibri"/>
                 <a:sym typeface="Calibri"/>
               </a:rPr>
-              <a:t>Create on-chain profile with wallet</a:t>
+              <a:t>Agent reads agentvouch </a:t>
+            </a:r>
+            <a:r>
+              <a:rPr lang="en" sz="1100" u="sng">
+                <a:solidFill>
+                  <a:schemeClr val="hlink"/>
+                </a:solidFill>
+                <a:latin typeface="Calibri"/>
+                <a:ea typeface="Calibri"/>
+                <a:cs typeface="Calibri"/>
+                <a:sym typeface="Calibri"/>
+                <a:hlinkClick r:id="rId4"/>
+              </a:rPr>
+              <a:t>skill.md</a:t>
+            </a:r>
+            <a:r>
+              <a:rPr lang="en" sz="1100">
+                <a:solidFill>
+                  <a:srgbClr val="1F2937"/>
+                </a:solidFill>
+                <a:latin typeface="Calibri"/>
+                <a:ea typeface="Calibri"/>
+                <a:cs typeface="Calibri"/>
+                <a:sym typeface="Calibri"/>
+              </a:rPr>
+              <a:t> - finds the skill we’re looking for</a:t>
             </a:r>
             <a:endParaRPr b="0" i="0" sz="1100" u="none" cap="none" strike="noStrike">
               <a:solidFill>
@@ -23862,7 +24937,7 @@
       </p:sp>
       <p:sp>
         <p:nvSpPr>
-          <p:cNvPr id="385" name="Google Shape;385;p25"/>
+          <p:cNvPr id="384" name="Google Shape;384;p25"/>
           <p:cNvSpPr/>
           <p:nvPr/>
         </p:nvSpPr>
@@ -23928,7 +25003,7 @@
       </p:sp>
       <p:pic>
         <p:nvPicPr>
-          <p:cNvPr descr="preencoded.png" id="386" name="Google Shape;386;p25"/>
+          <p:cNvPr descr="preencoded.png" id="385" name="Google Shape;385;p25"/>
           <p:cNvPicPr preferRelativeResize="0"/>
           <p:nvPr/>
         </p:nvPicPr>
@@ -23941,7 +25016,7 @@
         </p:blipFill>
         <p:spPr>
           <a:xfrm>
-            <a:off x="2743200" y="2057400"/>
+            <a:off x="2743200" y="2103138"/>
             <a:ext cx="365760" cy="365760"/>
           </a:xfrm>
           <a:prstGeom prst="rect">
@@ -23955,7 +25030,7 @@
       </p:pic>
       <p:sp>
         <p:nvSpPr>
-          <p:cNvPr id="387" name="Google Shape;387;p25"/>
+          <p:cNvPr id="386" name="Google Shape;386;p25"/>
           <p:cNvSpPr/>
           <p:nvPr/>
         </p:nvSpPr>
@@ -24021,7 +25096,7 @@
       </p:sp>
       <p:sp>
         <p:nvSpPr>
-          <p:cNvPr id="388" name="Google Shape;388;p25"/>
+          <p:cNvPr id="387" name="Google Shape;387;p25"/>
           <p:cNvSpPr/>
           <p:nvPr/>
         </p:nvSpPr>
@@ -24071,7 +25146,7 @@
                 <a:cs typeface="Calibri"/>
                 <a:sym typeface="Calibri"/>
               </a:rPr>
-              <a:t>Vouch for an author with devnet SOL</a:t>
+              <a:t>Vouch for an author with devnet USDC</a:t>
             </a:r>
             <a:endParaRPr b="0" i="0" sz="1100" u="none" cap="none" strike="noStrike">
               <a:solidFill>
@@ -24087,14 +25162,14 @@
       </p:sp>
       <p:sp>
         <p:nvSpPr>
-          <p:cNvPr id="389" name="Google Shape;389;p25"/>
+          <p:cNvPr id="388" name="Google Shape;388;p25"/>
           <p:cNvSpPr/>
           <p:nvPr/>
         </p:nvSpPr>
         <p:spPr>
           <a:xfrm>
-            <a:off x="4754880" y="1920240"/>
-            <a:ext cx="1920240" cy="1645920"/>
+            <a:off x="6903680" y="1920303"/>
+            <a:ext cx="1920300" cy="1645800"/>
           </a:xfrm>
           <a:prstGeom prst="rect">
             <a:avLst/>
@@ -24153,7 +25228,7 @@
       </p:sp>
       <p:pic>
         <p:nvPicPr>
-          <p:cNvPr descr="preencoded.png" id="390" name="Google Shape;390;p25"/>
+          <p:cNvPr descr="preencoded.png" id="389" name="Google Shape;389;p25"/>
           <p:cNvPicPr preferRelativeResize="0"/>
           <p:nvPr/>
         </p:nvPicPr>
@@ -24166,7 +25241,7 @@
         </p:blipFill>
         <p:spPr>
           <a:xfrm>
-            <a:off x="4892040" y="2057400"/>
+            <a:off x="7040840" y="2057463"/>
             <a:ext cx="365760" cy="365760"/>
           </a:xfrm>
           <a:prstGeom prst="rect">
@@ -24180,14 +25255,14 @@
       </p:pic>
       <p:sp>
         <p:nvSpPr>
-          <p:cNvPr id="391" name="Google Shape;391;p25"/>
+          <p:cNvPr id="390" name="Google Shape;390;p25"/>
           <p:cNvSpPr/>
           <p:nvPr/>
         </p:nvSpPr>
         <p:spPr>
           <a:xfrm>
-            <a:off x="4892040" y="2514600"/>
-            <a:ext cx="1645920" cy="320040"/>
+            <a:off x="7040840" y="2514663"/>
+            <a:ext cx="1645800" cy="320100"/>
           </a:xfrm>
           <a:prstGeom prst="rect">
             <a:avLst/>
@@ -24230,7 +25305,19 @@
                 <a:cs typeface="Inconsolata"/>
                 <a:sym typeface="Inconsolata"/>
               </a:rPr>
-              <a:t>File a Claim</a:t>
+              <a:t>File a </a:t>
+            </a:r>
+            <a:r>
+              <a:rPr lang="en">
+                <a:solidFill>
+                  <a:srgbClr val="1F2937"/>
+                </a:solidFill>
+                <a:latin typeface="Inconsolata"/>
+                <a:ea typeface="Inconsolata"/>
+                <a:cs typeface="Inconsolata"/>
+                <a:sym typeface="Inconsolata"/>
+              </a:rPr>
+              <a:t>Report</a:t>
             </a:r>
             <a:endParaRPr b="0" i="0" sz="1400" u="none" cap="none" strike="noStrike">
               <a:solidFill>
@@ -24246,14 +25333,14 @@
       </p:sp>
       <p:sp>
         <p:nvSpPr>
-          <p:cNvPr id="392" name="Google Shape;392;p25"/>
+          <p:cNvPr id="391" name="Google Shape;391;p25"/>
           <p:cNvSpPr/>
           <p:nvPr/>
         </p:nvSpPr>
         <p:spPr>
           <a:xfrm>
-            <a:off x="4892040" y="2880360"/>
-            <a:ext cx="1645920" cy="502920"/>
+            <a:off x="7040840" y="2880423"/>
+            <a:ext cx="1645800" cy="502800"/>
           </a:xfrm>
           <a:prstGeom prst="rect">
             <a:avLst/>
@@ -24296,7 +25383,7 @@
                 <a:cs typeface="Calibri"/>
                 <a:sym typeface="Calibri"/>
               </a:rPr>
-              <a:t>Challenge the vouch with evidence</a:t>
+              <a:t>Open an author dispute with evidence</a:t>
             </a:r>
             <a:endParaRPr b="0" i="0" sz="1100" u="none" cap="none" strike="noStrike">
               <a:solidFill>
@@ -24312,14 +25399,14 @@
       </p:sp>
       <p:sp>
         <p:nvSpPr>
-          <p:cNvPr id="393" name="Google Shape;393;p25"/>
+          <p:cNvPr id="392" name="Google Shape;392;p25"/>
           <p:cNvSpPr/>
           <p:nvPr/>
         </p:nvSpPr>
         <p:spPr>
           <a:xfrm>
-            <a:off x="6903720" y="1920240"/>
-            <a:ext cx="1920240" cy="1645920"/>
+            <a:off x="4754820" y="1920240"/>
+            <a:ext cx="1920300" cy="1645800"/>
           </a:xfrm>
           <a:prstGeom prst="rect">
             <a:avLst/>
@@ -24376,23 +25463,16 @@
           </a:p>
         </p:txBody>
       </p:sp>
-      <p:pic>
-        <p:nvPicPr>
-          <p:cNvPr descr="preencoded.png" id="394" name="Google Shape;394;p25"/>
-          <p:cNvPicPr preferRelativeResize="0"/>
+      <p:sp>
+        <p:nvSpPr>
+          <p:cNvPr id="393" name="Google Shape;393;p25"/>
+          <p:cNvSpPr/>
           <p:nvPr/>
-        </p:nvPicPr>
-        <p:blipFill rotWithShape="1">
-          <a:blip r:embed="rId7">
-            <a:alphaModFix/>
-          </a:blip>
-          <a:srcRect b="0" l="0" r="0" t="0"/>
-          <a:stretch/>
-        </p:blipFill>
-        <p:spPr>
-          <a:xfrm>
-            <a:off x="7040880" y="2057400"/>
-            <a:ext cx="365760" cy="365760"/>
+        </p:nvSpPr>
+        <p:spPr>
+          <a:xfrm>
+            <a:off x="4891980" y="2514600"/>
+            <a:ext cx="1645800" cy="320100"/>
           </a:xfrm>
           <a:prstGeom prst="rect">
             <a:avLst/>
@@ -24402,26 +25482,6 @@
             <a:noFill/>
           </a:ln>
         </p:spPr>
-      </p:pic>
-      <p:sp>
-        <p:nvSpPr>
-          <p:cNvPr id="395" name="Google Shape;395;p25"/>
-          <p:cNvSpPr/>
-          <p:nvPr/>
-        </p:nvSpPr>
-        <p:spPr>
-          <a:xfrm>
-            <a:off x="7040880" y="2514600"/>
-            <a:ext cx="1645920" cy="320040"/>
-          </a:xfrm>
-          <a:prstGeom prst="rect">
-            <a:avLst/>
-          </a:prstGeom>
-          <a:noFill/>
-          <a:ln>
-            <a:noFill/>
-          </a:ln>
-        </p:spPr>
         <p:txBody>
           <a:bodyPr anchorCtr="0" anchor="ctr" bIns="0" lIns="0" spcFirstLastPara="1" rIns="0" wrap="square" tIns="0">
             <a:noAutofit/>
@@ -24446,7 +25506,7 @@
               <a:buNone/>
             </a:pPr>
             <a:r>
-              <a:rPr b="0" i="0" lang="en" sz="1400" u="none" cap="none" strike="noStrike">
+              <a:rPr lang="en">
                 <a:solidFill>
                   <a:srgbClr val="1F2937"/>
                 </a:solidFill>
@@ -24455,7 +25515,7 @@
                 <a:cs typeface="Inconsolata"/>
                 <a:sym typeface="Inconsolata"/>
               </a:rPr>
-              <a:t>Slash</a:t>
+              <a:t>Publish Skill</a:t>
             </a:r>
             <a:endParaRPr b="0" i="0" sz="1400" u="none" cap="none" strike="noStrike">
               <a:solidFill>
@@ -24471,14 +25531,14 @@
       </p:sp>
       <p:sp>
         <p:nvSpPr>
-          <p:cNvPr id="396" name="Google Shape;396;p25"/>
+          <p:cNvPr id="394" name="Google Shape;394;p25"/>
           <p:cNvSpPr/>
           <p:nvPr/>
         </p:nvSpPr>
         <p:spPr>
           <a:xfrm>
-            <a:off x="7040880" y="2880360"/>
-            <a:ext cx="1645920" cy="502920"/>
+            <a:off x="4891980" y="2880360"/>
+            <a:ext cx="1645800" cy="502800"/>
           </a:xfrm>
           <a:prstGeom prst="rect">
             <a:avLst/>
@@ -24512,7 +25572,7 @@
               <a:buNone/>
             </a:pPr>
             <a:r>
-              <a:rPr b="0" i="0" lang="en" sz="1100" u="none" cap="none" strike="noStrike">
+              <a:rPr lang="en" sz="1100">
                 <a:solidFill>
                   <a:srgbClr val="1F2937"/>
                 </a:solidFill>
@@ -24521,7 +25581,7 @@
                 <a:cs typeface="Calibri"/>
                 <a:sym typeface="Calibri"/>
               </a:rPr>
-              <a:t>Resolve dispute — voucher stake gets slashed</a:t>
+              <a:t>Create a USDC-priced skill listing</a:t>
             </a:r>
             <a:endParaRPr b="0" i="0" sz="1100" u="none" cap="none" strike="noStrike">
               <a:solidFill>
@@ -24537,7 +25597,7 @@
       </p:sp>
       <p:sp>
         <p:nvSpPr>
-          <p:cNvPr id="397" name="Google Shape;397;p25"/>
+          <p:cNvPr id="395" name="Google Shape;395;p25"/>
           <p:cNvSpPr/>
           <p:nvPr/>
         </p:nvSpPr>
@@ -24586,7 +25646,7 @@
                 <a:ea typeface="Consolas"/>
                 <a:cs typeface="Consolas"/>
                 <a:sym typeface="Consolas"/>
-                <a:hlinkClick r:id="rId8"/>
+                <a:hlinkClick r:id="rId7"/>
               </a:rPr>
               <a:t>agentvouch.xyz</a:t>
             </a:r>
@@ -24604,7 +25664,7 @@
       </p:sp>
       <p:sp>
         <p:nvSpPr>
-          <p:cNvPr id="398" name="Google Shape;398;p25"/>
+          <p:cNvPr id="396" name="Google Shape;396;p25"/>
           <p:cNvSpPr/>
           <p:nvPr/>
         </p:nvSpPr>
@@ -24654,7 +25714,7 @@
                 <a:cs typeface="Consolas"/>
                 <a:sym typeface="Consolas"/>
               </a:rPr>
-              <a:t>Program: ELmVnLSNuwNca4PfPqeqNowoUF8aDdtfto3rF9d89wf</a:t>
+              <a:t>Program: AgNtCcWfeMYUzHxvGdZP5BJszQhx6NJGB4pQ7AN6XVWz</a:t>
             </a:r>
             <a:endParaRPr b="0" i="0" sz="800" u="none" cap="none" strike="noStrike">
               <a:solidFill>
@@ -24670,7 +25730,7 @@
       </p:sp>
       <p:sp>
         <p:nvSpPr>
-          <p:cNvPr id="399" name="Google Shape;399;p25"/>
+          <p:cNvPr id="397" name="Google Shape;397;p25"/>
           <p:cNvSpPr/>
           <p:nvPr/>
         </p:nvSpPr>
@@ -24736,7 +25796,7 @@
       </p:sp>
       <p:sp>
         <p:nvSpPr>
-          <p:cNvPr id="400" name="Google Shape;400;p25"/>
+          <p:cNvPr id="398" name="Google Shape;398;p25"/>
           <p:cNvSpPr/>
           <p:nvPr/>
         </p:nvSpPr>
@@ -24800,6 +25860,88 @@
           </a:p>
         </p:txBody>
       </p:sp>
+      <p:pic>
+        <p:nvPicPr>
+          <p:cNvPr id="399" name="Google Shape;399;p25"/>
+          <p:cNvPicPr preferRelativeResize="0"/>
+          <p:nvPr/>
+        </p:nvPicPr>
+        <p:blipFill>
+          <a:blip r:embed="rId8">
+            <a:alphaModFix/>
+          </a:blip>
+          <a:stretch>
+            <a:fillRect/>
+          </a:stretch>
+        </p:blipFill>
+        <p:spPr>
+          <a:xfrm>
+            <a:off x="548625" y="2011670"/>
+            <a:ext cx="411475" cy="411475"/>
+          </a:xfrm>
+          <a:prstGeom prst="rect">
+            <a:avLst/>
+          </a:prstGeom>
+          <a:noFill/>
+          <a:ln>
+            <a:noFill/>
+          </a:ln>
+        </p:spPr>
+      </p:pic>
+      <p:pic>
+        <p:nvPicPr>
+          <p:cNvPr descr="preencoded.png" id="400" name="Google Shape;400;p25"/>
+          <p:cNvPicPr preferRelativeResize="0"/>
+          <p:nvPr/>
+        </p:nvPicPr>
+        <p:blipFill rotWithShape="1">
+          <a:blip r:embed="rId9">
+            <a:alphaModFix/>
+          </a:blip>
+          <a:srcRect b="0" l="0" r="0" t="0"/>
+          <a:stretch/>
+        </p:blipFill>
+        <p:spPr>
+          <a:xfrm>
+            <a:off x="4892010" y="2057388"/>
+            <a:ext cx="365760" cy="365760"/>
+          </a:xfrm>
+          <a:prstGeom prst="rect">
+            <a:avLst/>
+          </a:prstGeom>
+          <a:noFill/>
+          <a:ln>
+            <a:noFill/>
+          </a:ln>
+        </p:spPr>
+      </p:pic>
+      <p:pic>
+        <p:nvPicPr>
+          <p:cNvPr id="401" name="Google Shape;401;p25" title="install-line (1).png"/>
+          <p:cNvPicPr preferRelativeResize="0"/>
+          <p:nvPr/>
+        </p:nvPicPr>
+        <p:blipFill rotWithShape="1">
+          <a:blip r:embed="rId10">
+            <a:alphaModFix/>
+          </a:blip>
+          <a:srcRect b="0" l="0" r="0" t="0"/>
+          <a:stretch/>
+        </p:blipFill>
+        <p:spPr>
+          <a:xfrm>
+            <a:off x="1071050" y="2034541"/>
+            <a:ext cx="365750" cy="365750"/>
+          </a:xfrm>
+          <a:prstGeom prst="rect">
+            <a:avLst/>
+          </a:prstGeom>
+          <a:noFill/>
+          <a:ln>
+            <a:noFill/>
+          </a:ln>
+        </p:spPr>
+      </p:pic>
     </p:spTree>
   </p:cSld>
   <p:clrMapOvr>
@@ -24820,7 +25962,7 @@
     </p:bg>
     <p:spTree>
       <p:nvGrpSpPr>
-        <p:cNvPr id="405" name="Shape 405"/>
+        <p:cNvPr id="406" name="Shape 406"/>
         <p:cNvGrpSpPr/>
         <p:nvPr/>
       </p:nvGrpSpPr>
@@ -24834,7 +25976,7 @@
       </p:grpSpPr>
       <p:sp>
         <p:nvSpPr>
-          <p:cNvPr id="406" name="Google Shape;406;p26"/>
+          <p:cNvPr id="407" name="Google Shape;407;p26"/>
           <p:cNvSpPr/>
           <p:nvPr/>
         </p:nvSpPr>
@@ -24895,7 +26037,7 @@
       </p:sp>
       <p:sp>
         <p:nvSpPr>
-          <p:cNvPr id="407" name="Google Shape;407;p26"/>
+          <p:cNvPr id="408" name="Google Shape;408;p26"/>
           <p:cNvSpPr/>
           <p:nvPr/>
         </p:nvSpPr>
@@ -24956,7 +26098,7 @@
       </p:sp>
       <p:sp>
         <p:nvSpPr>
-          <p:cNvPr id="408" name="Google Shape;408;p26"/>
+          <p:cNvPr id="409" name="Google Shape;409;p26"/>
           <p:cNvSpPr/>
           <p:nvPr/>
         </p:nvSpPr>
@@ -25022,7 +26164,7 @@
       </p:sp>
       <p:sp>
         <p:nvSpPr>
-          <p:cNvPr id="409" name="Google Shape;409;p26"/>
+          <p:cNvPr id="410" name="Google Shape;410;p26"/>
           <p:cNvSpPr/>
           <p:nvPr/>
         </p:nvSpPr>
@@ -25088,7 +26230,7 @@
       </p:sp>
       <p:sp>
         <p:nvSpPr>
-          <p:cNvPr id="410" name="Google Shape;410;p26"/>
+          <p:cNvPr id="411" name="Google Shape;411;p26"/>
           <p:cNvSpPr/>
           <p:nvPr/>
         </p:nvSpPr>
@@ -25138,7 +26280,7 @@
                 <a:cs typeface="Calibri"/>
                 <a:sym typeface="Calibri"/>
               </a:rPr>
-              <a:t>Get free devnet SOL: </a:t>
+              <a:t>Devnet testing still needs SOL for fees/rent; USDC is the protocol capital.</a:t>
             </a:r>
             <a:r>
               <a:rPr b="0" i="0" lang="en" sz="1400" u="sng" cap="none" strike="noStrike">
@@ -25151,7 +26293,7 @@
                 <a:sym typeface="Calibri"/>
                 <a:hlinkClick r:id="rId3"/>
               </a:rPr>
-              <a:t>faucet.solana.com</a:t>
+              <a:t/>
             </a:r>
             <a:r>
               <a:rPr b="0" i="0" lang="en" sz="1400" u="none" cap="none" strike="noStrike">
@@ -25163,7 +26305,7 @@
                 <a:cs typeface="Calibri"/>
                 <a:sym typeface="Calibri"/>
               </a:rPr>
-              <a:t> or just ask me and I’ll send you some</a:t>
+              <a:t/>
             </a:r>
             <a:endParaRPr b="0" i="0" sz="1400" u="none" cap="none" strike="noStrike">
               <a:solidFill>
@@ -25179,7 +26321,7 @@
       </p:sp>
       <p:sp>
         <p:nvSpPr>
-          <p:cNvPr id="411" name="Google Shape;411;p26"/>
+          <p:cNvPr id="412" name="Google Shape;412;p26"/>
           <p:cNvSpPr/>
           <p:nvPr/>
         </p:nvSpPr>
@@ -25245,7 +26387,7 @@
       </p:sp>
       <p:sp>
         <p:nvSpPr>
-          <p:cNvPr id="412" name="Google Shape;412;p26"/>
+          <p:cNvPr id="413" name="Google Shape;413;p26"/>
           <p:cNvSpPr/>
           <p:nvPr/>
         </p:nvSpPr>
@@ -25391,7 +26533,7 @@
       </p:sp>
       <p:sp>
         <p:nvSpPr>
-          <p:cNvPr id="413" name="Google Shape;413;p26"/>
+          <p:cNvPr id="414" name="Google Shape;414;p26"/>
           <p:cNvSpPr/>
           <p:nvPr/>
         </p:nvSpPr>
@@ -25457,7 +26599,7 @@
       </p:sp>
       <p:sp>
         <p:nvSpPr>
-          <p:cNvPr id="414" name="Google Shape;414;p26"/>
+          <p:cNvPr id="415" name="Google Shape;415;p26"/>
           <p:cNvSpPr/>
           <p:nvPr/>
         </p:nvSpPr>
@@ -25507,7 +26649,7 @@
                 <a:cs typeface="Arial Black"/>
                 <a:sym typeface="Arial Black"/>
               </a:rPr>
-              <a:t>Built by Andy (dirtybits) + Sparky (OpenClaw)</a:t>
+              <a:t>Built by Andy (dirtybits) </a:t>
             </a:r>
             <a:endParaRPr b="0" i="0" sz="1400" u="none" cap="none" strike="noStrike">
               <a:solidFill>
@@ -25587,7 +26729,7 @@
                 <a:cs typeface="Calibri"/>
                 <a:sym typeface="Calibri"/>
               </a:rPr>
-              <a:t>Colosseum Agent Hackathon · Feb 2026</a:t>
+              <a:t>May 2026</a:t>
             </a:r>
             <a:endParaRPr b="0" i="0" sz="1400" u="none" cap="none" strike="noStrike">
               <a:solidFill>
@@ -25603,7 +26745,7 @@
       </p:sp>
       <p:sp>
         <p:nvSpPr>
-          <p:cNvPr id="415" name="Google Shape;415;p26"/>
+          <p:cNvPr id="416" name="Google Shape;416;p26"/>
           <p:cNvSpPr/>
           <p:nvPr/>
         </p:nvSpPr>
@@ -25669,7 +26811,7 @@
       </p:sp>
       <p:sp>
         <p:nvSpPr>
-          <p:cNvPr id="416" name="Google Shape;416;p26"/>
+          <p:cNvPr id="417" name="Google Shape;417;p26"/>
           <p:cNvSpPr/>
           <p:nvPr/>
         </p:nvSpPr>
@@ -25766,7 +26908,7 @@
       </p:sp>
       <p:pic>
         <p:nvPicPr>
-          <p:cNvPr id="417" name="Google Shape;417;p26" title="favicon.png"/>
+          <p:cNvPr id="418" name="Google Shape;418;p26" title="favicon.png"/>
           <p:cNvPicPr preferRelativeResize="0"/>
           <p:nvPr/>
         </p:nvPicPr>
@@ -25811,7 +26953,7 @@
     </p:bg>
     <p:spTree>
       <p:nvGrpSpPr>
-        <p:cNvPr id="422" name="Shape 422"/>
+        <p:cNvPr id="423" name="Shape 423"/>
         <p:cNvGrpSpPr/>
         <p:nvPr/>
       </p:nvGrpSpPr>
@@ -25825,7 +26967,7 @@
       </p:grpSpPr>
       <p:sp>
         <p:nvSpPr>
-          <p:cNvPr id="423" name="Google Shape;423;p27"/>
+          <p:cNvPr id="424" name="Google Shape;424;p27"/>
           <p:cNvSpPr/>
           <p:nvPr/>
         </p:nvSpPr>
@@ -25886,7 +27028,7 @@
       </p:sp>
       <p:sp>
         <p:nvSpPr>
-          <p:cNvPr id="424" name="Google Shape;424;p27"/>
+          <p:cNvPr id="425" name="Google Shape;425;p27"/>
           <p:cNvSpPr/>
           <p:nvPr/>
         </p:nvSpPr>
@@ -25952,7 +27094,7 @@
       </p:sp>
       <p:sp>
         <p:nvSpPr>
-          <p:cNvPr id="425" name="Google Shape;425;p27"/>
+          <p:cNvPr id="426" name="Google Shape;426;p27"/>
           <p:cNvSpPr/>
           <p:nvPr/>
         </p:nvSpPr>
@@ -26018,7 +27160,7 @@
       </p:sp>
       <p:sp>
         <p:nvSpPr>
-          <p:cNvPr id="426" name="Google Shape;426;p27"/>
+          <p:cNvPr id="427" name="Google Shape;427;p27"/>
           <p:cNvSpPr/>
           <p:nvPr/>
         </p:nvSpPr>
@@ -26068,7 +27210,7 @@
                 <a:cs typeface="Inconsolata"/>
                 <a:sym typeface="Inconsolata"/>
               </a:rPr>
-              <a:t>8 On-Chain Accounts</a:t>
+              <a:t>9 Anchor Account Structs</a:t>
             </a:r>
             <a:endParaRPr b="0" i="0" sz="1600" u="none" cap="none" strike="noStrike">
               <a:solidFill>
@@ -26084,14 +27226,14 @@
       </p:sp>
       <p:sp>
         <p:nvSpPr>
-          <p:cNvPr id="427" name="Google Shape;427;p27"/>
+          <p:cNvPr id="428" name="Google Shape;428;p27"/>
           <p:cNvSpPr/>
           <p:nvPr/>
         </p:nvSpPr>
         <p:spPr>
           <a:xfrm>
             <a:off x="457200" y="1645920"/>
-            <a:ext cx="3931920" cy="301752"/>
+            <a:ext cx="3931920" cy="365760"/>
           </a:xfrm>
           <a:prstGeom prst="rect">
             <a:avLst/>
@@ -26143,14 +27285,14 @@
       </p:sp>
       <p:sp>
         <p:nvSpPr>
-          <p:cNvPr id="428" name="Google Shape;428;p27"/>
+          <p:cNvPr id="429" name="Google Shape;429;p27"/>
           <p:cNvSpPr/>
           <p:nvPr/>
         </p:nvSpPr>
         <p:spPr>
           <a:xfrm>
             <a:off x="594360" y="1645920"/>
-            <a:ext cx="1645920" cy="301752"/>
+            <a:ext cx="1645920" cy="365760"/>
           </a:xfrm>
           <a:prstGeom prst="rect">
             <a:avLst/>
@@ -26209,14 +27351,14 @@
       </p:sp>
       <p:sp>
         <p:nvSpPr>
-          <p:cNvPr id="429" name="Google Shape;429;p27"/>
+          <p:cNvPr id="430" name="Google Shape;430;p27"/>
           <p:cNvSpPr/>
           <p:nvPr/>
         </p:nvSpPr>
         <p:spPr>
           <a:xfrm>
             <a:off x="2286000" y="1645920"/>
-            <a:ext cx="1920240" cy="301752"/>
+            <a:ext cx="1920240" cy="365760"/>
           </a:xfrm>
           <a:prstGeom prst="rect">
             <a:avLst/>
@@ -26259,7 +27401,7 @@
                 <a:cs typeface="Calibri"/>
                 <a:sym typeface="Calibri"/>
               </a:rPr>
-              <a:t>Global config: stake, bond, weights</a:t>
+              <a:t>Global params (USDC mint, floors, authorities)</a:t>
             </a:r>
             <a:endParaRPr b="0" i="0" sz="1000" u="none" cap="none" strike="noStrike">
               <a:solidFill>
@@ -26275,14 +27417,14 @@
       </p:sp>
       <p:sp>
         <p:nvSpPr>
-          <p:cNvPr id="430" name="Google Shape;430;p27"/>
+          <p:cNvPr id="431" name="Google Shape;431;p27"/>
           <p:cNvSpPr/>
           <p:nvPr/>
         </p:nvSpPr>
         <p:spPr>
           <a:xfrm>
-            <a:off x="457200" y="1947672"/>
-            <a:ext cx="3931920" cy="301752"/>
+            <a:off x="457200" y="2057400"/>
+            <a:ext cx="3931920" cy="365760"/>
           </a:xfrm>
           <a:prstGeom prst="rect">
             <a:avLst/>
@@ -26334,14 +27476,14 @@
       </p:sp>
       <p:sp>
         <p:nvSpPr>
-          <p:cNvPr id="431" name="Google Shape;431;p27"/>
+          <p:cNvPr id="432" name="Google Shape;432;p27"/>
           <p:cNvSpPr/>
           <p:nvPr/>
         </p:nvSpPr>
         <p:spPr>
           <a:xfrm>
-            <a:off x="594360" y="1947672"/>
-            <a:ext cx="1645920" cy="301752"/>
+            <a:off x="594360" y="2057400"/>
+            <a:ext cx="1645920" cy="365760"/>
           </a:xfrm>
           <a:prstGeom prst="rect">
             <a:avLst/>
@@ -26400,14 +27542,14 @@
       </p:sp>
       <p:sp>
         <p:nvSpPr>
-          <p:cNvPr id="432" name="Google Shape;432;p27"/>
+          <p:cNvPr id="433" name="Google Shape;433;p27"/>
           <p:cNvSpPr/>
           <p:nvPr/>
         </p:nvSpPr>
         <p:spPr>
           <a:xfrm>
-            <a:off x="2286000" y="1947672"/>
-            <a:ext cx="1920240" cy="301752"/>
+            <a:off x="2286000" y="2057400"/>
+            <a:ext cx="1920240" cy="365760"/>
           </a:xfrm>
           <a:prstGeom prst="rect">
             <a:avLst/>
@@ -26450,7 +27592,7 @@
                 <a:cs typeface="Calibri"/>
                 <a:sym typeface="Calibri"/>
               </a:rPr>
-              <a:t>Identity + computed reputation score</a:t>
+              <a:t>Identity + computed reputation</a:t>
             </a:r>
             <a:endParaRPr b="0" i="0" sz="1000" u="none" cap="none" strike="noStrike">
               <a:solidFill>
@@ -26466,14 +27608,14 @@
       </p:sp>
       <p:sp>
         <p:nvSpPr>
-          <p:cNvPr id="433" name="Google Shape;433;p27"/>
+          <p:cNvPr id="434" name="Google Shape;434;p27"/>
           <p:cNvSpPr/>
           <p:nvPr/>
         </p:nvSpPr>
         <p:spPr>
           <a:xfrm>
-            <a:off x="457200" y="2249424"/>
-            <a:ext cx="3931920" cy="301752"/>
+            <a:off x="457200" y="2468880"/>
+            <a:ext cx="3931920" cy="365760"/>
           </a:xfrm>
           <a:prstGeom prst="rect">
             <a:avLst/>
@@ -26525,14 +27667,14 @@
       </p:sp>
       <p:sp>
         <p:nvSpPr>
-          <p:cNvPr id="434" name="Google Shape;434;p27"/>
+          <p:cNvPr id="435" name="Google Shape;435;p27"/>
           <p:cNvSpPr/>
           <p:nvPr/>
         </p:nvSpPr>
         <p:spPr>
           <a:xfrm>
-            <a:off x="594360" y="2249424"/>
-            <a:ext cx="1645920" cy="301752"/>
+            <a:off x="594360" y="2468880"/>
+            <a:ext cx="1645920" cy="365760"/>
           </a:xfrm>
           <a:prstGeom prst="rect">
             <a:avLst/>
@@ -26575,7 +27717,7 @@
                 <a:cs typeface="Consolas"/>
                 <a:sym typeface="Consolas"/>
               </a:rPr>
-              <a:t>Vouch</a:t>
+              <a:t>AuthorBond / Vouch</a:t>
             </a:r>
             <a:endParaRPr b="0" i="0" sz="1100" u="none" cap="none" strike="noStrike">
               <a:solidFill>
@@ -26591,14 +27733,14 @@
       </p:sp>
       <p:sp>
         <p:nvSpPr>
-          <p:cNvPr id="435" name="Google Shape;435;p27"/>
+          <p:cNvPr id="436" name="Google Shape;436;p27"/>
           <p:cNvSpPr/>
           <p:nvPr/>
         </p:nvSpPr>
         <p:spPr>
           <a:xfrm>
-            <a:off x="2286000" y="2249424"/>
-            <a:ext cx="1920240" cy="301752"/>
+            <a:off x="2286000" y="2468880"/>
+            <a:ext cx="1920240" cy="365760"/>
           </a:xfrm>
           <a:prstGeom prst="rect">
             <a:avLst/>
@@ -26641,7 +27783,7 @@
                 <a:cs typeface="Calibri"/>
                 <a:sym typeface="Calibri"/>
               </a:rPr>
-              <a:t>Stake-backed endorsement</a:t>
+              <a:t>USDC-backed self-stake and endorsements</a:t>
             </a:r>
             <a:endParaRPr b="0" i="0" sz="1000" u="none" cap="none" strike="noStrike">
               <a:solidFill>
@@ -26657,14 +27799,14 @@
       </p:sp>
       <p:sp>
         <p:nvSpPr>
-          <p:cNvPr id="436" name="Google Shape;436;p27"/>
+          <p:cNvPr id="437" name="Google Shape;437;p27"/>
           <p:cNvSpPr/>
           <p:nvPr/>
         </p:nvSpPr>
         <p:spPr>
           <a:xfrm>
-            <a:off x="457200" y="2551176"/>
-            <a:ext cx="3931920" cy="301752"/>
+            <a:off x="457200" y="2880360"/>
+            <a:ext cx="3931920" cy="365760"/>
           </a:xfrm>
           <a:prstGeom prst="rect">
             <a:avLst/>
@@ -26716,14 +27858,14 @@
       </p:sp>
       <p:sp>
         <p:nvSpPr>
-          <p:cNvPr id="437" name="Google Shape;437;p27"/>
+          <p:cNvPr id="438" name="Google Shape;438;p27"/>
           <p:cNvSpPr/>
           <p:nvPr/>
         </p:nvSpPr>
         <p:spPr>
           <a:xfrm>
-            <a:off x="594360" y="2551176"/>
-            <a:ext cx="1645920" cy="301752"/>
+            <a:off x="594360" y="2880360"/>
+            <a:ext cx="1645920" cy="365760"/>
           </a:xfrm>
           <a:prstGeom prst="rect">
             <a:avLst/>
@@ -26766,7 +27908,7 @@
                 <a:cs typeface="Consolas"/>
                 <a:sym typeface="Consolas"/>
               </a:rPr>
-              <a:t>AuthorDispute</a:t>
+              <a:t>AuthorDispute / VouchLink</a:t>
             </a:r>
             <a:endParaRPr b="0" i="0" sz="1100" u="none" cap="none" strike="noStrike">
               <a:solidFill>
@@ -26782,14 +27924,14 @@
       </p:sp>
       <p:sp>
         <p:nvSpPr>
-          <p:cNvPr id="438" name="Google Shape;438;p27"/>
+          <p:cNvPr id="439" name="Google Shape;439;p27"/>
           <p:cNvSpPr/>
           <p:nvPr/>
         </p:nvSpPr>
         <p:spPr>
           <a:xfrm>
-            <a:off x="2286000" y="2551176"/>
-            <a:ext cx="1920240" cy="301752"/>
+            <a:off x="2286000" y="2880360"/>
+            <a:ext cx="1920240" cy="365760"/>
           </a:xfrm>
           <a:prstGeom prst="rect">
             <a:avLst/>
@@ -26832,7 +27974,7 @@
                 <a:cs typeface="Calibri"/>
                 <a:sym typeface="Calibri"/>
               </a:rPr>
-              <a:t>Author-scoped dispute + evidence</a:t>
+              <a:t>Skill-scoped dispute + backing snapshot</a:t>
             </a:r>
             <a:endParaRPr b="0" i="0" sz="1000" u="none" cap="none" strike="noStrike">
               <a:solidFill>
@@ -26848,14 +27990,14 @@
       </p:sp>
       <p:sp>
         <p:nvSpPr>
-          <p:cNvPr id="439" name="Google Shape;439;p27"/>
+          <p:cNvPr id="440" name="Google Shape;440;p27"/>
           <p:cNvSpPr/>
           <p:nvPr/>
         </p:nvSpPr>
         <p:spPr>
           <a:xfrm>
-            <a:off x="457200" y="2852928"/>
-            <a:ext cx="3931920" cy="301752"/>
+            <a:off x="457200" y="3291840"/>
+            <a:ext cx="3931920" cy="365760"/>
           </a:xfrm>
           <a:prstGeom prst="rect">
             <a:avLst/>
@@ -26907,14 +28049,14 @@
       </p:sp>
       <p:sp>
         <p:nvSpPr>
-          <p:cNvPr id="440" name="Google Shape;440;p27"/>
+          <p:cNvPr id="441" name="Google Shape;441;p27"/>
           <p:cNvSpPr/>
           <p:nvPr/>
         </p:nvSpPr>
         <p:spPr>
           <a:xfrm>
-            <a:off x="594360" y="2852928"/>
-            <a:ext cx="1645920" cy="301752"/>
+            <a:off x="594360" y="3291840"/>
+            <a:ext cx="1645920" cy="365760"/>
           </a:xfrm>
           <a:prstGeom prst="rect">
             <a:avLst/>
@@ -26957,7 +28099,7 @@
                 <a:cs typeface="Consolas"/>
                 <a:sym typeface="Consolas"/>
               </a:rPr>
-              <a:t>SkillListing</a:t>
+              <a:t>SkillListing / ListingVouchPosition</a:t>
             </a:r>
             <a:endParaRPr b="0" i="0" sz="1100" u="none" cap="none" strike="noStrike">
               <a:solidFill>
@@ -26973,14 +28115,14 @@
       </p:sp>
       <p:sp>
         <p:nvSpPr>
-          <p:cNvPr id="441" name="Google Shape;441;p27"/>
+          <p:cNvPr id="442" name="Google Shape;442;p27"/>
           <p:cNvSpPr/>
           <p:nvPr/>
         </p:nvSpPr>
         <p:spPr>
           <a:xfrm>
-            <a:off x="2286000" y="2852928"/>
-            <a:ext cx="1920240" cy="301752"/>
+            <a:off x="2286000" y="3291840"/>
+            <a:ext cx="1920240" cy="365760"/>
           </a:xfrm>
           <a:prstGeom prst="rect">
             <a:avLst/>
@@ -27023,7 +28165,7 @@
                 <a:cs typeface="Calibri"/>
                 <a:sym typeface="Calibri"/>
               </a:rPr>
-              <a:t>Published skill + revenue tracking</a:t>
+              <a:t>Published skill + voucher reward accounting</a:t>
             </a:r>
             <a:endParaRPr b="0" i="0" sz="1000" u="none" cap="none" strike="noStrike">
               <a:solidFill>
@@ -27039,14 +28181,14 @@
       </p:sp>
       <p:sp>
         <p:nvSpPr>
-          <p:cNvPr id="442" name="Google Shape;442;p27"/>
+          <p:cNvPr id="443" name="Google Shape;443;p27"/>
           <p:cNvSpPr/>
           <p:nvPr/>
         </p:nvSpPr>
         <p:spPr>
           <a:xfrm>
-            <a:off x="457200" y="3154680"/>
-            <a:ext cx="3931920" cy="301752"/>
+            <a:off x="457200" y="3703320"/>
+            <a:ext cx="3931920" cy="365760"/>
           </a:xfrm>
           <a:prstGeom prst="rect">
             <a:avLst/>
@@ -27098,14 +28240,14 @@
       </p:sp>
       <p:sp>
         <p:nvSpPr>
-          <p:cNvPr id="443" name="Google Shape;443;p27"/>
+          <p:cNvPr id="444" name="Google Shape;444;p27"/>
           <p:cNvSpPr/>
           <p:nvPr/>
         </p:nvSpPr>
         <p:spPr>
           <a:xfrm>
-            <a:off x="594360" y="3154680"/>
-            <a:ext cx="1645920" cy="301752"/>
+            <a:off x="594360" y="3703320"/>
+            <a:ext cx="1645920" cy="365760"/>
           </a:xfrm>
           <a:prstGeom prst="rect">
             <a:avLst/>
@@ -27164,14 +28306,14 @@
       </p:sp>
       <p:sp>
         <p:nvSpPr>
-          <p:cNvPr id="444" name="Google Shape;444;p27"/>
+          <p:cNvPr id="445" name="Google Shape;445;p27"/>
           <p:cNvSpPr/>
           <p:nvPr/>
         </p:nvSpPr>
         <p:spPr>
           <a:xfrm>
-            <a:off x="2286000" y="3154680"/>
-            <a:ext cx="1920240" cy="301752"/>
+            <a:off x="2286000" y="3703320"/>
+            <a:ext cx="1920240" cy="365760"/>
           </a:xfrm>
           <a:prstGeom prst="rect">
             <a:avLst/>
@@ -27230,7 +28372,7 @@
       </p:sp>
       <p:sp>
         <p:nvSpPr>
-          <p:cNvPr id="445" name="Google Shape;445;p27"/>
+          <p:cNvPr id="446" name="Google Shape;446;p27"/>
           <p:cNvSpPr/>
           <p:nvPr/>
         </p:nvSpPr>
@@ -27280,7 +28422,7 @@
                 <a:cs typeface="Inconsolata"/>
                 <a:sym typeface="Inconsolata"/>
               </a:rPr>
-              <a:t>18 Instructions</a:t>
+              <a:t>16 Instructions</a:t>
             </a:r>
             <a:endParaRPr b="0" i="0" sz="1600" u="none" cap="none" strike="noStrike">
               <a:solidFill>
@@ -27296,7 +28438,7 @@
       </p:sp>
       <p:sp>
         <p:nvSpPr>
-          <p:cNvPr id="446" name="Google Shape;446;p27"/>
+          <p:cNvPr id="447" name="Google Shape;447;p27"/>
           <p:cNvSpPr/>
           <p:nvPr/>
         </p:nvSpPr>
@@ -27355,7 +28497,7 @@
       </p:sp>
       <p:sp>
         <p:nvSpPr>
-          <p:cNvPr id="447" name="Google Shape;447;p27"/>
+          <p:cNvPr id="448" name="Google Shape;448;p27"/>
           <p:cNvSpPr/>
           <p:nvPr/>
         </p:nvSpPr>
@@ -27405,7 +28547,7 @@
                 <a:cs typeface="Consolas"/>
                 <a:sym typeface="Consolas"/>
               </a:rPr>
-              <a:t>initialize_config  ·  migrate_config</a:t>
+              <a:t>initialize_config</a:t>
             </a:r>
             <a:endParaRPr b="0" i="0" sz="1000" u="none" cap="none" strike="noStrike">
               <a:solidFill>
@@ -27421,7 +28563,7 @@
       </p:sp>
       <p:sp>
         <p:nvSpPr>
-          <p:cNvPr id="448" name="Google Shape;448;p27"/>
+          <p:cNvPr id="449" name="Google Shape;449;p27"/>
           <p:cNvSpPr/>
           <p:nvPr/>
         </p:nvSpPr>
@@ -27480,7 +28622,7 @@
       </p:sp>
       <p:sp>
         <p:nvSpPr>
-          <p:cNvPr id="449" name="Google Shape;449;p27"/>
+          <p:cNvPr id="450" name="Google Shape;450;p27"/>
           <p:cNvSpPr/>
           <p:nvPr/>
         </p:nvSpPr>
@@ -27530,7 +28672,7 @@
                 <a:cs typeface="Consolas"/>
                 <a:sym typeface="Consolas"/>
               </a:rPr>
-              <a:t>register_agent  (+ migrate / repair)</a:t>
+              <a:t>register_agent</a:t>
             </a:r>
             <a:endParaRPr b="0" i="0" sz="1000" u="none" cap="none" strike="noStrike">
               <a:solidFill>
@@ -27546,7 +28688,7 @@
       </p:sp>
       <p:sp>
         <p:nvSpPr>
-          <p:cNvPr id="450" name="Google Shape;450;p27"/>
+          <p:cNvPr id="451" name="Google Shape;451;p27"/>
           <p:cNvSpPr/>
           <p:nvPr/>
         </p:nvSpPr>
@@ -27605,7 +28747,7 @@
       </p:sp>
       <p:sp>
         <p:nvSpPr>
-          <p:cNvPr id="451" name="Google Shape;451;p27"/>
+          <p:cNvPr id="452" name="Google Shape;452;p27"/>
           <p:cNvSpPr/>
           <p:nvPr/>
         </p:nvSpPr>
@@ -27655,7 +28797,7 @@
                 <a:cs typeface="Consolas"/>
                 <a:sym typeface="Consolas"/>
               </a:rPr>
-              <a:t>deposit / withdraw_author_bond</a:t>
+              <a:t>vouch</a:t>
             </a:r>
             <a:endParaRPr b="0" i="0" sz="1000" u="none" cap="none" strike="noStrike">
               <a:solidFill>
@@ -27671,7 +28813,7 @@
       </p:sp>
       <p:sp>
         <p:nvSpPr>
-          <p:cNvPr id="452" name="Google Shape;452;p27"/>
+          <p:cNvPr id="453" name="Google Shape;453;p27"/>
           <p:cNvSpPr/>
           <p:nvPr/>
         </p:nvSpPr>
@@ -27730,7 +28872,7 @@
       </p:sp>
       <p:sp>
         <p:nvSpPr>
-          <p:cNvPr id="453" name="Google Shape;453;p27"/>
+          <p:cNvPr id="454" name="Google Shape;454;p27"/>
           <p:cNvSpPr/>
           <p:nvPr/>
         </p:nvSpPr>
@@ -27780,7 +28922,7 @@
                 <a:cs typeface="Consolas"/>
                 <a:sym typeface="Consolas"/>
               </a:rPr>
-              <a:t>vouch</a:t>
+              <a:t>revoke_vouch</a:t>
             </a:r>
             <a:endParaRPr b="0" i="0" sz="1000" u="none" cap="none" strike="noStrike">
               <a:solidFill>
@@ -27796,7 +28938,7 @@
       </p:sp>
       <p:sp>
         <p:nvSpPr>
-          <p:cNvPr id="454" name="Google Shape;454;p27"/>
+          <p:cNvPr id="455" name="Google Shape;455;p27"/>
           <p:cNvSpPr/>
           <p:nvPr/>
         </p:nvSpPr>
@@ -27855,7 +28997,7 @@
       </p:sp>
       <p:sp>
         <p:nvSpPr>
-          <p:cNvPr id="455" name="Google Shape;455;p27"/>
+          <p:cNvPr id="456" name="Google Shape;456;p27"/>
           <p:cNvSpPr/>
           <p:nvPr/>
         </p:nvSpPr>
@@ -27905,7 +29047,7 @@
                 <a:cs typeface="Consolas"/>
                 <a:sym typeface="Consolas"/>
               </a:rPr>
-              <a:t>revoke_vouch</a:t>
+              <a:t>open_author_dispute</a:t>
             </a:r>
             <a:endParaRPr b="0" i="0" sz="1000" u="none" cap="none" strike="noStrike">
               <a:solidFill>
@@ -27921,7 +29063,7 @@
       </p:sp>
       <p:sp>
         <p:nvSpPr>
-          <p:cNvPr id="456" name="Google Shape;456;p27"/>
+          <p:cNvPr id="457" name="Google Shape;457;p27"/>
           <p:cNvSpPr/>
           <p:nvPr/>
         </p:nvSpPr>
@@ -27980,7 +29122,7 @@
       </p:sp>
       <p:sp>
         <p:nvSpPr>
-          <p:cNvPr id="457" name="Google Shape;457;p27"/>
+          <p:cNvPr id="458" name="Google Shape;458;p27"/>
           <p:cNvSpPr/>
           <p:nvPr/>
         </p:nvSpPr>
@@ -28030,7 +29172,7 @@
                 <a:cs typeface="Consolas"/>
                 <a:sym typeface="Consolas"/>
               </a:rPr>
-              <a:t>open_author_dispute</a:t>
+              <a:t>resolve_author_dispute</a:t>
             </a:r>
             <a:endParaRPr b="0" i="0" sz="1000" u="none" cap="none" strike="noStrike">
               <a:solidFill>
@@ -28046,7 +29188,7 @@
       </p:sp>
       <p:sp>
         <p:nvSpPr>
-          <p:cNvPr id="458" name="Google Shape;458;p27"/>
+          <p:cNvPr id="459" name="Google Shape;459;p27"/>
           <p:cNvSpPr/>
           <p:nvPr/>
         </p:nvSpPr>
@@ -28105,7 +29247,7 @@
       </p:sp>
       <p:sp>
         <p:nvSpPr>
-          <p:cNvPr id="459" name="Google Shape;459;p27"/>
+          <p:cNvPr id="460" name="Google Shape;460;p27"/>
           <p:cNvSpPr/>
           <p:nvPr/>
         </p:nvSpPr>
@@ -28155,7 +29297,7 @@
                 <a:cs typeface="Consolas"/>
                 <a:sym typeface="Consolas"/>
               </a:rPr>
-              <a:t>resolve_author_dispute</a:t>
+              <a:t>create_skill_listing</a:t>
             </a:r>
             <a:endParaRPr b="0" i="0" sz="1000" u="none" cap="none" strike="noStrike">
               <a:solidFill>
@@ -28171,7 +29313,7 @@
       </p:sp>
       <p:sp>
         <p:nvSpPr>
-          <p:cNvPr id="460" name="Google Shape;460;p27"/>
+          <p:cNvPr id="461" name="Google Shape;461;p27"/>
           <p:cNvSpPr/>
           <p:nvPr/>
         </p:nvSpPr>
@@ -28230,7 +29372,7 @@
       </p:sp>
       <p:sp>
         <p:nvSpPr>
-          <p:cNvPr id="461" name="Google Shape;461;p27"/>
+          <p:cNvPr id="462" name="Google Shape;462;p27"/>
           <p:cNvSpPr/>
           <p:nvPr/>
         </p:nvSpPr>
@@ -28280,7 +29422,7 @@
                 <a:cs typeface="Consolas"/>
                 <a:sym typeface="Consolas"/>
               </a:rPr>
-              <a:t>create_skill_listing  (+ update / remove / close)</a:t>
+              <a:t>author_bond + listing lifecycle</a:t>
             </a:r>
             <a:endParaRPr b="0" i="0" sz="1000" u="none" cap="none" strike="noStrike">
               <a:solidFill>
@@ -28296,7 +29438,7 @@
       </p:sp>
       <p:sp>
         <p:nvSpPr>
-          <p:cNvPr id="462" name="Google Shape;462;p27"/>
+          <p:cNvPr id="463" name="Google Shape;463;p27"/>
           <p:cNvSpPr/>
           <p:nvPr/>
         </p:nvSpPr>
@@ -28355,7 +29497,7 @@
       </p:sp>
       <p:sp>
         <p:nvSpPr>
-          <p:cNvPr id="463" name="Google Shape;463;p27"/>
+          <p:cNvPr id="464" name="Google Shape;464;p27"/>
           <p:cNvSpPr/>
           <p:nvPr/>
         </p:nvSpPr>
@@ -28421,7 +29563,7 @@
       </p:sp>
       <p:sp>
         <p:nvSpPr>
-          <p:cNvPr id="464" name="Google Shape;464;p27"/>
+          <p:cNvPr id="465" name="Google Shape;465;p27"/>
           <p:cNvSpPr/>
           <p:nvPr/>
         </p:nvSpPr>
@@ -28480,7 +29622,7 @@
       </p:sp>
       <p:sp>
         <p:nvSpPr>
-          <p:cNvPr id="465" name="Google Shape;465;p27"/>
+          <p:cNvPr id="466" name="Google Shape;466;p27"/>
           <p:cNvSpPr/>
           <p:nvPr/>
         </p:nvSpPr>
@@ -28530,7 +29672,7 @@
                 <a:cs typeface="Consolas"/>
                 <a:sym typeface="Consolas"/>
               </a:rPr>
-              <a:t>claim_voucher_revenue</a:t>
+              <a:t>claim/link/unlink rewards</a:t>
             </a:r>
             <a:endParaRPr b="0" i="0" sz="1000" u="none" cap="none" strike="noStrike">
               <a:solidFill>
@@ -28546,7 +29688,7 @@
       </p:sp>
       <p:sp>
         <p:nvSpPr>
-          <p:cNvPr id="466" name="Google Shape;466;p27"/>
+          <p:cNvPr id="467" name="Google Shape;467;p27"/>
           <p:cNvSpPr/>
           <p:nvPr/>
         </p:nvSpPr>
@@ -28605,7 +29747,7 @@
       </p:sp>
       <p:sp>
         <p:nvSpPr>
-          <p:cNvPr id="467" name="Google Shape;467;p27"/>
+          <p:cNvPr id="468" name="Google Shape;468;p27"/>
           <p:cNvSpPr/>
           <p:nvPr/>
         </p:nvSpPr>
@@ -28671,7 +29813,7 @@
       </p:sp>
       <p:sp>
         <p:nvSpPr>
-          <p:cNvPr id="468" name="Google Shape;468;p27"/>
+          <p:cNvPr id="469" name="Google Shape;469;p27"/>
           <p:cNvSpPr/>
           <p:nvPr/>
         </p:nvSpPr>
@@ -28737,7 +29879,7 @@
       </p:sp>
       <p:sp>
         <p:nvSpPr>
-          <p:cNvPr id="469" name="Google Shape;469;p27"/>
+          <p:cNvPr id="470" name="Google Shape;470;p27"/>
           <p:cNvSpPr/>
           <p:nvPr/>
         </p:nvSpPr>
@@ -28790,388 +29932,6 @@
               <a:t>Appendix 1/2</a:t>
             </a:r>
             <a:endParaRPr b="0" i="0" sz="900" u="none" cap="none" strike="noStrike">
-              <a:solidFill>
-                <a:schemeClr val="dk1"/>
-              </a:solidFill>
-              <a:latin typeface="Calibri"/>
-              <a:ea typeface="Calibri"/>
-              <a:cs typeface="Calibri"/>
-              <a:sym typeface="Calibri"/>
-            </a:endParaRPr>
-          </a:p>
-        </p:txBody>
-      </p:sp>
-      <p:sp>
-        <p:nvSpPr>
-          <p:cNvPr id="500" name="Google Shape;500;p27"/>
-          <p:cNvSpPr/>
-          <p:nvPr/>
-        </p:nvSpPr>
-        <p:spPr>
-          <a:xfrm>
-            <a:off x="457200" y="3456432"/>
-            <a:ext cx="3931920" cy="301752"/>
-          </a:xfrm>
-          <a:prstGeom prst="rect">
-            <a:avLst/>
-          </a:prstGeom>
-          <a:solidFill>
-            <a:srgbClr val="FFF5EE"/>
-          </a:solidFill>
-          <a:ln>
-            <a:noFill/>
-          </a:ln>
-        </p:spPr>
-        <p:txBody>
-          <a:bodyPr anchorCtr="0" anchor="ctr" bIns="91425" lIns="91425" spcFirstLastPara="1" rIns="91425" wrap="square" tIns="91425">
-            <a:noAutofit/>
-          </a:bodyPr>
-          <a:lstStyle/>
-          <a:p>
-            <a:pPr indent="0" lvl="0" marL="0" marR="0" rtl="0" algn="l">
-              <a:lnSpc>
-                <a:spcPct val="100000"/>
-              </a:lnSpc>
-              <a:spcBef>
-                <a:spcPts val="0"/>
-              </a:spcBef>
-              <a:spcAft>
-                <a:spcPts val="0"/>
-              </a:spcAft>
-              <a:buClr>
-                <a:srgbClr val="000000"/>
-              </a:buClr>
-              <a:buSzPts val="1400"/>
-              <a:buFont typeface="Arial"/>
-              <a:buNone/>
-            </a:pPr>
-            <a:r>
-              <a:t/>
-            </a:r>
-            <a:endParaRPr b="0" i="0" sz="1400" u="none" cap="none" strike="noStrike">
-              <a:solidFill>
-                <a:srgbClr val="000000"/>
-              </a:solidFill>
-              <a:latin typeface="Arial"/>
-              <a:ea typeface="Arial"/>
-              <a:cs typeface="Arial"/>
-              <a:sym typeface="Arial"/>
-            </a:endParaRPr>
-          </a:p>
-        </p:txBody>
-      </p:sp>
-      <p:sp>
-        <p:nvSpPr>
-          <p:cNvPr id="501" name="Google Shape;501;p27"/>
-          <p:cNvSpPr/>
-          <p:nvPr/>
-        </p:nvSpPr>
-        <p:spPr>
-          <a:xfrm>
-            <a:off x="594360" y="3456432"/>
-            <a:ext cx="1645920" cy="301752"/>
-          </a:xfrm>
-          <a:prstGeom prst="rect">
-            <a:avLst/>
-          </a:prstGeom>
-          <a:noFill/>
-          <a:ln>
-            <a:noFill/>
-          </a:ln>
-        </p:spPr>
-        <p:txBody>
-          <a:bodyPr anchorCtr="0" anchor="ctr" bIns="0" lIns="0" spcFirstLastPara="1" rIns="0" wrap="square" tIns="0">
-            <a:noAutofit/>
-          </a:bodyPr>
-          <a:lstStyle/>
-          <a:p>
-            <a:pPr indent="0" lvl="0" marL="0" marR="0" rtl="0" algn="l">
-              <a:lnSpc>
-                <a:spcPct val="100000"/>
-              </a:lnSpc>
-              <a:spcBef>
-                <a:spcPts val="0"/>
-              </a:spcBef>
-              <a:spcAft>
-                <a:spcPts val="0"/>
-              </a:spcAft>
-              <a:buClr>
-                <a:srgbClr val="F28A61"/>
-              </a:buClr>
-              <a:buSzPts val="1100"/>
-              <a:buFont typeface="Consolas"/>
-              <a:buNone/>
-            </a:pPr>
-            <a:r>
-              <a:rPr b="0" i="0" lang="en" sz="1100" u="none" cap="none" strike="noStrike">
-                <a:solidFill>
-                  <a:srgbClr val="F28A61"/>
-                </a:solidFill>
-                <a:latin typeface="Consolas"/>
-                <a:ea typeface="Consolas"/>
-                <a:cs typeface="Consolas"/>
-                <a:sym typeface="Consolas"/>
-              </a:rPr>
-              <a:t>AuthorBond</a:t>
-            </a:r>
-            <a:endParaRPr b="0" i="0" sz="1100" u="none" cap="none" strike="noStrike">
-              <a:solidFill>
-                <a:schemeClr val="dk1"/>
-              </a:solidFill>
-              <a:latin typeface="Calibri"/>
-              <a:ea typeface="Calibri"/>
-              <a:cs typeface="Calibri"/>
-              <a:sym typeface="Calibri"/>
-            </a:endParaRPr>
-          </a:p>
-        </p:txBody>
-      </p:sp>
-      <p:sp>
-        <p:nvSpPr>
-          <p:cNvPr id="502" name="Google Shape;502;p27"/>
-          <p:cNvSpPr/>
-          <p:nvPr/>
-        </p:nvSpPr>
-        <p:spPr>
-          <a:xfrm>
-            <a:off x="2286000" y="3456432"/>
-            <a:ext cx="1920240" cy="301752"/>
-          </a:xfrm>
-          <a:prstGeom prst="rect">
-            <a:avLst/>
-          </a:prstGeom>
-          <a:noFill/>
-          <a:ln>
-            <a:noFill/>
-          </a:ln>
-        </p:spPr>
-        <p:txBody>
-          <a:bodyPr anchorCtr="0" anchor="ctr" bIns="0" lIns="0" spcFirstLastPara="1" rIns="0" wrap="square" tIns="0">
-            <a:noAutofit/>
-          </a:bodyPr>
-          <a:lstStyle/>
-          <a:p>
-            <a:pPr indent="0" lvl="0" marL="0" marR="0" rtl="0" algn="l">
-              <a:lnSpc>
-                <a:spcPct val="100000"/>
-              </a:lnSpc>
-              <a:spcBef>
-                <a:spcPts val="0"/>
-              </a:spcBef>
-              <a:spcAft>
-                <a:spcPts val="0"/>
-              </a:spcAft>
-              <a:buClr>
-                <a:srgbClr val="D1D5DB"/>
-              </a:buClr>
-              <a:buSzPts val="1000"/>
-              <a:buFont typeface="Calibri"/>
-              <a:buNone/>
-            </a:pPr>
-            <a:r>
-              <a:rPr b="0" i="0" lang="en" sz="1000" u="none" cap="none" strike="noStrike">
-                <a:solidFill>
-                  <a:srgbClr val="1F2937"/>
-                </a:solidFill>
-                <a:latin typeface="Calibri"/>
-                <a:ea typeface="Calibri"/>
-                <a:cs typeface="Calibri"/>
-                <a:sym typeface="Calibri"/>
-              </a:rPr>
-              <a:t>Author self-stake (first-loss capital)</a:t>
-            </a:r>
-            <a:endParaRPr b="0" i="0" sz="1000" u="none" cap="none" strike="noStrike">
-              <a:solidFill>
-                <a:schemeClr val="dk1"/>
-              </a:solidFill>
-              <a:latin typeface="Calibri"/>
-              <a:ea typeface="Calibri"/>
-              <a:cs typeface="Calibri"/>
-              <a:sym typeface="Calibri"/>
-            </a:endParaRPr>
-          </a:p>
-        </p:txBody>
-      </p:sp>
-      <p:sp>
-        <p:nvSpPr>
-          <p:cNvPr id="503" name="Google Shape;503;p27"/>
-          <p:cNvSpPr/>
-          <p:nvPr/>
-        </p:nvSpPr>
-        <p:spPr>
-          <a:xfrm>
-            <a:off x="457200" y="3758184"/>
-            <a:ext cx="3931920" cy="301752"/>
-          </a:xfrm>
-          <a:prstGeom prst="rect">
-            <a:avLst/>
-          </a:prstGeom>
-          <a:solidFill>
-            <a:srgbClr val="FFF5EE"/>
-          </a:solidFill>
-          <a:ln>
-            <a:noFill/>
-          </a:ln>
-        </p:spPr>
-        <p:txBody>
-          <a:bodyPr anchorCtr="0" anchor="ctr" bIns="91425" lIns="91425" spcFirstLastPara="1" rIns="91425" wrap="square" tIns="91425">
-            <a:noAutofit/>
-          </a:bodyPr>
-          <a:lstStyle/>
-          <a:p>
-            <a:pPr indent="0" lvl="0" marL="0" marR="0" rtl="0" algn="l">
-              <a:lnSpc>
-                <a:spcPct val="100000"/>
-              </a:lnSpc>
-              <a:spcBef>
-                <a:spcPts val="0"/>
-              </a:spcBef>
-              <a:spcAft>
-                <a:spcPts val="0"/>
-              </a:spcAft>
-              <a:buClr>
-                <a:srgbClr val="000000"/>
-              </a:buClr>
-              <a:buSzPts val="1400"/>
-              <a:buFont typeface="Arial"/>
-              <a:buNone/>
-            </a:pPr>
-            <a:r>
-              <a:t/>
-            </a:r>
-            <a:endParaRPr b="0" i="0" sz="1400" u="none" cap="none" strike="noStrike">
-              <a:solidFill>
-                <a:srgbClr val="000000"/>
-              </a:solidFill>
-              <a:latin typeface="Arial"/>
-              <a:ea typeface="Arial"/>
-              <a:cs typeface="Arial"/>
-              <a:sym typeface="Arial"/>
-            </a:endParaRPr>
-          </a:p>
-        </p:txBody>
-      </p:sp>
-      <p:sp>
-        <p:nvSpPr>
-          <p:cNvPr id="504" name="Google Shape;504;p27"/>
-          <p:cNvSpPr/>
-          <p:nvPr/>
-        </p:nvSpPr>
-        <p:spPr>
-          <a:xfrm>
-            <a:off x="594360" y="3758184"/>
-            <a:ext cx="1645920" cy="301752"/>
-          </a:xfrm>
-          <a:prstGeom prst="rect">
-            <a:avLst/>
-          </a:prstGeom>
-          <a:noFill/>
-          <a:ln>
-            <a:noFill/>
-          </a:ln>
-        </p:spPr>
-        <p:txBody>
-          <a:bodyPr anchorCtr="0" anchor="ctr" bIns="0" lIns="0" spcFirstLastPara="1" rIns="0" wrap="square" tIns="0">
-            <a:noAutofit/>
-          </a:bodyPr>
-          <a:lstStyle/>
-          <a:p>
-            <a:pPr indent="0" lvl="0" marL="0" marR="0" rtl="0" algn="l">
-              <a:lnSpc>
-                <a:spcPct val="100000"/>
-              </a:lnSpc>
-              <a:spcBef>
-                <a:spcPts val="0"/>
-              </a:spcBef>
-              <a:spcAft>
-                <a:spcPts val="0"/>
-              </a:spcAft>
-              <a:buClr>
-                <a:srgbClr val="F28A61"/>
-              </a:buClr>
-              <a:buSzPts val="900"/>
-              <a:buFont typeface="Consolas"/>
-              <a:buNone/>
-            </a:pPr>
-            <a:r>
-              <a:rPr b="0" i="0" lang="en" sz="900" u="none" cap="none" strike="noStrike">
-                <a:solidFill>
-                  <a:srgbClr val="F28A61"/>
-                </a:solidFill>
-                <a:latin typeface="Consolas"/>
-                <a:ea typeface="Consolas"/>
-                <a:cs typeface="Consolas"/>
-                <a:sym typeface="Consolas"/>
-              </a:rPr>
-              <a:t>AuthorDisputeVouchLink</a:t>
-            </a:r>
-            <a:endParaRPr b="0" i="0" sz="900" u="none" cap="none" strike="noStrike">
-              <a:solidFill>
-                <a:schemeClr val="dk1"/>
-              </a:solidFill>
-              <a:latin typeface="Calibri"/>
-              <a:ea typeface="Calibri"/>
-              <a:cs typeface="Calibri"/>
-              <a:sym typeface="Calibri"/>
-            </a:endParaRPr>
-          </a:p>
-        </p:txBody>
-      </p:sp>
-      <p:sp>
-        <p:nvSpPr>
-          <p:cNvPr id="505" name="Google Shape;505;p27"/>
-          <p:cNvSpPr/>
-          <p:nvPr/>
-        </p:nvSpPr>
-        <p:spPr>
-          <a:xfrm>
-            <a:off x="2286000" y="3758184"/>
-            <a:ext cx="1920240" cy="301752"/>
-          </a:xfrm>
-          <a:prstGeom prst="rect">
-            <a:avLst/>
-          </a:prstGeom>
-          <a:noFill/>
-          <a:ln>
-            <a:noFill/>
-          </a:ln>
-        </p:spPr>
-        <p:txBody>
-          <a:bodyPr anchorCtr="0" anchor="ctr" bIns="0" lIns="0" spcFirstLastPara="1" rIns="0" wrap="square" tIns="0">
-            <a:noAutofit/>
-          </a:bodyPr>
-          <a:lstStyle/>
-          <a:p>
-            <a:pPr indent="0" lvl="0" marL="0" marR="0" rtl="0" algn="l">
-              <a:lnSpc>
-                <a:spcPct val="100000"/>
-              </a:lnSpc>
-              <a:spcBef>
-                <a:spcPts val="0"/>
-              </a:spcBef>
-              <a:spcAft>
-                <a:spcPts val="0"/>
-              </a:spcAft>
-              <a:buClr>
-                <a:srgbClr val="D1D5DB"/>
-              </a:buClr>
-              <a:buSzPts val="1000"/>
-              <a:buFont typeface="Calibri"/>
-              <a:buNone/>
-            </a:pPr>
-            <a:r>
-              <a:rPr b="0" i="0" lang="en" sz="1000" u="none" cap="none" strike="noStrike">
-                <a:solidFill>
-                  <a:srgbClr val="1F2937"/>
-                </a:solidFill>
-                <a:latin typeface="Calibri"/>
-                <a:ea typeface="Calibri"/>
-                <a:cs typeface="Calibri"/>
-                <a:sym typeface="Calibri"/>
-              </a:rPr>
-              <a:t>Per-vouch slash link</a:t>
-            </a:r>
-            <a:endParaRPr b="0" i="0" sz="1000" u="none" cap="none" strike="noStrike">
               <a:solidFill>
                 <a:schemeClr val="dk1"/>
               </a:solidFill>
@@ -29203,7 +29963,7 @@
     </p:bg>
     <p:spTree>
       <p:nvGrpSpPr>
-        <p:cNvPr id="474" name="Shape 474"/>
+        <p:cNvPr id="475" name="Shape 475"/>
         <p:cNvGrpSpPr/>
         <p:nvPr/>
       </p:nvGrpSpPr>
@@ -29217,7 +29977,7 @@
       </p:grpSpPr>
       <p:sp>
         <p:nvSpPr>
-          <p:cNvPr id="475" name="Google Shape;475;p28"/>
+          <p:cNvPr id="476" name="Google Shape;476;p28"/>
           <p:cNvSpPr/>
           <p:nvPr/>
         </p:nvSpPr>
@@ -29278,7 +30038,7 @@
       </p:sp>
       <p:sp>
         <p:nvSpPr>
-          <p:cNvPr id="476" name="Google Shape;476;p28"/>
+          <p:cNvPr id="477" name="Google Shape;477;p28"/>
           <p:cNvSpPr/>
           <p:nvPr/>
         </p:nvSpPr>
@@ -29344,7 +30104,7 @@
       </p:sp>
       <p:sp>
         <p:nvSpPr>
-          <p:cNvPr id="477" name="Google Shape;477;p28"/>
+          <p:cNvPr id="478" name="Google Shape;478;p28"/>
           <p:cNvSpPr/>
           <p:nvPr/>
         </p:nvSpPr>
@@ -29410,7 +30170,7 @@
       </p:sp>
       <p:sp>
         <p:nvSpPr>
-          <p:cNvPr id="478" name="Google Shape;478;p28"/>
+          <p:cNvPr id="479" name="Google Shape;479;p28"/>
           <p:cNvSpPr/>
           <p:nvPr/>
         </p:nvSpPr>
@@ -29476,7 +30236,7 @@
       </p:sp>
       <p:sp>
         <p:nvSpPr>
-          <p:cNvPr id="479" name="Google Shape;479;p28"/>
+          <p:cNvPr id="480" name="Google Shape;480;p28"/>
           <p:cNvSpPr/>
           <p:nvPr/>
         </p:nvSpPr>
@@ -29535,7 +30295,7 @@
       </p:sp>
       <p:sp>
         <p:nvSpPr>
-          <p:cNvPr id="480" name="Google Shape;480;p28"/>
+          <p:cNvPr id="481" name="Google Shape;481;p28"/>
           <p:cNvSpPr/>
           <p:nvPr/>
         </p:nvSpPr>
@@ -29603,7 +30363,7 @@
       </p:sp>
       <p:pic>
         <p:nvPicPr>
-          <p:cNvPr descr="preencoded.png" id="481" name="Google Shape;481;p28"/>
+          <p:cNvPr descr="preencoded.png" id="482" name="Google Shape;482;p28"/>
           <p:cNvPicPr preferRelativeResize="0"/>
           <p:nvPr/>
         </p:nvPicPr>
@@ -29630,7 +30390,7 @@
       </p:pic>
       <p:sp>
         <p:nvSpPr>
-          <p:cNvPr id="482" name="Google Shape;482;p28"/>
+          <p:cNvPr id="483" name="Google Shape;483;p28"/>
           <p:cNvSpPr/>
           <p:nvPr/>
         </p:nvSpPr>
@@ -29696,7 +30456,7 @@
       </p:sp>
       <p:sp>
         <p:nvSpPr>
-          <p:cNvPr id="483" name="Google Shape;483;p28"/>
+          <p:cNvPr id="484" name="Google Shape;484;p28"/>
           <p:cNvSpPr/>
           <p:nvPr/>
         </p:nvSpPr>
@@ -29762,7 +30522,7 @@
       </p:sp>
       <p:pic>
         <p:nvPicPr>
-          <p:cNvPr descr="preencoded.png" id="484" name="Google Shape;484;p28"/>
+          <p:cNvPr descr="preencoded.png" id="485" name="Google Shape;485;p28"/>
           <p:cNvPicPr preferRelativeResize="0"/>
           <p:nvPr/>
         </p:nvPicPr>
@@ -29789,7 +30549,7 @@
       </p:pic>
       <p:sp>
         <p:nvSpPr>
-          <p:cNvPr id="485" name="Google Shape;485;p28"/>
+          <p:cNvPr id="486" name="Google Shape;486;p28"/>
           <p:cNvSpPr/>
           <p:nvPr/>
         </p:nvSpPr>
@@ -29855,7 +30615,7 @@
       </p:sp>
       <p:sp>
         <p:nvSpPr>
-          <p:cNvPr id="486" name="Google Shape;486;p28"/>
+          <p:cNvPr id="487" name="Google Shape;487;p28"/>
           <p:cNvSpPr/>
           <p:nvPr/>
         </p:nvSpPr>
@@ -29923,7 +30683,7 @@
       </p:sp>
       <p:pic>
         <p:nvPicPr>
-          <p:cNvPr descr="preencoded.png" id="487" name="Google Shape;487;p28"/>
+          <p:cNvPr descr="preencoded.png" id="488" name="Google Shape;488;p28"/>
           <p:cNvPicPr preferRelativeResize="0"/>
           <p:nvPr/>
         </p:nvPicPr>
@@ -29950,7 +30710,7 @@
       </p:pic>
       <p:sp>
         <p:nvSpPr>
-          <p:cNvPr id="488" name="Google Shape;488;p28"/>
+          <p:cNvPr id="489" name="Google Shape;489;p28"/>
           <p:cNvSpPr/>
           <p:nvPr/>
         </p:nvSpPr>
@@ -30016,7 +30776,7 @@
       </p:sp>
       <p:sp>
         <p:nvSpPr>
-          <p:cNvPr id="489" name="Google Shape;489;p28"/>
+          <p:cNvPr id="490" name="Google Shape;490;p28"/>
           <p:cNvSpPr/>
           <p:nvPr/>
         </p:nvSpPr>
@@ -30082,7 +30842,7 @@
       </p:sp>
       <p:grpSp>
         <p:nvGrpSpPr>
-          <p:cNvPr id="490" name="Google Shape;490;p28"/>
+          <p:cNvPr id="491" name="Google Shape;491;p28"/>
           <p:cNvGrpSpPr/>
           <p:nvPr/>
         </p:nvGrpSpPr>
@@ -30096,7 +30856,7 @@
         </p:grpSpPr>
         <p:sp>
           <p:nvSpPr>
-            <p:cNvPr id="491" name="Google Shape;491;p28"/>
+            <p:cNvPr id="492" name="Google Shape;492;p28"/>
             <p:cNvSpPr/>
             <p:nvPr/>
           </p:nvSpPr>
@@ -30162,7 +30922,7 @@
         </p:sp>
         <p:sp>
           <p:nvSpPr>
-            <p:cNvPr id="492" name="Google Shape;492;p28"/>
+            <p:cNvPr id="493" name="Google Shape;493;p28"/>
             <p:cNvSpPr/>
             <p:nvPr/>
           </p:nvSpPr>
@@ -30221,7 +30981,7 @@
         </p:sp>
         <p:sp>
           <p:nvSpPr>
-            <p:cNvPr id="493" name="Google Shape;493;p28"/>
+            <p:cNvPr id="494" name="Google Shape;494;p28"/>
             <p:cNvSpPr/>
             <p:nvPr/>
           </p:nvSpPr>
@@ -30289,7 +31049,7 @@
         </p:sp>
         <p:pic>
           <p:nvPicPr>
-            <p:cNvPr descr="preencoded.png" id="494" name="Google Shape;494;p28"/>
+            <p:cNvPr descr="preencoded.png" id="495" name="Google Shape;495;p28"/>
             <p:cNvPicPr preferRelativeResize="0"/>
             <p:nvPr/>
           </p:nvPicPr>
@@ -30316,7 +31076,7 @@
         </p:pic>
         <p:sp>
           <p:nvSpPr>
-            <p:cNvPr id="495" name="Google Shape;495;p28"/>
+            <p:cNvPr id="496" name="Google Shape;496;p28"/>
             <p:cNvSpPr/>
             <p:nvPr/>
           </p:nvSpPr>
@@ -30366,7 +31126,7 @@
                   <a:cs typeface="Inconsolata"/>
                   <a:sym typeface="Inconsolata"/>
                 </a:rPr>
-                <a:t>File a Claim</a:t>
+                <a:t>Report</a:t>
               </a:r>
               <a:endParaRPr b="0" i="0" sz="1600" u="none" cap="none" strike="noStrike">
                 <a:solidFill>
@@ -30382,7 +31142,7 @@
         </p:sp>
         <p:sp>
           <p:nvSpPr>
-            <p:cNvPr id="496" name="Google Shape;496;p28"/>
+            <p:cNvPr id="497" name="Google Shape;497;p28"/>
             <p:cNvSpPr/>
             <p:nvPr/>
           </p:nvSpPr>
@@ -30432,7 +31192,7 @@
                   <a:cs typeface="Calibri"/>
                   <a:sym typeface="Calibri"/>
                 </a:rPr>
-                <a:t>Anyone can challenge a skill with evidence</a:t>
+                <a:t>Anyone can report a skill with evidence</a:t>
               </a:r>
               <a:endParaRPr b="0" i="0" sz="1100" u="none" cap="none" strike="noStrike">
                 <a:solidFill>
@@ -30449,7 +31209,7 @@
       </p:grpSp>
       <p:pic>
         <p:nvPicPr>
-          <p:cNvPr descr="preencoded.png" id="497" name="Google Shape;497;p28"/>
+          <p:cNvPr descr="preencoded.png" id="498" name="Google Shape;498;p28"/>
           <p:cNvPicPr preferRelativeResize="0"/>
           <p:nvPr/>
         </p:nvPicPr>
@@ -30476,7 +31236,7 @@
       </p:pic>
       <p:sp>
         <p:nvSpPr>
-          <p:cNvPr id="498" name="Google Shape;498;p28"/>
+          <p:cNvPr id="499" name="Google Shape;499;p28"/>
           <p:cNvSpPr/>
           <p:nvPr/>
         </p:nvSpPr>
@@ -30535,7 +31295,7 @@
       </p:sp>
       <p:sp>
         <p:nvSpPr>
-          <p:cNvPr id="499" name="Google Shape;499;p28"/>
+          <p:cNvPr id="500" name="Google Shape;500;p28"/>
           <p:cNvSpPr/>
           <p:nvPr/>
         </p:nvSpPr>
@@ -30601,7 +31361,7 @@
       </p:sp>
       <p:sp>
         <p:nvSpPr>
-          <p:cNvPr id="500" name="Google Shape;500;p28"/>
+          <p:cNvPr id="501" name="Google Shape;501;p28"/>
           <p:cNvSpPr/>
           <p:nvPr/>
         </p:nvSpPr>
@@ -30691,7 +31451,7 @@
       </p:sp>
       <p:sp>
         <p:nvSpPr>
-          <p:cNvPr id="501" name="Google Shape;501;p28"/>
+          <p:cNvPr id="502" name="Google Shape;502;p28"/>
           <p:cNvSpPr/>
           <p:nvPr/>
         </p:nvSpPr>
@@ -30757,7 +31517,7 @@
       </p:sp>
       <p:sp>
         <p:nvSpPr>
-          <p:cNvPr id="502" name="Google Shape;502;p28"/>
+          <p:cNvPr id="503" name="Google Shape;503;p28"/>
           <p:cNvSpPr/>
           <p:nvPr/>
         </p:nvSpPr>
@@ -30823,7 +31583,7 @@
       </p:sp>
       <p:sp>
         <p:nvSpPr>
-          <p:cNvPr id="503" name="Google Shape;503;p28"/>
+          <p:cNvPr id="504" name="Google Shape;504;p28"/>
           <p:cNvSpPr/>
           <p:nvPr/>
         </p:nvSpPr>
@@ -30889,7 +31649,7 @@
       </p:sp>
       <p:grpSp>
         <p:nvGrpSpPr>
-          <p:cNvPr id="504" name="Google Shape;504;p28"/>
+          <p:cNvPr id="505" name="Google Shape;505;p28"/>
           <p:cNvGrpSpPr/>
           <p:nvPr/>
         </p:nvGrpSpPr>
@@ -30903,7 +31663,7 @@
         </p:grpSpPr>
         <p:sp>
           <p:nvSpPr>
-            <p:cNvPr id="505" name="Google Shape;505;p28"/>
+            <p:cNvPr id="506" name="Google Shape;506;p28"/>
             <p:cNvSpPr/>
             <p:nvPr/>
           </p:nvSpPr>
@@ -30969,7 +31729,7 @@
         </p:sp>
         <p:sp>
           <p:nvSpPr>
-            <p:cNvPr id="506" name="Google Shape;506;p28"/>
+            <p:cNvPr id="507" name="Google Shape;507;p28"/>
             <p:cNvSpPr/>
             <p:nvPr/>
           </p:nvSpPr>
@@ -31028,7 +31788,7 @@
         </p:sp>
         <p:sp>
           <p:nvSpPr>
-            <p:cNvPr id="507" name="Google Shape;507;p28"/>
+            <p:cNvPr id="508" name="Google Shape;508;p28"/>
             <p:cNvSpPr/>
             <p:nvPr/>
           </p:nvSpPr>
@@ -31096,7 +31856,7 @@
         </p:sp>
         <p:sp>
           <p:nvSpPr>
-            <p:cNvPr id="508" name="Google Shape;508;p28"/>
+            <p:cNvPr id="509" name="Google Shape;509;p28"/>
             <p:cNvSpPr/>
             <p:nvPr/>
           </p:nvSpPr>
@@ -31162,7 +31922,7 @@
         </p:sp>
         <p:sp>
           <p:nvSpPr>
-            <p:cNvPr id="509" name="Google Shape;509;p28"/>
+            <p:cNvPr id="510" name="Google Shape;510;p28"/>
             <p:cNvSpPr/>
             <p:nvPr/>
           </p:nvSpPr>
@@ -31212,7 +31972,7 @@
                   <a:cs typeface="Calibri"/>
                   <a:sym typeface="Calibri"/>
                 </a:rPr>
-                <a:t>Admin resolves disputes today; slashing and payouts settled on-chain</a:t>
+                <a:t>Authorized resolver handles disputes today; slashing and payouts settle on-chain</a:t>
               </a:r>
               <a:endParaRPr b="0" i="0" sz="1100" u="none" cap="none" strike="noStrike">
                 <a:solidFill>
@@ -31228,7 +31988,7 @@
         </p:sp>
         <p:pic>
           <p:nvPicPr>
-            <p:cNvPr id="510" name="Google Shape;510;p28" title="check-circle-fill (1).png"/>
+            <p:cNvPr id="511" name="Google Shape;511;p28" title="check-circle-fill (1).png"/>
             <p:cNvPicPr preferRelativeResize="0"/>
             <p:nvPr/>
           </p:nvPicPr>
@@ -31256,7 +32016,7 @@
       </p:grpSp>
       <p:sp>
         <p:nvSpPr>
-          <p:cNvPr id="511" name="Google Shape;511;p28"/>
+          <p:cNvPr id="512" name="Google Shape;512;p28"/>
           <p:cNvSpPr/>
           <p:nvPr/>
         </p:nvSpPr>
@@ -31322,7 +32082,7 @@
       </p:sp>
       <p:sp>
         <p:nvSpPr>
-          <p:cNvPr id="512" name="Google Shape;512;p28"/>
+          <p:cNvPr id="513" name="Google Shape;513;p28"/>
           <p:cNvSpPr/>
           <p:nvPr/>
         </p:nvSpPr>
@@ -31390,7 +32150,7 @@
       </p:sp>
       <p:sp>
         <p:nvSpPr>
-          <p:cNvPr id="513" name="Google Shape;513;p28"/>
+          <p:cNvPr id="514" name="Google Shape;514;p28"/>
           <p:cNvSpPr/>
           <p:nvPr/>
         </p:nvSpPr>
@@ -31456,7 +32216,7 @@
       </p:sp>
       <p:sp>
         <p:nvSpPr>
-          <p:cNvPr id="514" name="Google Shape;514;p28"/>
+          <p:cNvPr id="515" name="Google Shape;515;p28"/>
           <p:cNvSpPr/>
           <p:nvPr/>
         </p:nvSpPr>
@@ -31506,7 +32266,7 @@
                 <a:cs typeface="Calibri"/>
                 <a:sym typeface="Calibri"/>
               </a:rPr>
-              <a:t>Agent installs skill</a:t>
+              <a:t>Agent installs skill or signs for paid raw download access</a:t>
             </a:r>
             <a:endParaRPr b="0" i="0" sz="1100" u="none" cap="none" strike="noStrike">
               <a:solidFill>
@@ -31522,7 +32282,7 @@
       </p:sp>
       <p:pic>
         <p:nvPicPr>
-          <p:cNvPr id="515" name="Google Shape;515;p28" title="install-line (1).png"/>
+          <p:cNvPr id="516" name="Google Shape;516;p28" title="install-line (1).png"/>
           <p:cNvPicPr preferRelativeResize="0"/>
           <p:nvPr/>
         </p:nvPicPr>
@@ -31549,7 +32309,7 @@
       </p:pic>
       <p:pic>
         <p:nvPicPr>
-          <p:cNvPr id="516" name="Google Shape;516;p28"/>
+          <p:cNvPr id="517" name="Google Shape;517;p28"/>
           <p:cNvPicPr preferRelativeResize="0"/>
           <p:nvPr/>
         </p:nvPicPr>
@@ -31594,7 +32354,7 @@
     </p:bg>
     <p:spTree>
       <p:nvGrpSpPr>
-        <p:cNvPr id="520" name="Shape 520"/>
+        <p:cNvPr id="521" name="Shape 521"/>
         <p:cNvGrpSpPr/>
         <p:nvPr/>
       </p:nvGrpSpPr>
@@ -31608,7 +32368,7 @@
       </p:grpSpPr>
       <p:sp>
         <p:nvSpPr>
-          <p:cNvPr id="521" name="Google Shape;521;p29"/>
+          <p:cNvPr id="522" name="Google Shape;522;p29"/>
           <p:cNvSpPr/>
           <p:nvPr/>
         </p:nvSpPr>
@@ -31669,7 +32429,7 @@
       </p:sp>
       <p:sp>
         <p:nvSpPr>
-          <p:cNvPr id="522" name="Google Shape;522;p29"/>
+          <p:cNvPr id="523" name="Google Shape;523;p29"/>
           <p:cNvSpPr/>
           <p:nvPr/>
         </p:nvSpPr>
@@ -31735,7 +32495,7 @@
       </p:sp>
       <p:sp>
         <p:nvSpPr>
-          <p:cNvPr id="523" name="Google Shape;523;p29"/>
+          <p:cNvPr id="524" name="Google Shape;524;p29"/>
           <p:cNvSpPr/>
           <p:nvPr/>
         </p:nvSpPr>
@@ -31801,7 +32561,7 @@
       </p:sp>
       <p:sp>
         <p:nvSpPr>
-          <p:cNvPr id="524" name="Google Shape;524;p29"/>
+          <p:cNvPr id="525" name="Google Shape;525;p29"/>
           <p:cNvSpPr/>
           <p:nvPr/>
         </p:nvSpPr>
@@ -31867,7 +32627,7 @@
       </p:sp>
       <p:sp>
         <p:nvSpPr>
-          <p:cNvPr id="525" name="Google Shape;525;p29"/>
+          <p:cNvPr id="526" name="Google Shape;526;p29"/>
           <p:cNvSpPr/>
           <p:nvPr/>
         </p:nvSpPr>
@@ -31926,7 +32686,7 @@
       </p:sp>
       <p:sp>
         <p:nvSpPr>
-          <p:cNvPr id="526" name="Google Shape;526;p29"/>
+          <p:cNvPr id="527" name="Google Shape;527;p29"/>
           <p:cNvSpPr/>
           <p:nvPr/>
         </p:nvSpPr>
@@ -31994,7 +32754,7 @@
       </p:sp>
       <p:pic>
         <p:nvPicPr>
-          <p:cNvPr descr="preencoded.png" id="527" name="Google Shape;527;p29"/>
+          <p:cNvPr descr="preencoded.png" id="528" name="Google Shape;528;p29"/>
           <p:cNvPicPr preferRelativeResize="0"/>
           <p:nvPr/>
         </p:nvPicPr>
@@ -32021,7 +32781,7 @@
       </p:pic>
       <p:sp>
         <p:nvSpPr>
-          <p:cNvPr id="528" name="Google Shape;528;p29"/>
+          <p:cNvPr id="529" name="Google Shape;529;p29"/>
           <p:cNvSpPr/>
           <p:nvPr/>
         </p:nvSpPr>
@@ -32087,7 +32847,7 @@
       </p:sp>
       <p:sp>
         <p:nvSpPr>
-          <p:cNvPr id="529" name="Google Shape;529;p29"/>
+          <p:cNvPr id="530" name="Google Shape;530;p29"/>
           <p:cNvSpPr/>
           <p:nvPr/>
         </p:nvSpPr>
@@ -32137,7 +32897,7 @@
                 <a:cs typeface="Calibri"/>
                 <a:sym typeface="Calibri"/>
               </a:rPr>
-              <a:t>What makes a skill trusted? No binary threshold yet. Proposal: 3+ vouchers, 1+ SOL staked, 0 disputes.</a:t>
+              <a:t>What makes a skill trusted? No binary threshold yet. Proposal: multiple vouchers, meaningful USDC backing, clean dispute record.</a:t>
             </a:r>
             <a:endParaRPr b="0" i="0" sz="1100" u="none" cap="none" strike="noStrike">
               <a:solidFill>
@@ -32153,7 +32913,7 @@
       </p:sp>
       <p:pic>
         <p:nvPicPr>
-          <p:cNvPr descr="preencoded.png" id="530" name="Google Shape;530;p29"/>
+          <p:cNvPr descr="preencoded.png" id="531" name="Google Shape;531;p29"/>
           <p:cNvPicPr preferRelativeResize="0"/>
           <p:nvPr/>
         </p:nvPicPr>
@@ -32180,7 +32940,7 @@
       </p:pic>
       <p:sp>
         <p:nvSpPr>
-          <p:cNvPr id="531" name="Google Shape;531;p29"/>
+          <p:cNvPr id="532" name="Google Shape;532;p29"/>
           <p:cNvSpPr/>
           <p:nvPr/>
         </p:nvSpPr>
@@ -32246,7 +33006,7 @@
       </p:sp>
       <p:sp>
         <p:nvSpPr>
-          <p:cNvPr id="532" name="Google Shape;532;p29"/>
+          <p:cNvPr id="533" name="Google Shape;533;p29"/>
           <p:cNvSpPr/>
           <p:nvPr/>
         </p:nvSpPr>
@@ -32314,7 +33074,7 @@
       </p:sp>
       <p:pic>
         <p:nvPicPr>
-          <p:cNvPr descr="preencoded.png" id="533" name="Google Shape;533;p29"/>
+          <p:cNvPr descr="preencoded.png" id="534" name="Google Shape;534;p29"/>
           <p:cNvPicPr preferRelativeResize="0"/>
           <p:nvPr/>
         </p:nvPicPr>
@@ -32341,7 +33101,7 @@
       </p:pic>
       <p:sp>
         <p:nvSpPr>
-          <p:cNvPr id="534" name="Google Shape;534;p29"/>
+          <p:cNvPr id="535" name="Google Shape;535;p29"/>
           <p:cNvSpPr/>
           <p:nvPr/>
         </p:nvSpPr>
@@ -32407,7 +33167,7 @@
       </p:sp>
       <p:sp>
         <p:nvSpPr>
-          <p:cNvPr id="535" name="Google Shape;535;p29"/>
+          <p:cNvPr id="536" name="Google Shape;536;p29"/>
           <p:cNvSpPr/>
           <p:nvPr/>
         </p:nvSpPr>
@@ -32473,7 +33233,7 @@
       </p:sp>
       <p:grpSp>
         <p:nvGrpSpPr>
-          <p:cNvPr id="536" name="Google Shape;536;p29"/>
+          <p:cNvPr id="537" name="Google Shape;537;p29"/>
           <p:cNvGrpSpPr/>
           <p:nvPr/>
         </p:nvGrpSpPr>
@@ -32487,7 +33247,7 @@
         </p:grpSpPr>
         <p:sp>
           <p:nvSpPr>
-            <p:cNvPr id="537" name="Google Shape;537;p29"/>
+            <p:cNvPr id="538" name="Google Shape;538;p29"/>
             <p:cNvSpPr/>
             <p:nvPr/>
           </p:nvSpPr>
@@ -32553,7 +33313,7 @@
         </p:sp>
         <p:sp>
           <p:nvSpPr>
-            <p:cNvPr id="538" name="Google Shape;538;p29"/>
+            <p:cNvPr id="539" name="Google Shape;539;p29"/>
             <p:cNvSpPr/>
             <p:nvPr/>
           </p:nvSpPr>
@@ -32612,7 +33372,7 @@
         </p:sp>
         <p:sp>
           <p:nvSpPr>
-            <p:cNvPr id="539" name="Google Shape;539;p29"/>
+            <p:cNvPr id="540" name="Google Shape;540;p29"/>
             <p:cNvSpPr/>
             <p:nvPr/>
           </p:nvSpPr>
@@ -32680,7 +33440,7 @@
         </p:sp>
         <p:pic>
           <p:nvPicPr>
-            <p:cNvPr descr="preencoded.png" id="540" name="Google Shape;540;p29"/>
+            <p:cNvPr descr="preencoded.png" id="541" name="Google Shape;541;p29"/>
             <p:cNvPicPr preferRelativeResize="0"/>
             <p:nvPr/>
           </p:nvPicPr>
@@ -32707,7 +33467,7 @@
         </p:pic>
         <p:sp>
           <p:nvSpPr>
-            <p:cNvPr id="541" name="Google Shape;541;p29"/>
+            <p:cNvPr id="542" name="Google Shape;542;p29"/>
             <p:cNvSpPr/>
             <p:nvPr/>
           </p:nvSpPr>
@@ -32773,7 +33533,7 @@
         </p:sp>
         <p:sp>
           <p:nvSpPr>
-            <p:cNvPr id="542" name="Google Shape;542;p29"/>
+            <p:cNvPr id="543" name="Google Shape;543;p29"/>
             <p:cNvSpPr/>
             <p:nvPr/>
           </p:nvSpPr>
@@ -32840,7 +33600,7 @@
       </p:grpSp>
       <p:pic>
         <p:nvPicPr>
-          <p:cNvPr descr="preencoded.png" id="543" name="Google Shape;543;p29"/>
+          <p:cNvPr descr="preencoded.png" id="544" name="Google Shape;544;p29"/>
           <p:cNvPicPr preferRelativeResize="0"/>
           <p:nvPr/>
         </p:nvPicPr>
@@ -32867,7 +33627,7 @@
       </p:pic>
       <p:sp>
         <p:nvSpPr>
-          <p:cNvPr id="544" name="Google Shape;544;p29"/>
+          <p:cNvPr id="545" name="Google Shape;545;p29"/>
           <p:cNvSpPr/>
           <p:nvPr/>
         </p:nvSpPr>
@@ -32926,7 +33686,7 @@
       </p:sp>
       <p:sp>
         <p:nvSpPr>
-          <p:cNvPr id="545" name="Google Shape;545;p29"/>
+          <p:cNvPr id="546" name="Google Shape;546;p29"/>
           <p:cNvSpPr/>
           <p:nvPr/>
         </p:nvSpPr>
@@ -32992,7 +33752,7 @@
       </p:sp>
       <p:sp>
         <p:nvSpPr>
-          <p:cNvPr id="546" name="Google Shape;546;p29"/>
+          <p:cNvPr id="547" name="Google Shape;547;p29"/>
           <p:cNvSpPr/>
           <p:nvPr/>
         </p:nvSpPr>
@@ -33042,7 +33802,7 @@
                 <a:cs typeface="Calibri"/>
                 <a:sym typeface="Calibri"/>
               </a:rPr>
-              <a:t>Who resolves disputes at scale? Today: program authority only. Options: multi-sig, DAO, stake-weighted voting.</a:t>
+              <a:t>Who resolves disputes at scale? Today: authorized resolver. Mainnet options: multi-sig, DAO, stake-weighted voting.</a:t>
             </a:r>
             <a:endParaRPr b="0" i="0" sz="1200" u="none" cap="none" strike="noStrike">
               <a:solidFill>
@@ -33058,7 +33818,7 @@
       </p:sp>
       <p:sp>
         <p:nvSpPr>
-          <p:cNvPr id="547" name="Google Shape;547;p29"/>
+          <p:cNvPr id="548" name="Google Shape;548;p29"/>
           <p:cNvSpPr/>
           <p:nvPr/>
         </p:nvSpPr>
@@ -33115,7 +33875,7 @@
       </p:sp>
       <p:sp>
         <p:nvSpPr>
-          <p:cNvPr id="548" name="Google Shape;548;p29"/>
+          <p:cNvPr id="549" name="Google Shape;549;p29"/>
           <p:cNvSpPr/>
           <p:nvPr/>
         </p:nvSpPr>
@@ -33181,7 +33941,7 @@
       </p:sp>
       <p:sp>
         <p:nvSpPr>
-          <p:cNvPr id="549" name="Google Shape;549;p29"/>
+          <p:cNvPr id="550" name="Google Shape;550;p29"/>
           <p:cNvSpPr/>
           <p:nvPr/>
         </p:nvSpPr>
@@ -33247,7 +34007,7 @@
       </p:sp>
       <p:grpSp>
         <p:nvGrpSpPr>
-          <p:cNvPr id="550" name="Google Shape;550;p29"/>
+          <p:cNvPr id="551" name="Google Shape;551;p29"/>
           <p:cNvGrpSpPr/>
           <p:nvPr/>
         </p:nvGrpSpPr>
@@ -33261,7 +34021,7 @@
         </p:grpSpPr>
         <p:sp>
           <p:nvSpPr>
-            <p:cNvPr id="551" name="Google Shape;551;p29"/>
+            <p:cNvPr id="552" name="Google Shape;552;p29"/>
             <p:cNvSpPr/>
             <p:nvPr/>
           </p:nvSpPr>
@@ -33327,7 +34087,7 @@
         </p:sp>
         <p:sp>
           <p:nvSpPr>
-            <p:cNvPr id="552" name="Google Shape;552;p29"/>
+            <p:cNvPr id="553" name="Google Shape;553;p29"/>
             <p:cNvSpPr/>
             <p:nvPr/>
           </p:nvSpPr>
@@ -33386,7 +34146,7 @@
         </p:sp>
         <p:sp>
           <p:nvSpPr>
-            <p:cNvPr id="553" name="Google Shape;553;p29"/>
+            <p:cNvPr id="554" name="Google Shape;554;p29"/>
             <p:cNvSpPr/>
             <p:nvPr/>
           </p:nvSpPr>
@@ -33454,7 +34214,7 @@
         </p:sp>
         <p:sp>
           <p:nvSpPr>
-            <p:cNvPr id="554" name="Google Shape;554;p29"/>
+            <p:cNvPr id="555" name="Google Shape;555;p29"/>
             <p:cNvSpPr/>
             <p:nvPr/>
           </p:nvSpPr>
@@ -33520,7 +34280,7 @@
         </p:sp>
         <p:sp>
           <p:nvSpPr>
-            <p:cNvPr id="555" name="Google Shape;555;p29"/>
+            <p:cNvPr id="556" name="Google Shape;556;p29"/>
             <p:cNvSpPr/>
             <p:nvPr/>
           </p:nvSpPr>
@@ -33586,7 +34346,7 @@
         </p:sp>
         <p:pic>
           <p:nvPicPr>
-            <p:cNvPr id="556" name="Google Shape;556;p29" title="check-circle-fill (1).png"/>
+            <p:cNvPr id="557" name="Google Shape;557;p29" title="check-circle-fill (1).png"/>
             <p:cNvPicPr preferRelativeResize="0"/>
             <p:nvPr/>
           </p:nvPicPr>
@@ -33614,7 +34374,7 @@
       </p:grpSp>
       <p:pic>
         <p:nvPicPr>
-          <p:cNvPr id="557" name="Google Shape;557;p29" title="direction--fork.png"/>
+          <p:cNvPr id="558" name="Google Shape;558;p29" title="direction--fork.png"/>
           <p:cNvPicPr preferRelativeResize="0"/>
           <p:nvPr/>
         </p:nvPicPr>
@@ -33641,7 +34401,7 @@
       </p:pic>
       <p:sp>
         <p:nvSpPr>
-          <p:cNvPr id="558" name="Google Shape;558;p29"/>
+          <p:cNvPr id="559" name="Google Shape;559;p29"/>
           <p:cNvSpPr/>
           <p:nvPr/>
         </p:nvSpPr>
@@ -33707,7 +34467,7 @@
       </p:sp>
       <p:sp>
         <p:nvSpPr>
-          <p:cNvPr id="559" name="Google Shape;559;p29"/>
+          <p:cNvPr id="560" name="Google Shape;560;p29"/>
           <p:cNvSpPr/>
           <p:nvPr/>
         </p:nvSpPr>
@@ -33775,7 +34535,7 @@
       </p:sp>
       <p:sp>
         <p:nvSpPr>
-          <p:cNvPr id="560" name="Google Shape;560;p29"/>
+          <p:cNvPr id="561" name="Google Shape;561;p29"/>
           <p:cNvSpPr/>
           <p:nvPr/>
         </p:nvSpPr>
@@ -33841,7 +34601,2362 @@
       </p:sp>
       <p:sp>
         <p:nvSpPr>
-          <p:cNvPr id="561" name="Google Shape;561;p29"/>
+          <p:cNvPr id="562" name="Google Shape;562;p29"/>
+          <p:cNvSpPr/>
+          <p:nvPr/>
+        </p:nvSpPr>
+        <p:spPr>
+          <a:xfrm>
+            <a:off x="6778700" y="1622181"/>
+            <a:ext cx="908700" cy="548700"/>
+          </a:xfrm>
+          <a:prstGeom prst="rect">
+            <a:avLst/>
+          </a:prstGeom>
+          <a:noFill/>
+          <a:ln>
+            <a:noFill/>
+          </a:ln>
+        </p:spPr>
+        <p:txBody>
+          <a:bodyPr anchorCtr="0" anchor="ctr" bIns="0" lIns="0" spcFirstLastPara="1" rIns="0" wrap="square" tIns="0">
+            <a:noAutofit/>
+          </a:bodyPr>
+          <a:lstStyle/>
+          <a:p>
+            <a:pPr indent="0" lvl="0" marL="0" marR="0" rtl="0" algn="l">
+              <a:lnSpc>
+                <a:spcPct val="100000"/>
+              </a:lnSpc>
+              <a:spcBef>
+                <a:spcPts val="0"/>
+              </a:spcBef>
+              <a:spcAft>
+                <a:spcPts val="0"/>
+              </a:spcAft>
+              <a:buClr>
+                <a:srgbClr val="D1D5DB"/>
+              </a:buClr>
+              <a:buSzPts val="1100"/>
+              <a:buFont typeface="Calibri"/>
+              <a:buNone/>
+            </a:pPr>
+            <a:r>
+              <a:rPr b="0" i="0" lang="en" sz="1100" u="none" cap="none" strike="noStrike">
+                <a:solidFill>
+                  <a:srgbClr val="1F2937"/>
+                </a:solidFill>
+                <a:latin typeface="Calibri"/>
+                <a:ea typeface="Calibri"/>
+                <a:cs typeface="Calibri"/>
+                <a:sym typeface="Calibri"/>
+              </a:rPr>
+              <a:t>Multi-sig</a:t>
+            </a:r>
+            <a:r>
+              <a:rPr lang="en" sz="1100">
+                <a:solidFill>
+                  <a:srgbClr val="1F2937"/>
+                </a:solidFill>
+                <a:latin typeface="Calibri"/>
+                <a:ea typeface="Calibri"/>
+                <a:cs typeface="Calibri"/>
+                <a:sym typeface="Calibri"/>
+              </a:rPr>
+              <a:t>? Agent DON?</a:t>
+            </a:r>
+            <a:r>
+              <a:rPr b="0" i="0" lang="en" sz="1100" u="none" cap="none" strike="noStrike">
+                <a:solidFill>
+                  <a:srgbClr val="1F2937"/>
+                </a:solidFill>
+                <a:latin typeface="Calibri"/>
+                <a:ea typeface="Calibri"/>
+                <a:cs typeface="Calibri"/>
+                <a:sym typeface="Calibri"/>
+              </a:rPr>
+              <a:t> DAO?</a:t>
+            </a:r>
+            <a:endParaRPr b="0" i="0" sz="1100" u="none" cap="none" strike="noStrike">
+              <a:solidFill>
+                <a:schemeClr val="dk1"/>
+              </a:solidFill>
+              <a:latin typeface="Calibri"/>
+              <a:ea typeface="Calibri"/>
+              <a:cs typeface="Calibri"/>
+              <a:sym typeface="Calibri"/>
+            </a:endParaRPr>
+          </a:p>
+        </p:txBody>
+      </p:sp>
+    </p:spTree>
+  </p:cSld>
+  <p:clrMapOvr>
+    <a:masterClrMapping/>
+  </p:clrMapOvr>
+</p:sld>
+</file>
+
+<file path=ppt/slides/slide17.xml><?xml version="1.0" encoding="utf-8"?>
+<p:sld xmlns:a="http://schemas.openxmlformats.org/drawingml/2006/main" xmlns:p="http://schemas.openxmlformats.org/presentationml/2006/main" xmlns:r="http://schemas.openxmlformats.org/officeDocument/2006/relationships">
+  <p:cSld>
+    <p:bg>
+      <p:bgPr>
+        <a:solidFill>
+          <a:schemeClr val="lt2"/>
+        </a:solidFill>
+      </p:bgPr>
+    </p:bg>
+    <p:spTree>
+      <p:nvGrpSpPr>
+        <p:cNvPr id="566" name="Shape 566"/>
+        <p:cNvGrpSpPr/>
+        <p:nvPr/>
+      </p:nvGrpSpPr>
+      <p:grpSpPr>
+        <a:xfrm>
+          <a:off x="0" y="0"/>
+          <a:ext cx="0" cy="0"/>
+          <a:chOff x="0" y="0"/>
+          <a:chExt cx="0" cy="0"/>
+        </a:xfrm>
+      </p:grpSpPr>
+      <p:sp>
+        <p:nvSpPr>
+          <p:cNvPr id="567" name="Google Shape;567;p30"/>
+          <p:cNvSpPr/>
+          <p:nvPr/>
+        </p:nvSpPr>
+        <p:spPr>
+          <a:xfrm>
+            <a:off x="457200" y="164592"/>
+            <a:ext cx="8229600" cy="18300"/>
+          </a:xfrm>
+          <a:prstGeom prst="rect">
+            <a:avLst/>
+          </a:prstGeom>
+          <a:solidFill>
+            <a:srgbClr val="F28A61">
+              <a:alpha val="60000"/>
+            </a:srgbClr>
+          </a:solidFill>
+          <a:ln>
+            <a:noFill/>
+          </a:ln>
+        </p:spPr>
+        <p:txBody>
+          <a:bodyPr anchorCtr="0" anchor="ctr" bIns="91425" lIns="91425" spcFirstLastPara="1" rIns="91425" wrap="square" tIns="91425">
+            <a:noAutofit/>
+          </a:bodyPr>
+          <a:lstStyle/>
+          <a:p>
+            <a:pPr indent="0" lvl="0" marL="0" marR="0" rtl="0" algn="l">
+              <a:lnSpc>
+                <a:spcPct val="100000"/>
+              </a:lnSpc>
+              <a:spcBef>
+                <a:spcPts val="0"/>
+              </a:spcBef>
+              <a:spcAft>
+                <a:spcPts val="0"/>
+              </a:spcAft>
+              <a:buClr>
+                <a:srgbClr val="000000"/>
+              </a:buClr>
+              <a:buSzPts val="1400"/>
+              <a:buFont typeface="Arial"/>
+              <a:buNone/>
+            </a:pPr>
+            <a:r>
+              <a:t/>
+            </a:r>
+            <a:endParaRPr b="0" i="0" sz="1400" u="none" cap="none" strike="noStrike">
+              <a:solidFill>
+                <a:srgbClr val="000000"/>
+              </a:solidFill>
+              <a:latin typeface="Arial"/>
+              <a:ea typeface="Arial"/>
+              <a:cs typeface="Arial"/>
+              <a:sym typeface="Arial"/>
+            </a:endParaRPr>
+          </a:p>
+        </p:txBody>
+      </p:sp>
+      <p:sp>
+        <p:nvSpPr>
+          <p:cNvPr id="568" name="Google Shape;568;p30"/>
+          <p:cNvSpPr/>
+          <p:nvPr/>
+        </p:nvSpPr>
+        <p:spPr>
+          <a:xfrm>
+            <a:off x="457200" y="228600"/>
+            <a:ext cx="8229600" cy="274200"/>
+          </a:xfrm>
+          <a:prstGeom prst="rect">
+            <a:avLst/>
+          </a:prstGeom>
+          <a:noFill/>
+          <a:ln>
+            <a:noFill/>
+          </a:ln>
+        </p:spPr>
+        <p:txBody>
+          <a:bodyPr anchorCtr="0" anchor="ctr" bIns="0" lIns="0" spcFirstLastPara="1" rIns="0" wrap="square" tIns="0">
+            <a:noAutofit/>
+          </a:bodyPr>
+          <a:lstStyle/>
+          <a:p>
+            <a:pPr indent="0" lvl="0" marL="0" marR="0" rtl="0" algn="l">
+              <a:lnSpc>
+                <a:spcPct val="100000"/>
+              </a:lnSpc>
+              <a:spcBef>
+                <a:spcPts val="0"/>
+              </a:spcBef>
+              <a:spcAft>
+                <a:spcPts val="0"/>
+              </a:spcAft>
+              <a:buClr>
+                <a:srgbClr val="F28A61"/>
+              </a:buClr>
+              <a:buSzPts val="1000"/>
+              <a:buFont typeface="Calibri"/>
+              <a:buNone/>
+            </a:pPr>
+            <a:r>
+              <a:rPr b="0" i="0" lang="en" sz="1000" u="none" cap="none" strike="noStrike">
+                <a:solidFill>
+                  <a:srgbClr val="F28A61"/>
+                </a:solidFill>
+                <a:latin typeface="Calibri"/>
+                <a:ea typeface="Calibri"/>
+                <a:cs typeface="Calibri"/>
+                <a:sym typeface="Calibri"/>
+              </a:rPr>
+              <a:t>Appendix: OPEN DESIGN QUESTIONS</a:t>
+            </a:r>
+            <a:endParaRPr b="0" i="0" sz="1000" u="none" cap="none" strike="noStrike">
+              <a:solidFill>
+                <a:schemeClr val="dk1"/>
+              </a:solidFill>
+              <a:latin typeface="Calibri"/>
+              <a:ea typeface="Calibri"/>
+              <a:cs typeface="Calibri"/>
+              <a:sym typeface="Calibri"/>
+            </a:endParaRPr>
+          </a:p>
+        </p:txBody>
+      </p:sp>
+      <p:sp>
+        <p:nvSpPr>
+          <p:cNvPr id="569" name="Google Shape;569;p30"/>
+          <p:cNvSpPr/>
+          <p:nvPr/>
+        </p:nvSpPr>
+        <p:spPr>
+          <a:xfrm>
+            <a:off x="457200" y="438915"/>
+            <a:ext cx="8229600" cy="548700"/>
+          </a:xfrm>
+          <a:prstGeom prst="rect">
+            <a:avLst/>
+          </a:prstGeom>
+          <a:noFill/>
+          <a:ln>
+            <a:noFill/>
+          </a:ln>
+        </p:spPr>
+        <p:txBody>
+          <a:bodyPr anchorCtr="0" anchor="ctr" bIns="0" lIns="0" spcFirstLastPara="1" rIns="0" wrap="square" tIns="0">
+            <a:noAutofit/>
+          </a:bodyPr>
+          <a:lstStyle/>
+          <a:p>
+            <a:pPr indent="0" lvl="0" marL="0" marR="0" rtl="0" algn="l">
+              <a:lnSpc>
+                <a:spcPct val="100000"/>
+              </a:lnSpc>
+              <a:spcBef>
+                <a:spcPts val="0"/>
+              </a:spcBef>
+              <a:spcAft>
+                <a:spcPts val="0"/>
+              </a:spcAft>
+              <a:buClr>
+                <a:srgbClr val="F3F4F6"/>
+              </a:buClr>
+              <a:buSzPts val="3600"/>
+              <a:buFont typeface="Arial Black"/>
+              <a:buNone/>
+            </a:pPr>
+            <a:r>
+              <a:rPr b="0" i="0" lang="en" sz="3600" u="none" cap="none" strike="noStrike">
+                <a:solidFill>
+                  <a:schemeClr val="dk2"/>
+                </a:solidFill>
+                <a:latin typeface="Inconsolata"/>
+                <a:ea typeface="Inconsolata"/>
+                <a:cs typeface="Inconsolata"/>
+                <a:sym typeface="Inconsolata"/>
+              </a:rPr>
+              <a:t>Open Design Questions</a:t>
+            </a:r>
+            <a:endParaRPr b="0" i="0" sz="3600" u="none" cap="none" strike="noStrike">
+              <a:solidFill>
+                <a:schemeClr val="dk2"/>
+              </a:solidFill>
+              <a:latin typeface="Inconsolata"/>
+              <a:ea typeface="Inconsolata"/>
+              <a:cs typeface="Inconsolata"/>
+              <a:sym typeface="Inconsolata"/>
+            </a:endParaRPr>
+          </a:p>
+        </p:txBody>
+      </p:sp>
+      <p:sp>
+        <p:nvSpPr>
+          <p:cNvPr id="570" name="Google Shape;570;p30"/>
+          <p:cNvSpPr/>
+          <p:nvPr/>
+        </p:nvSpPr>
+        <p:spPr>
+          <a:xfrm>
+            <a:off x="457190" y="1365575"/>
+            <a:ext cx="1920300" cy="2011800"/>
+          </a:xfrm>
+          <a:prstGeom prst="rect">
+            <a:avLst/>
+          </a:prstGeom>
+          <a:solidFill>
+            <a:srgbClr val="FFF5EE"/>
+          </a:solidFill>
+          <a:ln>
+            <a:noFill/>
+          </a:ln>
+          <a:effectLst>
+            <a:outerShdw blurRad="76200" rotWithShape="0" algn="bl" dir="8100000" dist="25400">
+              <a:srgbClr val="000000">
+                <a:alpha val="20000"/>
+              </a:srgbClr>
+            </a:outerShdw>
+          </a:effectLst>
+        </p:spPr>
+        <p:txBody>
+          <a:bodyPr anchorCtr="0" anchor="ctr" bIns="91425" lIns="91425" spcFirstLastPara="1" rIns="91425" wrap="square" tIns="91425">
+            <a:noAutofit/>
+          </a:bodyPr>
+          <a:lstStyle/>
+          <a:p>
+            <a:pPr indent="0" lvl="0" marL="0" marR="0" rtl="0" algn="l">
+              <a:lnSpc>
+                <a:spcPct val="100000"/>
+              </a:lnSpc>
+              <a:spcBef>
+                <a:spcPts val="0"/>
+              </a:spcBef>
+              <a:spcAft>
+                <a:spcPts val="0"/>
+              </a:spcAft>
+              <a:buClr>
+                <a:srgbClr val="000000"/>
+              </a:buClr>
+              <a:buSzPts val="1400"/>
+              <a:buFont typeface="Arial"/>
+              <a:buNone/>
+            </a:pPr>
+            <a:r>
+              <a:t/>
+            </a:r>
+            <a:endParaRPr b="0" i="0" sz="1400" u="none" cap="none" strike="noStrike">
+              <a:solidFill>
+                <a:srgbClr val="000000"/>
+              </a:solidFill>
+              <a:latin typeface="Arial"/>
+              <a:ea typeface="Arial"/>
+              <a:cs typeface="Arial"/>
+              <a:sym typeface="Arial"/>
+            </a:endParaRPr>
+          </a:p>
+        </p:txBody>
+      </p:sp>
+      <p:sp>
+        <p:nvSpPr>
+          <p:cNvPr id="571" name="Google Shape;571;p30"/>
+          <p:cNvSpPr/>
+          <p:nvPr/>
+        </p:nvSpPr>
+        <p:spPr>
+          <a:xfrm>
+            <a:off x="594350" y="1502735"/>
+            <a:ext cx="365700" cy="365700"/>
+          </a:xfrm>
+          <a:prstGeom prst="ellipse">
+            <a:avLst/>
+          </a:prstGeom>
+          <a:solidFill>
+            <a:srgbClr val="F28A61"/>
+          </a:solidFill>
+          <a:ln>
+            <a:noFill/>
+          </a:ln>
+        </p:spPr>
+        <p:txBody>
+          <a:bodyPr anchorCtr="0" anchor="ctr" bIns="91425" lIns="91425" spcFirstLastPara="1" rIns="91425" wrap="square" tIns="91425">
+            <a:noAutofit/>
+          </a:bodyPr>
+          <a:lstStyle/>
+          <a:p>
+            <a:pPr indent="0" lvl="0" marL="0" marR="0" rtl="0" algn="l">
+              <a:lnSpc>
+                <a:spcPct val="100000"/>
+              </a:lnSpc>
+              <a:spcBef>
+                <a:spcPts val="0"/>
+              </a:spcBef>
+              <a:spcAft>
+                <a:spcPts val="0"/>
+              </a:spcAft>
+              <a:buClr>
+                <a:srgbClr val="000000"/>
+              </a:buClr>
+              <a:buSzPts val="1400"/>
+              <a:buFont typeface="Arial"/>
+              <a:buNone/>
+            </a:pPr>
+            <a:r>
+              <a:t/>
+            </a:r>
+            <a:endParaRPr b="0" i="0" sz="1400" u="none" cap="none" strike="noStrike">
+              <a:solidFill>
+                <a:srgbClr val="000000"/>
+              </a:solidFill>
+              <a:latin typeface="Arial"/>
+              <a:ea typeface="Arial"/>
+              <a:cs typeface="Arial"/>
+              <a:sym typeface="Arial"/>
+            </a:endParaRPr>
+          </a:p>
+        </p:txBody>
+      </p:sp>
+      <p:sp>
+        <p:nvSpPr>
+          <p:cNvPr id="572" name="Google Shape;572;p30"/>
+          <p:cNvSpPr/>
+          <p:nvPr/>
+        </p:nvSpPr>
+        <p:spPr>
+          <a:xfrm>
+            <a:off x="594350" y="1502735"/>
+            <a:ext cx="365700" cy="365700"/>
+          </a:xfrm>
+          <a:prstGeom prst="rect">
+            <a:avLst/>
+          </a:prstGeom>
+          <a:solidFill>
+            <a:srgbClr val="F28A61"/>
+          </a:solidFill>
+          <a:ln>
+            <a:noFill/>
+          </a:ln>
+        </p:spPr>
+        <p:txBody>
+          <a:bodyPr anchorCtr="0" anchor="ctr" bIns="0" lIns="0" spcFirstLastPara="1" rIns="0" wrap="square" tIns="0">
+            <a:noAutofit/>
+          </a:bodyPr>
+          <a:lstStyle/>
+          <a:p>
+            <a:pPr indent="0" lvl="0" marL="0" marR="0" rtl="0" algn="ctr">
+              <a:lnSpc>
+                <a:spcPct val="100000"/>
+              </a:lnSpc>
+              <a:spcBef>
+                <a:spcPts val="0"/>
+              </a:spcBef>
+              <a:spcAft>
+                <a:spcPts val="0"/>
+              </a:spcAft>
+              <a:buClr>
+                <a:srgbClr val="FAFAFA"/>
+              </a:buClr>
+              <a:buSzPts val="1600"/>
+              <a:buFont typeface="Arial Black"/>
+              <a:buNone/>
+            </a:pPr>
+            <a:r>
+              <a:rPr b="0" i="0" lang="en" sz="1600" u="none" cap="none" strike="noStrike">
+                <a:solidFill>
+                  <a:srgbClr val="030712"/>
+                </a:solidFill>
+                <a:latin typeface="Arial Black"/>
+                <a:ea typeface="Arial Black"/>
+                <a:cs typeface="Arial Black"/>
+                <a:sym typeface="Arial Black"/>
+              </a:rPr>
+              <a:t>1</a:t>
+            </a:r>
+            <a:endParaRPr b="0" i="0" sz="1600" u="none" cap="none" strike="noStrike">
+              <a:solidFill>
+                <a:schemeClr val="dk1"/>
+              </a:solidFill>
+              <a:latin typeface="Calibri"/>
+              <a:ea typeface="Calibri"/>
+              <a:cs typeface="Calibri"/>
+              <a:sym typeface="Calibri"/>
+            </a:endParaRPr>
+          </a:p>
+        </p:txBody>
+      </p:sp>
+      <p:pic>
+        <p:nvPicPr>
+          <p:cNvPr descr="preencoded.png" id="573" name="Google Shape;573;p30"/>
+          <p:cNvPicPr preferRelativeResize="0"/>
+          <p:nvPr/>
+        </p:nvPicPr>
+        <p:blipFill rotWithShape="1">
+          <a:blip r:embed="rId3">
+            <a:alphaModFix/>
+          </a:blip>
+          <a:srcRect b="0" l="0" r="0" t="0"/>
+          <a:stretch/>
+        </p:blipFill>
+        <p:spPr>
+          <a:xfrm>
+            <a:off x="1097270" y="1548455"/>
+            <a:ext cx="292608" cy="292608"/>
+          </a:xfrm>
+          <a:prstGeom prst="rect">
+            <a:avLst/>
+          </a:prstGeom>
+          <a:noFill/>
+          <a:ln>
+            <a:noFill/>
+          </a:ln>
+        </p:spPr>
+      </p:pic>
+      <p:sp>
+        <p:nvSpPr>
+          <p:cNvPr id="574" name="Google Shape;574;p30"/>
+          <p:cNvSpPr/>
+          <p:nvPr/>
+        </p:nvSpPr>
+        <p:spPr>
+          <a:xfrm>
+            <a:off x="594350" y="2005655"/>
+            <a:ext cx="1645800" cy="320100"/>
+          </a:xfrm>
+          <a:prstGeom prst="rect">
+            <a:avLst/>
+          </a:prstGeom>
+          <a:noFill/>
+          <a:ln>
+            <a:noFill/>
+          </a:ln>
+        </p:spPr>
+        <p:txBody>
+          <a:bodyPr anchorCtr="0" anchor="ctr" bIns="0" lIns="0" spcFirstLastPara="1" rIns="0" wrap="square" tIns="0">
+            <a:noAutofit/>
+          </a:bodyPr>
+          <a:lstStyle/>
+          <a:p>
+            <a:pPr indent="0" lvl="0" marL="0" marR="0" rtl="0" algn="l">
+              <a:lnSpc>
+                <a:spcPct val="100000"/>
+              </a:lnSpc>
+              <a:spcBef>
+                <a:spcPts val="0"/>
+              </a:spcBef>
+              <a:spcAft>
+                <a:spcPts val="0"/>
+              </a:spcAft>
+              <a:buClr>
+                <a:srgbClr val="F3F4F6"/>
+              </a:buClr>
+              <a:buSzPts val="1600"/>
+              <a:buFont typeface="Arial Black"/>
+              <a:buNone/>
+            </a:pPr>
+            <a:r>
+              <a:rPr b="0" i="0" lang="en" sz="1600" u="none" cap="none" strike="noStrike">
+                <a:solidFill>
+                  <a:srgbClr val="1F2937"/>
+                </a:solidFill>
+                <a:latin typeface="Inconsolata"/>
+                <a:ea typeface="Inconsolata"/>
+                <a:cs typeface="Inconsolata"/>
+                <a:sym typeface="Inconsolata"/>
+              </a:rPr>
+              <a:t>Trusted?</a:t>
+            </a:r>
+            <a:endParaRPr b="0" i="0" sz="1600" u="none" cap="none" strike="noStrike">
+              <a:solidFill>
+                <a:schemeClr val="dk1"/>
+              </a:solidFill>
+              <a:latin typeface="Inconsolata"/>
+              <a:ea typeface="Inconsolata"/>
+              <a:cs typeface="Inconsolata"/>
+              <a:sym typeface="Inconsolata"/>
+            </a:endParaRPr>
+          </a:p>
+        </p:txBody>
+      </p:sp>
+      <p:sp>
+        <p:nvSpPr>
+          <p:cNvPr id="575" name="Google Shape;575;p30"/>
+          <p:cNvSpPr/>
+          <p:nvPr/>
+        </p:nvSpPr>
+        <p:spPr>
+          <a:xfrm>
+            <a:off x="594350" y="2371415"/>
+            <a:ext cx="1645800" cy="822900"/>
+          </a:xfrm>
+          <a:prstGeom prst="rect">
+            <a:avLst/>
+          </a:prstGeom>
+          <a:noFill/>
+          <a:ln>
+            <a:noFill/>
+          </a:ln>
+        </p:spPr>
+        <p:txBody>
+          <a:bodyPr anchorCtr="0" anchor="ctr" bIns="0" lIns="0" spcFirstLastPara="1" rIns="0" wrap="square" tIns="0">
+            <a:noAutofit/>
+          </a:bodyPr>
+          <a:lstStyle/>
+          <a:p>
+            <a:pPr indent="0" lvl="0" marL="0" marR="0" rtl="0" algn="l">
+              <a:lnSpc>
+                <a:spcPct val="100000"/>
+              </a:lnSpc>
+              <a:spcBef>
+                <a:spcPts val="0"/>
+              </a:spcBef>
+              <a:spcAft>
+                <a:spcPts val="0"/>
+              </a:spcAft>
+              <a:buClr>
+                <a:srgbClr val="D1D5DB"/>
+              </a:buClr>
+              <a:buSzPts val="1100"/>
+              <a:buFont typeface="Calibri"/>
+              <a:buNone/>
+            </a:pPr>
+            <a:r>
+              <a:rPr b="0" i="0" lang="en" sz="1100" u="none" cap="none" strike="noStrike">
+                <a:solidFill>
+                  <a:srgbClr val="1F2937"/>
+                </a:solidFill>
+                <a:latin typeface="Calibri"/>
+                <a:ea typeface="Calibri"/>
+                <a:cs typeface="Calibri"/>
+                <a:sym typeface="Calibri"/>
+              </a:rPr>
+              <a:t>What makes a skill trusted? No binary threshold yet. Proposal: multiple vouchers, meaningful USDC backing, clean dispute record.</a:t>
+            </a:r>
+            <a:endParaRPr b="0" i="0" sz="1100" u="none" cap="none" strike="noStrike">
+              <a:solidFill>
+                <a:schemeClr val="dk1"/>
+              </a:solidFill>
+              <a:latin typeface="Calibri"/>
+              <a:ea typeface="Calibri"/>
+              <a:cs typeface="Calibri"/>
+              <a:sym typeface="Calibri"/>
+            </a:endParaRPr>
+          </a:p>
+        </p:txBody>
+      </p:sp>
+      <p:pic>
+        <p:nvPicPr>
+          <p:cNvPr descr="preencoded.png" id="576" name="Google Shape;576;p30"/>
+          <p:cNvPicPr preferRelativeResize="0"/>
+          <p:nvPr/>
+        </p:nvPicPr>
+        <p:blipFill rotWithShape="1">
+          <a:blip r:embed="rId4">
+            <a:alphaModFix/>
+          </a:blip>
+          <a:srcRect b="0" l="0" r="0" t="0"/>
+          <a:stretch/>
+        </p:blipFill>
+        <p:spPr>
+          <a:xfrm>
+            <a:off x="5371183" y="1692695"/>
+            <a:ext cx="292600" cy="292600"/>
+          </a:xfrm>
+          <a:prstGeom prst="rect">
+            <a:avLst/>
+          </a:prstGeom>
+          <a:noFill/>
+          <a:ln>
+            <a:noFill/>
+          </a:ln>
+        </p:spPr>
+      </p:pic>
+      <p:sp>
+        <p:nvSpPr>
+          <p:cNvPr id="577" name="Google Shape;577;p30"/>
+          <p:cNvSpPr/>
+          <p:nvPr/>
+        </p:nvSpPr>
+        <p:spPr>
+          <a:xfrm>
+            <a:off x="3266850" y="1387650"/>
+            <a:ext cx="2018700" cy="960000"/>
+          </a:xfrm>
+          <a:prstGeom prst="rect">
+            <a:avLst/>
+          </a:prstGeom>
+          <a:solidFill>
+            <a:srgbClr val="FFF5EE"/>
+          </a:solidFill>
+          <a:ln>
+            <a:noFill/>
+          </a:ln>
+          <a:effectLst>
+            <a:outerShdw blurRad="76200" rotWithShape="0" algn="bl" dir="8100000" dist="25400">
+              <a:srgbClr val="000000">
+                <a:alpha val="20000"/>
+              </a:srgbClr>
+            </a:outerShdw>
+          </a:effectLst>
+        </p:spPr>
+        <p:txBody>
+          <a:bodyPr anchorCtr="0" anchor="ctr" bIns="91425" lIns="91425" spcFirstLastPara="1" rIns="91425" wrap="square" tIns="91425">
+            <a:noAutofit/>
+          </a:bodyPr>
+          <a:lstStyle/>
+          <a:p>
+            <a:pPr indent="0" lvl="0" marL="0" marR="0" rtl="0" algn="l">
+              <a:lnSpc>
+                <a:spcPct val="100000"/>
+              </a:lnSpc>
+              <a:spcBef>
+                <a:spcPts val="0"/>
+              </a:spcBef>
+              <a:spcAft>
+                <a:spcPts val="0"/>
+              </a:spcAft>
+              <a:buClr>
+                <a:srgbClr val="000000"/>
+              </a:buClr>
+              <a:buSzPts val="1400"/>
+              <a:buFont typeface="Arial"/>
+              <a:buNone/>
+            </a:pPr>
+            <a:r>
+              <a:t/>
+            </a:r>
+            <a:endParaRPr b="0" i="0" sz="1400" u="none" cap="none" strike="noStrike">
+              <a:solidFill>
+                <a:srgbClr val="000000"/>
+              </a:solidFill>
+              <a:latin typeface="Arial"/>
+              <a:ea typeface="Arial"/>
+              <a:cs typeface="Arial"/>
+              <a:sym typeface="Arial"/>
+            </a:endParaRPr>
+          </a:p>
+        </p:txBody>
+      </p:sp>
+      <p:sp>
+        <p:nvSpPr>
+          <p:cNvPr id="578" name="Google Shape;578;p30"/>
+          <p:cNvSpPr/>
+          <p:nvPr/>
+        </p:nvSpPr>
+        <p:spPr>
+          <a:xfrm>
+            <a:off x="3404098" y="1491697"/>
+            <a:ext cx="365700" cy="365700"/>
+          </a:xfrm>
+          <a:prstGeom prst="rect">
+            <a:avLst/>
+          </a:prstGeom>
+          <a:solidFill>
+            <a:srgbClr val="F59E0B"/>
+          </a:solidFill>
+          <a:ln>
+            <a:noFill/>
+          </a:ln>
+        </p:spPr>
+        <p:txBody>
+          <a:bodyPr anchorCtr="0" anchor="ctr" bIns="0" lIns="0" spcFirstLastPara="1" rIns="0" wrap="square" tIns="0">
+            <a:noAutofit/>
+          </a:bodyPr>
+          <a:lstStyle/>
+          <a:p>
+            <a:pPr indent="0" lvl="0" marL="0" marR="0" rtl="0" algn="ctr">
+              <a:lnSpc>
+                <a:spcPct val="100000"/>
+              </a:lnSpc>
+              <a:spcBef>
+                <a:spcPts val="0"/>
+              </a:spcBef>
+              <a:spcAft>
+                <a:spcPts val="0"/>
+              </a:spcAft>
+              <a:buClr>
+                <a:srgbClr val="FAFAFA"/>
+              </a:buClr>
+              <a:buSzPts val="1600"/>
+              <a:buFont typeface="Arial Black"/>
+              <a:buNone/>
+            </a:pPr>
+            <a:r>
+              <a:rPr b="0" i="0" lang="en" sz="1600" u="none" cap="none" strike="noStrike">
+                <a:solidFill>
+                  <a:srgbClr val="030712"/>
+                </a:solidFill>
+                <a:latin typeface="Arial Black"/>
+                <a:ea typeface="Arial Black"/>
+                <a:cs typeface="Arial Black"/>
+                <a:sym typeface="Arial Black"/>
+              </a:rPr>
+              <a:t>2a</a:t>
+            </a:r>
+            <a:endParaRPr b="0" i="0" sz="1600" u="none" cap="none" strike="noStrike">
+              <a:solidFill>
+                <a:schemeClr val="dk1"/>
+              </a:solidFill>
+              <a:latin typeface="Calibri"/>
+              <a:ea typeface="Calibri"/>
+              <a:cs typeface="Calibri"/>
+              <a:sym typeface="Calibri"/>
+            </a:endParaRPr>
+          </a:p>
+        </p:txBody>
+      </p:sp>
+      <p:pic>
+        <p:nvPicPr>
+          <p:cNvPr descr="preencoded.png" id="579" name="Google Shape;579;p30"/>
+          <p:cNvPicPr preferRelativeResize="0"/>
+          <p:nvPr/>
+        </p:nvPicPr>
+        <p:blipFill rotWithShape="1">
+          <a:blip r:embed="rId5">
+            <a:alphaModFix/>
+          </a:blip>
+          <a:srcRect b="0" l="0" r="0" t="0"/>
+          <a:stretch/>
+        </p:blipFill>
+        <p:spPr>
+          <a:xfrm>
+            <a:off x="3912818" y="1528243"/>
+            <a:ext cx="292608" cy="292608"/>
+          </a:xfrm>
+          <a:prstGeom prst="rect">
+            <a:avLst/>
+          </a:prstGeom>
+          <a:noFill/>
+          <a:ln>
+            <a:noFill/>
+          </a:ln>
+        </p:spPr>
+      </p:pic>
+      <p:sp>
+        <p:nvSpPr>
+          <p:cNvPr id="580" name="Google Shape;580;p30"/>
+          <p:cNvSpPr/>
+          <p:nvPr/>
+        </p:nvSpPr>
+        <p:spPr>
+          <a:xfrm>
+            <a:off x="3324073" y="1948180"/>
+            <a:ext cx="1645800" cy="320100"/>
+          </a:xfrm>
+          <a:prstGeom prst="rect">
+            <a:avLst/>
+          </a:prstGeom>
+          <a:noFill/>
+          <a:ln>
+            <a:noFill/>
+          </a:ln>
+        </p:spPr>
+        <p:txBody>
+          <a:bodyPr anchorCtr="0" anchor="ctr" bIns="0" lIns="0" spcFirstLastPara="1" rIns="0" wrap="square" tIns="0">
+            <a:noAutofit/>
+          </a:bodyPr>
+          <a:lstStyle/>
+          <a:p>
+            <a:pPr indent="0" lvl="0" marL="0" marR="0" rtl="0" algn="l">
+              <a:lnSpc>
+                <a:spcPct val="100000"/>
+              </a:lnSpc>
+              <a:spcBef>
+                <a:spcPts val="0"/>
+              </a:spcBef>
+              <a:spcAft>
+                <a:spcPts val="0"/>
+              </a:spcAft>
+              <a:buClr>
+                <a:srgbClr val="F3F4F6"/>
+              </a:buClr>
+              <a:buSzPts val="1600"/>
+              <a:buFont typeface="Arial Black"/>
+              <a:buNone/>
+            </a:pPr>
+            <a:r>
+              <a:rPr b="0" i="0" lang="en" sz="1600" u="none" cap="none" strike="noStrike">
+                <a:solidFill>
+                  <a:srgbClr val="1F2937"/>
+                </a:solidFill>
+                <a:latin typeface="Inconsolata"/>
+                <a:ea typeface="Inconsolata"/>
+                <a:cs typeface="Inconsolata"/>
+                <a:sym typeface="Inconsolata"/>
+              </a:rPr>
+              <a:t>Transitive?</a:t>
+            </a:r>
+            <a:endParaRPr b="0" i="0" sz="1600" u="none" cap="none" strike="noStrike">
+              <a:solidFill>
+                <a:schemeClr val="dk1"/>
+              </a:solidFill>
+              <a:latin typeface="Inconsolata"/>
+              <a:ea typeface="Inconsolata"/>
+              <a:cs typeface="Inconsolata"/>
+              <a:sym typeface="Inconsolata"/>
+            </a:endParaRPr>
+          </a:p>
+        </p:txBody>
+      </p:sp>
+      <p:sp>
+        <p:nvSpPr>
+          <p:cNvPr id="581" name="Google Shape;581;p30"/>
+          <p:cNvSpPr/>
+          <p:nvPr/>
+        </p:nvSpPr>
+        <p:spPr>
+          <a:xfrm>
+            <a:off x="4278451" y="1474738"/>
+            <a:ext cx="908700" cy="365700"/>
+          </a:xfrm>
+          <a:prstGeom prst="rect">
+            <a:avLst/>
+          </a:prstGeom>
+          <a:noFill/>
+          <a:ln>
+            <a:noFill/>
+          </a:ln>
+        </p:spPr>
+        <p:txBody>
+          <a:bodyPr anchorCtr="0" anchor="ctr" bIns="0" lIns="0" spcFirstLastPara="1" rIns="0" wrap="square" tIns="0">
+            <a:noAutofit/>
+          </a:bodyPr>
+          <a:lstStyle/>
+          <a:p>
+            <a:pPr indent="0" lvl="0" marL="0" marR="0" rtl="0" algn="l">
+              <a:lnSpc>
+                <a:spcPct val="100000"/>
+              </a:lnSpc>
+              <a:spcBef>
+                <a:spcPts val="0"/>
+              </a:spcBef>
+              <a:spcAft>
+                <a:spcPts val="0"/>
+              </a:spcAft>
+              <a:buClr>
+                <a:srgbClr val="D1D5DB"/>
+              </a:buClr>
+              <a:buSzPts val="1100"/>
+              <a:buFont typeface="Calibri"/>
+              <a:buNone/>
+            </a:pPr>
+            <a:r>
+              <a:rPr b="0" i="0" lang="en" sz="1100" u="none" cap="none" strike="noStrike">
+                <a:solidFill>
+                  <a:srgbClr val="1F2937"/>
+                </a:solidFill>
+                <a:latin typeface="Calibri"/>
+                <a:ea typeface="Calibri"/>
+                <a:cs typeface="Calibri"/>
+                <a:sym typeface="Calibri"/>
+              </a:rPr>
+              <a:t>If A vouches B and B vouches C, does A trust </a:t>
+            </a:r>
+            <a:endParaRPr b="0" i="0" sz="1100" u="none" cap="none" strike="noStrike">
+              <a:solidFill>
+                <a:schemeClr val="dk1"/>
+              </a:solidFill>
+              <a:latin typeface="Calibri"/>
+              <a:ea typeface="Calibri"/>
+              <a:cs typeface="Calibri"/>
+              <a:sym typeface="Calibri"/>
+            </a:endParaRPr>
+          </a:p>
+        </p:txBody>
+      </p:sp>
+      <p:grpSp>
+        <p:nvGrpSpPr>
+          <p:cNvPr id="582" name="Google Shape;582;p30"/>
+          <p:cNvGrpSpPr/>
+          <p:nvPr/>
+        </p:nvGrpSpPr>
+        <p:grpSpPr>
+          <a:xfrm>
+            <a:off x="3266838" y="2560488"/>
+            <a:ext cx="1920300" cy="1200000"/>
+            <a:chOff x="3266838" y="2560488"/>
+            <a:chExt cx="1920300" cy="1200000"/>
+          </a:xfrm>
+        </p:grpSpPr>
+        <p:sp>
+          <p:nvSpPr>
+            <p:cNvPr id="583" name="Google Shape;583;p30"/>
+            <p:cNvSpPr/>
+            <p:nvPr/>
+          </p:nvSpPr>
+          <p:spPr>
+            <a:xfrm>
+              <a:off x="3266838" y="2560488"/>
+              <a:ext cx="1920300" cy="1200000"/>
+            </a:xfrm>
+            <a:prstGeom prst="rect">
+              <a:avLst/>
+            </a:prstGeom>
+            <a:solidFill>
+              <a:srgbClr val="FFF5EE"/>
+            </a:solidFill>
+            <a:ln>
+              <a:noFill/>
+            </a:ln>
+            <a:effectLst>
+              <a:outerShdw blurRad="76200" rotWithShape="0" algn="bl" dir="8100000" dist="25400">
+                <a:srgbClr val="000000">
+                  <a:alpha val="20000"/>
+                </a:srgbClr>
+              </a:outerShdw>
+            </a:effectLst>
+          </p:spPr>
+          <p:txBody>
+            <a:bodyPr anchorCtr="0" anchor="ctr" bIns="91425" lIns="91425" spcFirstLastPara="1" rIns="91425" wrap="square" tIns="91425">
+              <a:noAutofit/>
+            </a:bodyPr>
+            <a:lstStyle/>
+            <a:p>
+              <a:pPr indent="0" lvl="0" marL="0" marR="0" rtl="0" algn="l">
+                <a:lnSpc>
+                  <a:spcPct val="100000"/>
+                </a:lnSpc>
+                <a:spcBef>
+                  <a:spcPts val="0"/>
+                </a:spcBef>
+                <a:spcAft>
+                  <a:spcPts val="0"/>
+                </a:spcAft>
+                <a:buClr>
+                  <a:srgbClr val="000000"/>
+                </a:buClr>
+                <a:buSzPts val="1400"/>
+                <a:buFont typeface="Arial"/>
+                <a:buNone/>
+              </a:pPr>
+              <a:r>
+                <a:t/>
+              </a:r>
+              <a:endParaRPr b="0" i="0" sz="1400" u="none" cap="none" strike="noStrike">
+                <a:solidFill>
+                  <a:srgbClr val="000000"/>
+                </a:solidFill>
+                <a:latin typeface="Arial"/>
+                <a:ea typeface="Arial"/>
+                <a:cs typeface="Arial"/>
+                <a:sym typeface="Arial"/>
+              </a:endParaRPr>
+            </a:p>
+          </p:txBody>
+        </p:sp>
+        <p:sp>
+          <p:nvSpPr>
+            <p:cNvPr id="584" name="Google Shape;584;p30"/>
+            <p:cNvSpPr/>
+            <p:nvPr/>
+          </p:nvSpPr>
+          <p:spPr>
+            <a:xfrm>
+              <a:off x="3425670" y="2700010"/>
+              <a:ext cx="365700" cy="365700"/>
+            </a:xfrm>
+            <a:prstGeom prst="ellipse">
+              <a:avLst/>
+            </a:prstGeom>
+            <a:solidFill>
+              <a:srgbClr val="8FB5BF"/>
+            </a:solidFill>
+            <a:ln>
+              <a:noFill/>
+            </a:ln>
+          </p:spPr>
+          <p:txBody>
+            <a:bodyPr anchorCtr="0" anchor="ctr" bIns="91425" lIns="91425" spcFirstLastPara="1" rIns="91425" wrap="square" tIns="91425">
+              <a:noAutofit/>
+            </a:bodyPr>
+            <a:lstStyle/>
+            <a:p>
+              <a:pPr indent="0" lvl="0" marL="0" marR="0" rtl="0" algn="l">
+                <a:lnSpc>
+                  <a:spcPct val="100000"/>
+                </a:lnSpc>
+                <a:spcBef>
+                  <a:spcPts val="0"/>
+                </a:spcBef>
+                <a:spcAft>
+                  <a:spcPts val="0"/>
+                </a:spcAft>
+                <a:buClr>
+                  <a:srgbClr val="000000"/>
+                </a:buClr>
+                <a:buSzPts val="1400"/>
+                <a:buFont typeface="Arial"/>
+                <a:buNone/>
+              </a:pPr>
+              <a:r>
+                <a:t/>
+              </a:r>
+              <a:endParaRPr b="0" i="0" sz="1400" u="none" cap="none" strike="noStrike">
+                <a:solidFill>
+                  <a:srgbClr val="000000"/>
+                </a:solidFill>
+                <a:latin typeface="Arial"/>
+                <a:ea typeface="Arial"/>
+                <a:cs typeface="Arial"/>
+                <a:sym typeface="Arial"/>
+              </a:endParaRPr>
+            </a:p>
+          </p:txBody>
+        </p:sp>
+        <p:sp>
+          <p:nvSpPr>
+            <p:cNvPr id="585" name="Google Shape;585;p30"/>
+            <p:cNvSpPr/>
+            <p:nvPr/>
+          </p:nvSpPr>
+          <p:spPr>
+            <a:xfrm>
+              <a:off x="3425670" y="2700010"/>
+              <a:ext cx="365700" cy="365700"/>
+            </a:xfrm>
+            <a:prstGeom prst="rect">
+              <a:avLst/>
+            </a:prstGeom>
+            <a:solidFill>
+              <a:srgbClr val="FD522F"/>
+            </a:solidFill>
+            <a:ln>
+              <a:noFill/>
+            </a:ln>
+          </p:spPr>
+          <p:txBody>
+            <a:bodyPr anchorCtr="0" anchor="ctr" bIns="0" lIns="0" spcFirstLastPara="1" rIns="0" wrap="square" tIns="0">
+              <a:noAutofit/>
+            </a:bodyPr>
+            <a:lstStyle/>
+            <a:p>
+              <a:pPr indent="0" lvl="0" marL="0" marR="0" rtl="0" algn="ctr">
+                <a:lnSpc>
+                  <a:spcPct val="100000"/>
+                </a:lnSpc>
+                <a:spcBef>
+                  <a:spcPts val="0"/>
+                </a:spcBef>
+                <a:spcAft>
+                  <a:spcPts val="0"/>
+                </a:spcAft>
+                <a:buClr>
+                  <a:srgbClr val="FAFAFA"/>
+                </a:buClr>
+                <a:buSzPts val="1600"/>
+                <a:buFont typeface="Arial Black"/>
+                <a:buNone/>
+              </a:pPr>
+              <a:r>
+                <a:rPr b="0" i="0" lang="en" sz="1600" u="none" cap="none" strike="noStrike">
+                  <a:solidFill>
+                    <a:srgbClr val="030712"/>
+                  </a:solidFill>
+                  <a:latin typeface="Arial Black"/>
+                  <a:ea typeface="Arial Black"/>
+                  <a:cs typeface="Arial Black"/>
+                  <a:sym typeface="Arial Black"/>
+                </a:rPr>
+                <a:t>2b</a:t>
+              </a:r>
+              <a:endParaRPr b="0" i="0" sz="1600" u="none" cap="none" strike="noStrike">
+                <a:solidFill>
+                  <a:schemeClr val="dk1"/>
+                </a:solidFill>
+                <a:latin typeface="Calibri"/>
+                <a:ea typeface="Calibri"/>
+                <a:cs typeface="Calibri"/>
+                <a:sym typeface="Calibri"/>
+              </a:endParaRPr>
+            </a:p>
+          </p:txBody>
+        </p:sp>
+        <p:pic>
+          <p:nvPicPr>
+            <p:cNvPr descr="preencoded.png" id="586" name="Google Shape;586;p30"/>
+            <p:cNvPicPr preferRelativeResize="0"/>
+            <p:nvPr/>
+          </p:nvPicPr>
+          <p:blipFill rotWithShape="1">
+            <a:blip r:embed="rId6">
+              <a:alphaModFix/>
+            </a:blip>
+            <a:srcRect b="0" l="0" r="0" t="0"/>
+            <a:stretch/>
+          </p:blipFill>
+          <p:spPr>
+            <a:xfrm>
+              <a:off x="3928590" y="2700005"/>
+              <a:ext cx="292608" cy="292608"/>
+            </a:xfrm>
+            <a:prstGeom prst="rect">
+              <a:avLst/>
+            </a:prstGeom>
+            <a:noFill/>
+            <a:ln>
+              <a:noFill/>
+            </a:ln>
+          </p:spPr>
+        </p:pic>
+        <p:sp>
+          <p:nvSpPr>
+            <p:cNvPr id="587" name="Google Shape;587;p30"/>
+            <p:cNvSpPr/>
+            <p:nvPr/>
+          </p:nvSpPr>
+          <p:spPr>
+            <a:xfrm>
+              <a:off x="3425672" y="3202925"/>
+              <a:ext cx="684000" cy="320100"/>
+            </a:xfrm>
+            <a:prstGeom prst="rect">
+              <a:avLst/>
+            </a:prstGeom>
+            <a:noFill/>
+            <a:ln>
+              <a:noFill/>
+            </a:ln>
+          </p:spPr>
+          <p:txBody>
+            <a:bodyPr anchorCtr="0" anchor="ctr" bIns="0" lIns="0" spcFirstLastPara="1" rIns="0" wrap="square" tIns="0">
+              <a:noAutofit/>
+            </a:bodyPr>
+            <a:lstStyle/>
+            <a:p>
+              <a:pPr indent="0" lvl="0" marL="0" marR="0" rtl="0" algn="l">
+                <a:lnSpc>
+                  <a:spcPct val="100000"/>
+                </a:lnSpc>
+                <a:spcBef>
+                  <a:spcPts val="0"/>
+                </a:spcBef>
+                <a:spcAft>
+                  <a:spcPts val="0"/>
+                </a:spcAft>
+                <a:buClr>
+                  <a:srgbClr val="F3F4F6"/>
+                </a:buClr>
+                <a:buSzPts val="1600"/>
+                <a:buFont typeface="Arial Black"/>
+                <a:buNone/>
+              </a:pPr>
+              <a:r>
+                <a:rPr b="0" i="0" lang="en" sz="1600" u="none" cap="none" strike="noStrike">
+                  <a:solidFill>
+                    <a:srgbClr val="1F2937"/>
+                  </a:solidFill>
+                  <a:latin typeface="Inconsolata"/>
+                  <a:ea typeface="Inconsolata"/>
+                  <a:cs typeface="Inconsolata"/>
+                  <a:sym typeface="Inconsolata"/>
+                </a:rPr>
+                <a:t>Update?</a:t>
+              </a:r>
+              <a:endParaRPr b="0" i="0" sz="1600" u="none" cap="none" strike="noStrike">
+                <a:solidFill>
+                  <a:schemeClr val="dk1"/>
+                </a:solidFill>
+                <a:latin typeface="Inconsolata"/>
+                <a:ea typeface="Inconsolata"/>
+                <a:cs typeface="Inconsolata"/>
+                <a:sym typeface="Inconsolata"/>
+              </a:endParaRPr>
+            </a:p>
+          </p:txBody>
+        </p:sp>
+        <p:sp>
+          <p:nvSpPr>
+            <p:cNvPr id="588" name="Google Shape;588;p30"/>
+            <p:cNvSpPr/>
+            <p:nvPr/>
+          </p:nvSpPr>
+          <p:spPr>
+            <a:xfrm>
+              <a:off x="4281748" y="2860063"/>
+              <a:ext cx="848100" cy="822900"/>
+            </a:xfrm>
+            <a:prstGeom prst="rect">
+              <a:avLst/>
+            </a:prstGeom>
+            <a:noFill/>
+            <a:ln>
+              <a:noFill/>
+            </a:ln>
+          </p:spPr>
+          <p:txBody>
+            <a:bodyPr anchorCtr="0" anchor="ctr" bIns="0" lIns="0" spcFirstLastPara="1" rIns="0" wrap="square" tIns="0">
+              <a:noAutofit/>
+            </a:bodyPr>
+            <a:lstStyle/>
+            <a:p>
+              <a:pPr indent="0" lvl="0" marL="0" marR="0" rtl="0" algn="l">
+                <a:lnSpc>
+                  <a:spcPct val="100000"/>
+                </a:lnSpc>
+                <a:spcBef>
+                  <a:spcPts val="0"/>
+                </a:spcBef>
+                <a:spcAft>
+                  <a:spcPts val="0"/>
+                </a:spcAft>
+                <a:buClr>
+                  <a:srgbClr val="D1D5DB"/>
+                </a:buClr>
+                <a:buSzPts val="1100"/>
+                <a:buFont typeface="Calibri"/>
+                <a:buNone/>
+              </a:pPr>
+              <a:r>
+                <a:rPr b="0" i="0" lang="en" sz="1100" u="none" cap="none" strike="noStrike">
+                  <a:solidFill>
+                    <a:srgbClr val="1F2937"/>
+                  </a:solidFill>
+                  <a:latin typeface="Calibri"/>
+                  <a:ea typeface="Calibri"/>
+                  <a:cs typeface="Calibri"/>
+                  <a:sym typeface="Calibri"/>
+                </a:rPr>
+                <a:t>Can URI updates compromise a trusted skill?</a:t>
+              </a:r>
+              <a:endParaRPr b="0" i="0" sz="1100" u="none" cap="none" strike="noStrike">
+                <a:solidFill>
+                  <a:schemeClr val="dk1"/>
+                </a:solidFill>
+                <a:latin typeface="Calibri"/>
+                <a:ea typeface="Calibri"/>
+                <a:cs typeface="Calibri"/>
+                <a:sym typeface="Calibri"/>
+              </a:endParaRPr>
+            </a:p>
+          </p:txBody>
+        </p:sp>
+      </p:grpSp>
+      <p:pic>
+        <p:nvPicPr>
+          <p:cNvPr descr="preencoded.png" id="589" name="Google Shape;589;p30"/>
+          <p:cNvPicPr preferRelativeResize="0"/>
+          <p:nvPr/>
+        </p:nvPicPr>
+        <p:blipFill rotWithShape="1">
+          <a:blip r:embed="rId4">
+            <a:alphaModFix/>
+          </a:blip>
+          <a:srcRect b="0" l="0" r="0" t="0"/>
+          <a:stretch/>
+        </p:blipFill>
+        <p:spPr>
+          <a:xfrm>
+            <a:off x="5379470" y="3011743"/>
+            <a:ext cx="292600" cy="292560"/>
+          </a:xfrm>
+          <a:prstGeom prst="rect">
+            <a:avLst/>
+          </a:prstGeom>
+          <a:noFill/>
+          <a:ln>
+            <a:noFill/>
+          </a:ln>
+        </p:spPr>
+      </p:pic>
+      <p:sp>
+        <p:nvSpPr>
+          <p:cNvPr id="590" name="Google Shape;590;p30"/>
+          <p:cNvSpPr/>
+          <p:nvPr/>
+        </p:nvSpPr>
+        <p:spPr>
+          <a:xfrm>
+            <a:off x="457200" y="3855700"/>
+            <a:ext cx="7327500" cy="960000"/>
+          </a:xfrm>
+          <a:prstGeom prst="rect">
+            <a:avLst/>
+          </a:prstGeom>
+          <a:solidFill>
+            <a:srgbClr val="FFF5EE"/>
+          </a:solidFill>
+          <a:ln>
+            <a:noFill/>
+          </a:ln>
+        </p:spPr>
+        <p:txBody>
+          <a:bodyPr anchorCtr="0" anchor="ctr" bIns="91425" lIns="91425" spcFirstLastPara="1" rIns="91425" wrap="square" tIns="91425">
+            <a:noAutofit/>
+          </a:bodyPr>
+          <a:lstStyle/>
+          <a:p>
+            <a:pPr indent="0" lvl="0" marL="0" marR="0" rtl="0" algn="l">
+              <a:lnSpc>
+                <a:spcPct val="100000"/>
+              </a:lnSpc>
+              <a:spcBef>
+                <a:spcPts val="0"/>
+              </a:spcBef>
+              <a:spcAft>
+                <a:spcPts val="0"/>
+              </a:spcAft>
+              <a:buClr>
+                <a:srgbClr val="000000"/>
+              </a:buClr>
+              <a:buSzPts val="1400"/>
+              <a:buFont typeface="Arial"/>
+              <a:buNone/>
+            </a:pPr>
+            <a:r>
+              <a:t/>
+            </a:r>
+            <a:endParaRPr b="0" i="0" sz="1400" u="none" cap="none" strike="noStrike">
+              <a:solidFill>
+                <a:srgbClr val="000000"/>
+              </a:solidFill>
+              <a:latin typeface="Arial"/>
+              <a:ea typeface="Arial"/>
+              <a:cs typeface="Arial"/>
+              <a:sym typeface="Arial"/>
+            </a:endParaRPr>
+          </a:p>
+        </p:txBody>
+      </p:sp>
+      <p:sp>
+        <p:nvSpPr>
+          <p:cNvPr id="591" name="Google Shape;591;p30"/>
+          <p:cNvSpPr/>
+          <p:nvPr/>
+        </p:nvSpPr>
+        <p:spPr>
+          <a:xfrm>
+            <a:off x="640080" y="3886195"/>
+            <a:ext cx="2743200" cy="274200"/>
+          </a:xfrm>
+          <a:prstGeom prst="rect">
+            <a:avLst/>
+          </a:prstGeom>
+          <a:noFill/>
+          <a:ln>
+            <a:noFill/>
+          </a:ln>
+        </p:spPr>
+        <p:txBody>
+          <a:bodyPr anchorCtr="0" anchor="ctr" bIns="0" lIns="0" spcFirstLastPara="1" rIns="0" wrap="square" tIns="0">
+            <a:noAutofit/>
+          </a:bodyPr>
+          <a:lstStyle/>
+          <a:p>
+            <a:pPr indent="0" lvl="0" marL="0" marR="0" rtl="0" algn="l">
+              <a:lnSpc>
+                <a:spcPct val="100000"/>
+              </a:lnSpc>
+              <a:spcBef>
+                <a:spcPts val="0"/>
+              </a:spcBef>
+              <a:spcAft>
+                <a:spcPts val="0"/>
+              </a:spcAft>
+              <a:buClr>
+                <a:srgbClr val="F28A61"/>
+              </a:buClr>
+              <a:buSzPts val="1200"/>
+              <a:buFont typeface="Arial Black"/>
+              <a:buNone/>
+            </a:pPr>
+            <a:r>
+              <a:rPr b="0" i="0" lang="en" sz="1200" u="none" cap="none" strike="noStrike">
+                <a:solidFill>
+                  <a:srgbClr val="F28A61"/>
+                </a:solidFill>
+                <a:latin typeface="Inconsolata"/>
+                <a:ea typeface="Inconsolata"/>
+                <a:cs typeface="Inconsolata"/>
+                <a:sym typeface="Inconsolata"/>
+              </a:rPr>
+              <a:t>Governance?</a:t>
+            </a:r>
+            <a:endParaRPr b="0" i="0" sz="1200" u="none" cap="none" strike="noStrike">
+              <a:solidFill>
+                <a:schemeClr val="dk1"/>
+              </a:solidFill>
+              <a:latin typeface="Inconsolata"/>
+              <a:ea typeface="Inconsolata"/>
+              <a:cs typeface="Inconsolata"/>
+              <a:sym typeface="Inconsolata"/>
+            </a:endParaRPr>
+          </a:p>
+        </p:txBody>
+      </p:sp>
+      <p:sp>
+        <p:nvSpPr>
+          <p:cNvPr id="592" name="Google Shape;592;p30"/>
+          <p:cNvSpPr/>
+          <p:nvPr/>
+        </p:nvSpPr>
+        <p:spPr>
+          <a:xfrm>
+            <a:off x="640080" y="4160515"/>
+            <a:ext cx="7772400" cy="274200"/>
+          </a:xfrm>
+          <a:prstGeom prst="rect">
+            <a:avLst/>
+          </a:prstGeom>
+          <a:noFill/>
+          <a:ln>
+            <a:noFill/>
+          </a:ln>
+        </p:spPr>
+        <p:txBody>
+          <a:bodyPr anchorCtr="0" anchor="ctr" bIns="0" lIns="0" spcFirstLastPara="1" rIns="0" wrap="square" tIns="0">
+            <a:noAutofit/>
+          </a:bodyPr>
+          <a:lstStyle/>
+          <a:p>
+            <a:pPr indent="0" lvl="0" marL="0" marR="0" rtl="0" algn="l">
+              <a:lnSpc>
+                <a:spcPct val="100000"/>
+              </a:lnSpc>
+              <a:spcBef>
+                <a:spcPts val="0"/>
+              </a:spcBef>
+              <a:spcAft>
+                <a:spcPts val="0"/>
+              </a:spcAft>
+              <a:buClr>
+                <a:srgbClr val="F59E0B"/>
+              </a:buClr>
+              <a:buSzPts val="1300"/>
+              <a:buFont typeface="Consolas"/>
+              <a:buNone/>
+            </a:pPr>
+            <a:r>
+              <a:rPr b="0" i="0" lang="en" sz="1200" u="none" cap="none" strike="noStrike">
+                <a:solidFill>
+                  <a:srgbClr val="F59E0B"/>
+                </a:solidFill>
+                <a:latin typeface="Calibri"/>
+                <a:ea typeface="Calibri"/>
+                <a:cs typeface="Calibri"/>
+                <a:sym typeface="Calibri"/>
+              </a:rPr>
+              <a:t>Who resolves disputes at scale? Today: authorized resolver. Mainnet options: multi-sig, DAO, stake-weighted voting.</a:t>
+            </a:r>
+            <a:endParaRPr b="0" i="0" sz="1200" u="none" cap="none" strike="noStrike">
+              <a:solidFill>
+                <a:schemeClr val="dk1"/>
+              </a:solidFill>
+              <a:latin typeface="Calibri"/>
+              <a:ea typeface="Calibri"/>
+              <a:cs typeface="Calibri"/>
+              <a:sym typeface="Calibri"/>
+            </a:endParaRPr>
+          </a:p>
+        </p:txBody>
+      </p:sp>
+      <p:sp>
+        <p:nvSpPr>
+          <p:cNvPr id="593" name="Google Shape;593;p30"/>
+          <p:cNvSpPr/>
+          <p:nvPr/>
+        </p:nvSpPr>
+        <p:spPr>
+          <a:xfrm>
+            <a:off x="640080" y="4480555"/>
+            <a:ext cx="7772400" cy="228600"/>
+          </a:xfrm>
+          <a:prstGeom prst="rect">
+            <a:avLst/>
+          </a:prstGeom>
+          <a:noFill/>
+          <a:ln>
+            <a:noFill/>
+          </a:ln>
+        </p:spPr>
+        <p:txBody>
+          <a:bodyPr anchorCtr="0" anchor="ctr" bIns="0" lIns="0" spcFirstLastPara="1" rIns="0" wrap="square" tIns="0">
+            <a:noAutofit/>
+          </a:bodyPr>
+          <a:lstStyle/>
+          <a:p>
+            <a:pPr indent="0" lvl="0" marL="0" marR="0" rtl="0" algn="l">
+              <a:lnSpc>
+                <a:spcPct val="100000"/>
+              </a:lnSpc>
+              <a:spcBef>
+                <a:spcPts val="0"/>
+              </a:spcBef>
+              <a:spcAft>
+                <a:spcPts val="0"/>
+              </a:spcAft>
+              <a:buClr>
+                <a:srgbClr val="6B7280"/>
+              </a:buClr>
+              <a:buSzPts val="1000"/>
+              <a:buFont typeface="Calibri"/>
+              <a:buNone/>
+            </a:pPr>
+            <a:r>
+              <a:t/>
+            </a:r>
+            <a:endParaRPr b="0" i="0" sz="1000" u="none" cap="none" strike="noStrike">
+              <a:solidFill>
+                <a:schemeClr val="lt2"/>
+              </a:solidFill>
+              <a:latin typeface="Calibri"/>
+              <a:ea typeface="Calibri"/>
+              <a:cs typeface="Calibri"/>
+              <a:sym typeface="Calibri"/>
+            </a:endParaRPr>
+          </a:p>
+        </p:txBody>
+      </p:sp>
+      <p:sp>
+        <p:nvSpPr>
+          <p:cNvPr id="594" name="Google Shape;594;p30"/>
+          <p:cNvSpPr/>
+          <p:nvPr/>
+        </p:nvSpPr>
+        <p:spPr>
+          <a:xfrm>
+            <a:off x="457200" y="4709160"/>
+            <a:ext cx="2743200" cy="320100"/>
+          </a:xfrm>
+          <a:prstGeom prst="rect">
+            <a:avLst/>
+          </a:prstGeom>
+          <a:noFill/>
+          <a:ln>
+            <a:noFill/>
+          </a:ln>
+        </p:spPr>
+        <p:txBody>
+          <a:bodyPr anchorCtr="0" anchor="ctr" bIns="0" lIns="0" spcFirstLastPara="1" rIns="0" wrap="square" tIns="0">
+            <a:noAutofit/>
+          </a:bodyPr>
+          <a:lstStyle/>
+          <a:p>
+            <a:pPr indent="0" lvl="0" marL="0" marR="0" rtl="0" algn="l">
+              <a:lnSpc>
+                <a:spcPct val="100000"/>
+              </a:lnSpc>
+              <a:spcBef>
+                <a:spcPts val="0"/>
+              </a:spcBef>
+              <a:spcAft>
+                <a:spcPts val="0"/>
+              </a:spcAft>
+              <a:buClr>
+                <a:srgbClr val="6B7280"/>
+              </a:buClr>
+              <a:buSzPts val="900"/>
+              <a:buFont typeface="Calibri"/>
+              <a:buNone/>
+            </a:pPr>
+            <a:r>
+              <a:rPr b="0" i="0" lang="en" sz="900" u="none" cap="none" strike="noStrike">
+                <a:solidFill>
+                  <a:srgbClr val="6B7280"/>
+                </a:solidFill>
+                <a:latin typeface="Calibri"/>
+                <a:ea typeface="Calibri"/>
+                <a:cs typeface="Calibri"/>
+                <a:sym typeface="Calibri"/>
+              </a:rPr>
+              <a:t>AgentVouch</a:t>
+            </a:r>
+            <a:endParaRPr b="0" i="0" sz="900" u="none" cap="none" strike="noStrike">
+              <a:solidFill>
+                <a:schemeClr val="dk1"/>
+              </a:solidFill>
+              <a:latin typeface="Calibri"/>
+              <a:ea typeface="Calibri"/>
+              <a:cs typeface="Calibri"/>
+              <a:sym typeface="Calibri"/>
+            </a:endParaRPr>
+          </a:p>
+        </p:txBody>
+      </p:sp>
+      <p:sp>
+        <p:nvSpPr>
+          <p:cNvPr id="595" name="Google Shape;595;p30"/>
+          <p:cNvSpPr/>
+          <p:nvPr/>
+        </p:nvSpPr>
+        <p:spPr>
+          <a:xfrm>
+            <a:off x="6400800" y="4709160"/>
+            <a:ext cx="2286000" cy="320100"/>
+          </a:xfrm>
+          <a:prstGeom prst="rect">
+            <a:avLst/>
+          </a:prstGeom>
+          <a:noFill/>
+          <a:ln>
+            <a:noFill/>
+          </a:ln>
+        </p:spPr>
+        <p:txBody>
+          <a:bodyPr anchorCtr="0" anchor="ctr" bIns="0" lIns="0" spcFirstLastPara="1" rIns="0" wrap="square" tIns="0">
+            <a:noAutofit/>
+          </a:bodyPr>
+          <a:lstStyle/>
+          <a:p>
+            <a:pPr indent="0" lvl="0" marL="0" marR="0" rtl="0" algn="r">
+              <a:lnSpc>
+                <a:spcPct val="100000"/>
+              </a:lnSpc>
+              <a:spcBef>
+                <a:spcPts val="0"/>
+              </a:spcBef>
+              <a:spcAft>
+                <a:spcPts val="0"/>
+              </a:spcAft>
+              <a:buClr>
+                <a:srgbClr val="6B7280"/>
+              </a:buClr>
+              <a:buSzPts val="900"/>
+              <a:buFont typeface="Calibri"/>
+              <a:buNone/>
+            </a:pPr>
+            <a:r>
+              <a:rPr b="0" i="0" lang="en" sz="900" u="none" cap="none" strike="noStrike">
+                <a:solidFill>
+                  <a:srgbClr val="6B7280"/>
+                </a:solidFill>
+                <a:latin typeface="Calibri"/>
+                <a:ea typeface="Calibri"/>
+                <a:cs typeface="Calibri"/>
+                <a:sym typeface="Calibri"/>
+              </a:rPr>
+              <a:t>Appendix 3/3</a:t>
+            </a:r>
+            <a:endParaRPr b="0" i="0" sz="900" u="none" cap="none" strike="noStrike">
+              <a:solidFill>
+                <a:schemeClr val="dk1"/>
+              </a:solidFill>
+              <a:latin typeface="Calibri"/>
+              <a:ea typeface="Calibri"/>
+              <a:cs typeface="Calibri"/>
+              <a:sym typeface="Calibri"/>
+            </a:endParaRPr>
+          </a:p>
+        </p:txBody>
+      </p:sp>
+      <p:grpSp>
+        <p:nvGrpSpPr>
+          <p:cNvPr id="596" name="Google Shape;596;p30"/>
+          <p:cNvGrpSpPr/>
+          <p:nvPr/>
+        </p:nvGrpSpPr>
+        <p:grpSpPr>
+          <a:xfrm>
+            <a:off x="5864400" y="2449350"/>
+            <a:ext cx="1920300" cy="1333200"/>
+            <a:chOff x="5864400" y="2449350"/>
+            <a:chExt cx="1920300" cy="1333200"/>
+          </a:xfrm>
+        </p:grpSpPr>
+        <p:sp>
+          <p:nvSpPr>
+            <p:cNvPr id="597" name="Google Shape;597;p30"/>
+            <p:cNvSpPr/>
+            <p:nvPr/>
+          </p:nvSpPr>
+          <p:spPr>
+            <a:xfrm>
+              <a:off x="5864400" y="2449350"/>
+              <a:ext cx="1920300" cy="1333200"/>
+            </a:xfrm>
+            <a:prstGeom prst="rect">
+              <a:avLst/>
+            </a:prstGeom>
+            <a:solidFill>
+              <a:srgbClr val="FFF5EE"/>
+            </a:solidFill>
+            <a:ln>
+              <a:noFill/>
+            </a:ln>
+            <a:effectLst>
+              <a:outerShdw blurRad="76200" rotWithShape="0" algn="bl" dir="8100000" dist="25400">
+                <a:srgbClr val="000000">
+                  <a:alpha val="20000"/>
+                </a:srgbClr>
+              </a:outerShdw>
+            </a:effectLst>
+          </p:spPr>
+          <p:txBody>
+            <a:bodyPr anchorCtr="0" anchor="ctr" bIns="91425" lIns="91425" spcFirstLastPara="1" rIns="91425" wrap="square" tIns="91425">
+              <a:noAutofit/>
+            </a:bodyPr>
+            <a:lstStyle/>
+            <a:p>
+              <a:pPr indent="0" lvl="0" marL="0" marR="0" rtl="0" algn="l">
+                <a:lnSpc>
+                  <a:spcPct val="100000"/>
+                </a:lnSpc>
+                <a:spcBef>
+                  <a:spcPts val="0"/>
+                </a:spcBef>
+                <a:spcAft>
+                  <a:spcPts val="0"/>
+                </a:spcAft>
+                <a:buClr>
+                  <a:srgbClr val="000000"/>
+                </a:buClr>
+                <a:buSzPts val="1400"/>
+                <a:buFont typeface="Arial"/>
+                <a:buNone/>
+              </a:pPr>
+              <a:r>
+                <a:t/>
+              </a:r>
+              <a:endParaRPr b="0" i="0" sz="1400" u="none" cap="none" strike="noStrike">
+                <a:solidFill>
+                  <a:srgbClr val="000000"/>
+                </a:solidFill>
+                <a:latin typeface="Arial"/>
+                <a:ea typeface="Arial"/>
+                <a:cs typeface="Arial"/>
+                <a:sym typeface="Arial"/>
+              </a:endParaRPr>
+            </a:p>
+          </p:txBody>
+        </p:sp>
+        <p:sp>
+          <p:nvSpPr>
+            <p:cNvPr id="598" name="Google Shape;598;p30"/>
+            <p:cNvSpPr/>
+            <p:nvPr/>
+          </p:nvSpPr>
+          <p:spPr>
+            <a:xfrm>
+              <a:off x="6001555" y="2586510"/>
+              <a:ext cx="365700" cy="365700"/>
+            </a:xfrm>
+            <a:prstGeom prst="ellipse">
+              <a:avLst/>
+            </a:prstGeom>
+            <a:solidFill>
+              <a:srgbClr val="F59E0B"/>
+            </a:solidFill>
+            <a:ln>
+              <a:noFill/>
+            </a:ln>
+          </p:spPr>
+          <p:txBody>
+            <a:bodyPr anchorCtr="0" anchor="ctr" bIns="91425" lIns="91425" spcFirstLastPara="1" rIns="91425" wrap="square" tIns="91425">
+              <a:noAutofit/>
+            </a:bodyPr>
+            <a:lstStyle/>
+            <a:p>
+              <a:pPr indent="0" lvl="0" marL="0" marR="0" rtl="0" algn="l">
+                <a:lnSpc>
+                  <a:spcPct val="100000"/>
+                </a:lnSpc>
+                <a:spcBef>
+                  <a:spcPts val="0"/>
+                </a:spcBef>
+                <a:spcAft>
+                  <a:spcPts val="0"/>
+                </a:spcAft>
+                <a:buClr>
+                  <a:srgbClr val="000000"/>
+                </a:buClr>
+                <a:buSzPts val="1400"/>
+                <a:buFont typeface="Arial"/>
+                <a:buNone/>
+              </a:pPr>
+              <a:r>
+                <a:t/>
+              </a:r>
+              <a:endParaRPr b="0" i="0" sz="1400" u="none" cap="none" strike="noStrike">
+                <a:solidFill>
+                  <a:srgbClr val="000000"/>
+                </a:solidFill>
+                <a:latin typeface="Arial"/>
+                <a:ea typeface="Arial"/>
+                <a:cs typeface="Arial"/>
+                <a:sym typeface="Arial"/>
+              </a:endParaRPr>
+            </a:p>
+          </p:txBody>
+        </p:sp>
+        <p:sp>
+          <p:nvSpPr>
+            <p:cNvPr id="599" name="Google Shape;599;p30"/>
+            <p:cNvSpPr/>
+            <p:nvPr/>
+          </p:nvSpPr>
+          <p:spPr>
+            <a:xfrm>
+              <a:off x="6001555" y="2586510"/>
+              <a:ext cx="365700" cy="365700"/>
+            </a:xfrm>
+            <a:prstGeom prst="rect">
+              <a:avLst/>
+            </a:prstGeom>
+            <a:solidFill>
+              <a:srgbClr val="93C47D"/>
+            </a:solidFill>
+            <a:ln>
+              <a:noFill/>
+            </a:ln>
+          </p:spPr>
+          <p:txBody>
+            <a:bodyPr anchorCtr="0" anchor="ctr" bIns="0" lIns="0" spcFirstLastPara="1" rIns="0" wrap="square" tIns="0">
+              <a:noAutofit/>
+            </a:bodyPr>
+            <a:lstStyle/>
+            <a:p>
+              <a:pPr indent="0" lvl="0" marL="0" marR="0" rtl="0" algn="ctr">
+                <a:lnSpc>
+                  <a:spcPct val="100000"/>
+                </a:lnSpc>
+                <a:spcBef>
+                  <a:spcPts val="0"/>
+                </a:spcBef>
+                <a:spcAft>
+                  <a:spcPts val="0"/>
+                </a:spcAft>
+                <a:buClr>
+                  <a:srgbClr val="FAFAFA"/>
+                </a:buClr>
+                <a:buSzPts val="1600"/>
+                <a:buFont typeface="Arial Black"/>
+                <a:buNone/>
+              </a:pPr>
+              <a:r>
+                <a:rPr b="0" i="0" lang="en" sz="1600" u="none" cap="none" strike="noStrike">
+                  <a:solidFill>
+                    <a:srgbClr val="030712"/>
+                  </a:solidFill>
+                  <a:latin typeface="Arial Black"/>
+                  <a:ea typeface="Arial Black"/>
+                  <a:cs typeface="Arial Black"/>
+                  <a:sym typeface="Arial Black"/>
+                </a:rPr>
+                <a:t>3b</a:t>
+              </a:r>
+              <a:endParaRPr b="0" i="0" sz="1600" u="none" cap="none" strike="noStrike">
+                <a:solidFill>
+                  <a:schemeClr val="dk1"/>
+                </a:solidFill>
+                <a:latin typeface="Calibri"/>
+                <a:ea typeface="Calibri"/>
+                <a:cs typeface="Calibri"/>
+                <a:sym typeface="Calibri"/>
+              </a:endParaRPr>
+            </a:p>
+          </p:txBody>
+        </p:sp>
+        <p:sp>
+          <p:nvSpPr>
+            <p:cNvPr id="600" name="Google Shape;600;p30"/>
+            <p:cNvSpPr/>
+            <p:nvPr/>
+          </p:nvSpPr>
+          <p:spPr>
+            <a:xfrm>
+              <a:off x="6001555" y="3089430"/>
+              <a:ext cx="1645800" cy="320100"/>
+            </a:xfrm>
+            <a:prstGeom prst="rect">
+              <a:avLst/>
+            </a:prstGeom>
+            <a:noFill/>
+            <a:ln>
+              <a:noFill/>
+            </a:ln>
+          </p:spPr>
+          <p:txBody>
+            <a:bodyPr anchorCtr="0" anchor="ctr" bIns="0" lIns="0" spcFirstLastPara="1" rIns="0" wrap="square" tIns="0">
+              <a:noAutofit/>
+            </a:bodyPr>
+            <a:lstStyle/>
+            <a:p>
+              <a:pPr indent="0" lvl="0" marL="0" marR="0" rtl="0" algn="l">
+                <a:lnSpc>
+                  <a:spcPct val="100000"/>
+                </a:lnSpc>
+                <a:spcBef>
+                  <a:spcPts val="0"/>
+                </a:spcBef>
+                <a:spcAft>
+                  <a:spcPts val="0"/>
+                </a:spcAft>
+                <a:buClr>
+                  <a:srgbClr val="F3F4F6"/>
+                </a:buClr>
+                <a:buSzPts val="1600"/>
+                <a:buFont typeface="Arial Black"/>
+                <a:buNone/>
+              </a:pPr>
+              <a:r>
+                <a:rPr b="0" i="0" lang="en" sz="1600" u="none" cap="none" strike="noStrike">
+                  <a:solidFill>
+                    <a:srgbClr val="1F2937"/>
+                  </a:solidFill>
+                  <a:latin typeface="Inconsolata"/>
+                  <a:ea typeface="Inconsolata"/>
+                  <a:cs typeface="Inconsolata"/>
+                  <a:sym typeface="Inconsolata"/>
+                </a:rPr>
+                <a:t>Resolve</a:t>
+              </a:r>
+              <a:endParaRPr b="0" i="0" sz="1600" u="none" cap="none" strike="noStrike">
+                <a:solidFill>
+                  <a:schemeClr val="dk1"/>
+                </a:solidFill>
+                <a:latin typeface="Inconsolata"/>
+                <a:ea typeface="Inconsolata"/>
+                <a:cs typeface="Inconsolata"/>
+                <a:sym typeface="Inconsolata"/>
+              </a:endParaRPr>
+            </a:p>
+          </p:txBody>
+        </p:sp>
+        <p:sp>
+          <p:nvSpPr>
+            <p:cNvPr id="601" name="Google Shape;601;p30"/>
+            <p:cNvSpPr/>
+            <p:nvPr/>
+          </p:nvSpPr>
+          <p:spPr>
+            <a:xfrm>
+              <a:off x="6857702" y="2746563"/>
+              <a:ext cx="848100" cy="822900"/>
+            </a:xfrm>
+            <a:prstGeom prst="rect">
+              <a:avLst/>
+            </a:prstGeom>
+            <a:noFill/>
+            <a:ln>
+              <a:noFill/>
+            </a:ln>
+          </p:spPr>
+          <p:txBody>
+            <a:bodyPr anchorCtr="0" anchor="ctr" bIns="0" lIns="0" spcFirstLastPara="1" rIns="0" wrap="square" tIns="0">
+              <a:noAutofit/>
+            </a:bodyPr>
+            <a:lstStyle/>
+            <a:p>
+              <a:pPr indent="0" lvl="0" marL="0" marR="0" rtl="0" algn="l">
+                <a:lnSpc>
+                  <a:spcPct val="100000"/>
+                </a:lnSpc>
+                <a:spcBef>
+                  <a:spcPts val="0"/>
+                </a:spcBef>
+                <a:spcAft>
+                  <a:spcPts val="0"/>
+                </a:spcAft>
+                <a:buClr>
+                  <a:srgbClr val="D1D5DB"/>
+                </a:buClr>
+                <a:buSzPts val="1100"/>
+                <a:buFont typeface="Calibri"/>
+                <a:buNone/>
+              </a:pPr>
+              <a:r>
+                <a:rPr b="0" i="0" lang="en" sz="1100" u="none" cap="none" strike="noStrike">
+                  <a:solidFill>
+                    <a:srgbClr val="1F2937"/>
+                  </a:solidFill>
+                  <a:latin typeface="Calibri"/>
+                  <a:ea typeface="Calibri"/>
+                  <a:cs typeface="Calibri"/>
+                  <a:sym typeface="Calibri"/>
+                </a:rPr>
+                <a:t>Contribute: github.com/dirtybits/agent-reputation-oracle</a:t>
+              </a:r>
+              <a:endParaRPr b="0" i="0" sz="1100" u="none" cap="none" strike="noStrike">
+                <a:solidFill>
+                  <a:schemeClr val="dk1"/>
+                </a:solidFill>
+                <a:latin typeface="Calibri"/>
+                <a:ea typeface="Calibri"/>
+                <a:cs typeface="Calibri"/>
+                <a:sym typeface="Calibri"/>
+              </a:endParaRPr>
+            </a:p>
+          </p:txBody>
+        </p:sp>
+        <p:pic>
+          <p:nvPicPr>
+            <p:cNvPr id="602" name="Google Shape;602;p30" title="check-circle-fill (1).png"/>
+            <p:cNvPicPr preferRelativeResize="0"/>
+            <p:nvPr/>
+          </p:nvPicPr>
+          <p:blipFill rotWithShape="1">
+            <a:blip r:embed="rId7">
+              <a:alphaModFix/>
+            </a:blip>
+            <a:srcRect b="0" l="0" r="0" t="0"/>
+            <a:stretch/>
+          </p:blipFill>
+          <p:spPr>
+            <a:xfrm>
+              <a:off x="6466221" y="2671838"/>
+              <a:ext cx="263375" cy="263393"/>
+            </a:xfrm>
+            <a:prstGeom prst="rect">
+              <a:avLst/>
+            </a:prstGeom>
+            <a:noFill/>
+            <a:ln>
+              <a:noFill/>
+            </a:ln>
+          </p:spPr>
+        </p:pic>
+      </p:grpSp>
+      <p:pic>
+        <p:nvPicPr>
+          <p:cNvPr id="603" name="Google Shape;603;p30" title="direction--fork.png"/>
+          <p:cNvPicPr preferRelativeResize="0"/>
+          <p:nvPr/>
+        </p:nvPicPr>
+        <p:blipFill rotWithShape="1">
+          <a:blip r:embed="rId8">
+            <a:alphaModFix/>
+          </a:blip>
+          <a:srcRect b="0" l="0" r="0" t="0"/>
+          <a:stretch/>
+        </p:blipFill>
+        <p:spPr>
+          <a:xfrm rot="5400000">
+            <a:off x="2580775" y="2180269"/>
+            <a:ext cx="482801" cy="482801"/>
+          </a:xfrm>
+          <a:prstGeom prst="rect">
+            <a:avLst/>
+          </a:prstGeom>
+          <a:noFill/>
+          <a:ln>
+            <a:noFill/>
+          </a:ln>
+        </p:spPr>
+      </p:pic>
+      <p:sp>
+        <p:nvSpPr>
+          <p:cNvPr id="604" name="Google Shape;604;p30"/>
+          <p:cNvSpPr/>
+          <p:nvPr/>
+        </p:nvSpPr>
+        <p:spPr>
+          <a:xfrm>
+            <a:off x="5847800" y="1365575"/>
+            <a:ext cx="1920300" cy="902700"/>
+          </a:xfrm>
+          <a:prstGeom prst="rect">
+            <a:avLst/>
+          </a:prstGeom>
+          <a:solidFill>
+            <a:srgbClr val="FFF5EE"/>
+          </a:solidFill>
+          <a:ln>
+            <a:noFill/>
+          </a:ln>
+          <a:effectLst>
+            <a:outerShdw blurRad="76200" rotWithShape="0" algn="bl" dir="8100000" dist="25400">
+              <a:srgbClr val="000000">
+                <a:alpha val="20000"/>
+              </a:srgbClr>
+            </a:outerShdw>
+          </a:effectLst>
+        </p:spPr>
+        <p:txBody>
+          <a:bodyPr anchorCtr="0" anchor="ctr" bIns="91425" lIns="91425" spcFirstLastPara="1" rIns="91425" wrap="square" tIns="91425">
+            <a:noAutofit/>
+          </a:bodyPr>
+          <a:lstStyle/>
+          <a:p>
+            <a:pPr indent="0" lvl="0" marL="0" marR="0" rtl="0" algn="l">
+              <a:lnSpc>
+                <a:spcPct val="100000"/>
+              </a:lnSpc>
+              <a:spcBef>
+                <a:spcPts val="0"/>
+              </a:spcBef>
+              <a:spcAft>
+                <a:spcPts val="0"/>
+              </a:spcAft>
+              <a:buClr>
+                <a:srgbClr val="000000"/>
+              </a:buClr>
+              <a:buSzPts val="1400"/>
+              <a:buFont typeface="Arial"/>
+              <a:buNone/>
+            </a:pPr>
+            <a:r>
+              <a:t/>
+            </a:r>
+            <a:endParaRPr b="0" i="0" sz="1400" u="none" cap="none" strike="noStrike">
+              <a:solidFill>
+                <a:srgbClr val="000000"/>
+              </a:solidFill>
+              <a:latin typeface="Arial"/>
+              <a:ea typeface="Arial"/>
+              <a:cs typeface="Arial"/>
+              <a:sym typeface="Arial"/>
+            </a:endParaRPr>
+          </a:p>
+        </p:txBody>
+      </p:sp>
+      <p:sp>
+        <p:nvSpPr>
+          <p:cNvPr id="605" name="Google Shape;605;p30"/>
+          <p:cNvSpPr/>
+          <p:nvPr/>
+        </p:nvSpPr>
+        <p:spPr>
+          <a:xfrm>
+            <a:off x="5985048" y="1469622"/>
+            <a:ext cx="365700" cy="365700"/>
+          </a:xfrm>
+          <a:prstGeom prst="rect">
+            <a:avLst/>
+          </a:prstGeom>
+          <a:solidFill>
+            <a:srgbClr val="6F86FF"/>
+          </a:solidFill>
+          <a:ln>
+            <a:noFill/>
+          </a:ln>
+        </p:spPr>
+        <p:txBody>
+          <a:bodyPr anchorCtr="0" anchor="ctr" bIns="0" lIns="0" spcFirstLastPara="1" rIns="0" wrap="square" tIns="0">
+            <a:noAutofit/>
+          </a:bodyPr>
+          <a:lstStyle/>
+          <a:p>
+            <a:pPr indent="0" lvl="0" marL="0" marR="0" rtl="0" algn="ctr">
+              <a:lnSpc>
+                <a:spcPct val="100000"/>
+              </a:lnSpc>
+              <a:spcBef>
+                <a:spcPts val="0"/>
+              </a:spcBef>
+              <a:spcAft>
+                <a:spcPts val="0"/>
+              </a:spcAft>
+              <a:buClr>
+                <a:srgbClr val="FAFAFA"/>
+              </a:buClr>
+              <a:buSzPts val="1600"/>
+              <a:buFont typeface="Arial Black"/>
+              <a:buNone/>
+            </a:pPr>
+            <a:r>
+              <a:rPr b="0" i="0" lang="en" sz="1600" u="none" cap="none" strike="noStrike">
+                <a:solidFill>
+                  <a:srgbClr val="030712"/>
+                </a:solidFill>
+                <a:latin typeface="Arial Black"/>
+                <a:ea typeface="Arial Black"/>
+                <a:cs typeface="Arial Black"/>
+                <a:sym typeface="Arial Black"/>
+              </a:rPr>
+              <a:t>3a</a:t>
+            </a:r>
+            <a:endParaRPr b="0" i="0" sz="1600" u="none" cap="none" strike="noStrike">
+              <a:solidFill>
+                <a:schemeClr val="dk1"/>
+              </a:solidFill>
+              <a:latin typeface="Calibri"/>
+              <a:ea typeface="Calibri"/>
+              <a:cs typeface="Calibri"/>
+              <a:sym typeface="Calibri"/>
+            </a:endParaRPr>
+          </a:p>
+        </p:txBody>
+      </p:sp>
+      <p:sp>
+        <p:nvSpPr>
+          <p:cNvPr id="606" name="Google Shape;606;p30"/>
+          <p:cNvSpPr/>
+          <p:nvPr/>
+        </p:nvSpPr>
+        <p:spPr>
+          <a:xfrm>
+            <a:off x="5916435" y="1827980"/>
+            <a:ext cx="1645800" cy="320100"/>
+          </a:xfrm>
+          <a:prstGeom prst="rect">
+            <a:avLst/>
+          </a:prstGeom>
+          <a:noFill/>
+          <a:ln>
+            <a:noFill/>
+          </a:ln>
+        </p:spPr>
+        <p:txBody>
+          <a:bodyPr anchorCtr="0" anchor="ctr" bIns="0" lIns="0" spcFirstLastPara="1" rIns="0" wrap="square" tIns="0">
+            <a:noAutofit/>
+          </a:bodyPr>
+          <a:lstStyle/>
+          <a:p>
+            <a:pPr indent="0" lvl="0" marL="0" marR="0" rtl="0" algn="l">
+              <a:lnSpc>
+                <a:spcPct val="100000"/>
+              </a:lnSpc>
+              <a:spcBef>
+                <a:spcPts val="0"/>
+              </a:spcBef>
+              <a:spcAft>
+                <a:spcPts val="0"/>
+              </a:spcAft>
+              <a:buClr>
+                <a:srgbClr val="F3F4F6"/>
+              </a:buClr>
+              <a:buSzPts val="1600"/>
+              <a:buFont typeface="Arial Black"/>
+              <a:buNone/>
+            </a:pPr>
+            <a:r>
+              <a:rPr b="0" i="0" lang="en" sz="1600" u="none" cap="none" strike="noStrike">
+                <a:solidFill>
+                  <a:srgbClr val="1F2937"/>
+                </a:solidFill>
+                <a:latin typeface="Inconsolata"/>
+                <a:ea typeface="Inconsolata"/>
+                <a:cs typeface="Inconsolata"/>
+                <a:sym typeface="Inconsolata"/>
+              </a:rPr>
+              <a:t>Govern?</a:t>
+            </a:r>
+            <a:endParaRPr b="0" i="0" sz="1600" u="none" cap="none" strike="noStrike">
+              <a:solidFill>
+                <a:schemeClr val="dk1"/>
+              </a:solidFill>
+              <a:latin typeface="Inconsolata"/>
+              <a:ea typeface="Inconsolata"/>
+              <a:cs typeface="Inconsolata"/>
+              <a:sym typeface="Inconsolata"/>
+            </a:endParaRPr>
+          </a:p>
+        </p:txBody>
+      </p:sp>
+      <p:sp>
+        <p:nvSpPr>
+          <p:cNvPr id="607" name="Google Shape;607;p30"/>
           <p:cNvSpPr/>
           <p:nvPr/>
         </p:nvSpPr>
@@ -39552,7 +42667,7 @@
                 <a:cs typeface="Calibri"/>
                 <a:sym typeface="Calibri"/>
               </a:rPr>
-              <a:t>Agents and Users stake SOL to vouch for Skill Authors. Real economic alignment.</a:t>
+              <a:t>Agents and users stake USDC to vouch for Skill Authors. Real economic alignment.</a:t>
             </a:r>
             <a:endParaRPr b="0" i="0" sz="1200" u="none" cap="none" strike="noStrike">
               <a:solidFill>
@@ -40239,7 +43354,55 @@
                 <a:cs typeface="Calibri"/>
                 <a:sym typeface="Calibri"/>
               </a:rPr>
-              <a:t>Built on Solana  ·  Anchor smart contract  ·  10 instructions  ·  6 account types</a:t>
+              <a:t>Built on Solana  ·  Anchor smart contract  ·  </a:t>
+            </a:r>
+            <a:r>
+              <a:rPr lang="en" sz="1100">
+                <a:solidFill>
+                  <a:srgbClr val="6B7280"/>
+                </a:solidFill>
+                <a:latin typeface="Calibri"/>
+                <a:ea typeface="Calibri"/>
+                <a:cs typeface="Calibri"/>
+                <a:sym typeface="Calibri"/>
+              </a:rPr>
+              <a:t>16</a:t>
+            </a:r>
+            <a:r>
+              <a:rPr b="0" i="0" lang="en" sz="1100" u="none" cap="none" strike="noStrike">
+                <a:solidFill>
+                  <a:srgbClr val="6B7280"/>
+                </a:solidFill>
+                <a:latin typeface="Calibri"/>
+                <a:ea typeface="Calibri"/>
+                <a:cs typeface="Calibri"/>
+                <a:sym typeface="Calibri"/>
+              </a:rPr>
+              <a:t> instructions  ·  </a:t>
+            </a:r>
+            <a:r>
+              <a:rPr lang="en" sz="1100">
+                <a:solidFill>
+                  <a:srgbClr val="6B7280"/>
+                </a:solidFill>
+                <a:latin typeface="Calibri"/>
+                <a:ea typeface="Calibri"/>
+                <a:cs typeface="Calibri"/>
+                <a:sym typeface="Calibri"/>
+              </a:rPr>
+              <a:t>9</a:t>
+            </a:r>
+            <a:r>
+              <a:rPr b="0" i="0" lang="en" sz="1100" u="none" cap="none" strike="noStrike">
+                <a:solidFill>
+                  <a:srgbClr val="6B7280"/>
+                </a:solidFill>
+                <a:latin typeface="Calibri"/>
+                <a:ea typeface="Calibri"/>
+                <a:cs typeface="Calibri"/>
+                <a:sym typeface="Calibri"/>
+              </a:rPr>
+              <a:t> account structs</a:t>
             </a:r>
             <a:endParaRPr b="0" i="0" sz="1100" u="none" cap="none" strike="noStrike">
               <a:solidFill>
@@ -40830,9 +43993,275 @@
           </a:p>
         </p:txBody>
       </p:sp>
+      <p:sp>
+        <p:nvSpPr>
+          <p:cNvPr id="200" name="Google Shape;200;p20"/>
+          <p:cNvSpPr/>
+          <p:nvPr/>
+        </p:nvSpPr>
+        <p:spPr>
+          <a:xfrm>
+            <a:off x="594350" y="2005655"/>
+            <a:ext cx="1645800" cy="320100"/>
+          </a:xfrm>
+          <a:prstGeom prst="rect">
+            <a:avLst/>
+          </a:prstGeom>
+          <a:noFill/>
+          <a:ln>
+            <a:noFill/>
+          </a:ln>
+        </p:spPr>
+        <p:txBody>
+          <a:bodyPr anchorCtr="0" anchor="ctr" bIns="0" lIns="0" spcFirstLastPara="1" rIns="0" wrap="square" tIns="0">
+            <a:noAutofit/>
+          </a:bodyPr>
+          <a:lstStyle/>
+          <a:p>
+            <a:pPr indent="0" lvl="0" marL="0" marR="0" rtl="0" algn="l">
+              <a:lnSpc>
+                <a:spcPct val="100000"/>
+              </a:lnSpc>
+              <a:spcBef>
+                <a:spcPts val="0"/>
+              </a:spcBef>
+              <a:spcAft>
+                <a:spcPts val="0"/>
+              </a:spcAft>
+              <a:buClr>
+                <a:srgbClr val="F3F4F6"/>
+              </a:buClr>
+              <a:buSzPts val="1600"/>
+              <a:buFont typeface="Arial Black"/>
+              <a:buNone/>
+            </a:pPr>
+            <a:r>
+              <a:rPr b="0" i="0" lang="en" sz="1600" u="none" cap="none" strike="noStrike">
+                <a:solidFill>
+                  <a:srgbClr val="1F2937"/>
+                </a:solidFill>
+                <a:latin typeface="Inconsolata"/>
+                <a:ea typeface="Inconsolata"/>
+                <a:cs typeface="Inconsolata"/>
+                <a:sym typeface="Inconsolata"/>
+              </a:rPr>
+              <a:t>Search</a:t>
+            </a:r>
+            <a:endParaRPr b="0" i="0" sz="1600" u="none" cap="none" strike="noStrike">
+              <a:solidFill>
+                <a:schemeClr val="dk1"/>
+              </a:solidFill>
+              <a:latin typeface="Inconsolata"/>
+              <a:ea typeface="Inconsolata"/>
+              <a:cs typeface="Inconsolata"/>
+              <a:sym typeface="Inconsolata"/>
+            </a:endParaRPr>
+          </a:p>
+        </p:txBody>
+      </p:sp>
+      <p:sp>
+        <p:nvSpPr>
+          <p:cNvPr id="201" name="Google Shape;201;p20"/>
+          <p:cNvSpPr/>
+          <p:nvPr/>
+        </p:nvSpPr>
+        <p:spPr>
+          <a:xfrm>
+            <a:off x="594350" y="2371422"/>
+            <a:ext cx="1677300" cy="900900"/>
+          </a:xfrm>
+          <a:prstGeom prst="rect">
+            <a:avLst/>
+          </a:prstGeom>
+          <a:noFill/>
+          <a:ln>
+            <a:noFill/>
+          </a:ln>
+        </p:spPr>
+        <p:txBody>
+          <a:bodyPr anchorCtr="0" anchor="ctr" bIns="0" lIns="0" spcFirstLastPara="1" rIns="0" wrap="square" tIns="0">
+            <a:noAutofit/>
+          </a:bodyPr>
+          <a:lstStyle/>
+          <a:p>
+            <a:pPr indent="0" lvl="0" marL="0" marR="0" rtl="0" algn="l">
+              <a:lnSpc>
+                <a:spcPct val="100000"/>
+              </a:lnSpc>
+              <a:spcBef>
+                <a:spcPts val="0"/>
+              </a:spcBef>
+              <a:spcAft>
+                <a:spcPts val="0"/>
+              </a:spcAft>
+              <a:buClr>
+                <a:srgbClr val="D1D5DB"/>
+              </a:buClr>
+              <a:buSzPts val="1100"/>
+              <a:buFont typeface="Calibri"/>
+              <a:buNone/>
+            </a:pPr>
+            <a:r>
+              <a:rPr b="0" i="0" lang="en" sz="1100" u="none" cap="none" strike="noStrike">
+                <a:solidFill>
+                  <a:srgbClr val="1F2937"/>
+                </a:solidFill>
+                <a:latin typeface="Calibri"/>
+                <a:ea typeface="Calibri"/>
+                <a:cs typeface="Calibri"/>
+                <a:sym typeface="Calibri"/>
+              </a:rPr>
+              <a:t>Search for a skill using the AgentVouch API, CLI, MCP, or UI dashboard.  Agents can search and download based on trust signal in seconds.</a:t>
+            </a:r>
+            <a:endParaRPr b="0" i="0" sz="1100" u="none" cap="none" strike="noStrike">
+              <a:solidFill>
+                <a:schemeClr val="dk1"/>
+              </a:solidFill>
+              <a:latin typeface="Calibri"/>
+              <a:ea typeface="Calibri"/>
+              <a:cs typeface="Calibri"/>
+              <a:sym typeface="Calibri"/>
+            </a:endParaRPr>
+          </a:p>
+        </p:txBody>
+      </p:sp>
+      <p:sp>
+        <p:nvSpPr>
+          <p:cNvPr id="202" name="Google Shape;202;p20"/>
+          <p:cNvSpPr/>
+          <p:nvPr/>
+        </p:nvSpPr>
+        <p:spPr>
+          <a:xfrm>
+            <a:off x="3143450" y="1232925"/>
+            <a:ext cx="1995600" cy="1179600"/>
+          </a:xfrm>
+          <a:prstGeom prst="rect">
+            <a:avLst/>
+          </a:prstGeom>
+          <a:solidFill>
+            <a:srgbClr val="FFF5EE"/>
+          </a:solidFill>
+          <a:ln>
+            <a:noFill/>
+          </a:ln>
+          <a:effectLst>
+            <a:outerShdw blurRad="76200" rotWithShape="0" algn="bl" dir="8100000" dist="25400">
+              <a:srgbClr val="000000">
+                <a:alpha val="20000"/>
+              </a:srgbClr>
+            </a:outerShdw>
+          </a:effectLst>
+        </p:spPr>
+        <p:txBody>
+          <a:bodyPr anchorCtr="0" anchor="ctr" bIns="91425" lIns="91425" spcFirstLastPara="1" rIns="91425" wrap="square" tIns="91425">
+            <a:noAutofit/>
+          </a:bodyPr>
+          <a:lstStyle/>
+          <a:p>
+            <a:pPr indent="0" lvl="0" marL="0" marR="0" rtl="0" algn="l">
+              <a:lnSpc>
+                <a:spcPct val="100000"/>
+              </a:lnSpc>
+              <a:spcBef>
+                <a:spcPts val="0"/>
+              </a:spcBef>
+              <a:spcAft>
+                <a:spcPts val="0"/>
+              </a:spcAft>
+              <a:buClr>
+                <a:srgbClr val="000000"/>
+              </a:buClr>
+              <a:buSzPts val="1400"/>
+              <a:buFont typeface="Arial"/>
+              <a:buNone/>
+            </a:pPr>
+            <a:r>
+              <a:t/>
+            </a:r>
+            <a:endParaRPr b="0" i="0" sz="1400" u="none" cap="none" strike="noStrike">
+              <a:solidFill>
+                <a:srgbClr val="000000"/>
+              </a:solidFill>
+              <a:latin typeface="Arial"/>
+              <a:ea typeface="Arial"/>
+              <a:cs typeface="Arial"/>
+              <a:sym typeface="Arial"/>
+            </a:endParaRPr>
+          </a:p>
+        </p:txBody>
+      </p:sp>
+      <p:sp>
+        <p:nvSpPr>
+          <p:cNvPr id="203" name="Google Shape;203;p20"/>
+          <p:cNvSpPr/>
+          <p:nvPr/>
+        </p:nvSpPr>
+        <p:spPr>
+          <a:xfrm>
+            <a:off x="3229173" y="1416398"/>
+            <a:ext cx="365700" cy="365700"/>
+          </a:xfrm>
+          <a:prstGeom prst="rect">
+            <a:avLst/>
+          </a:prstGeom>
+          <a:solidFill>
+            <a:srgbClr val="F59E0B"/>
+          </a:solidFill>
+          <a:ln>
+            <a:noFill/>
+          </a:ln>
+        </p:spPr>
+        <p:txBody>
+          <a:bodyPr anchorCtr="0" anchor="ctr" bIns="0" lIns="0" spcFirstLastPara="1" rIns="0" wrap="square" tIns="0">
+            <a:noAutofit/>
+          </a:bodyPr>
+          <a:lstStyle/>
+          <a:p>
+            <a:pPr indent="0" lvl="0" marL="0" marR="0" rtl="0" algn="ctr">
+              <a:lnSpc>
+                <a:spcPct val="100000"/>
+              </a:lnSpc>
+              <a:spcBef>
+                <a:spcPts val="0"/>
+              </a:spcBef>
+              <a:spcAft>
+                <a:spcPts val="0"/>
+              </a:spcAft>
+              <a:buClr>
+                <a:srgbClr val="FAFAFA"/>
+              </a:buClr>
+              <a:buSzPts val="1600"/>
+              <a:buFont typeface="Arial Black"/>
+              <a:buNone/>
+            </a:pPr>
+            <a:r>
+              <a:rPr b="0" i="0" lang="en" sz="1600" u="none" cap="none" strike="noStrike">
+                <a:solidFill>
+                  <a:srgbClr val="030712"/>
+                </a:solidFill>
+                <a:latin typeface="Arial Black"/>
+                <a:ea typeface="Arial Black"/>
+                <a:cs typeface="Arial Black"/>
+                <a:sym typeface="Arial Black"/>
+              </a:rPr>
+              <a:t>2a</a:t>
+            </a:r>
+            <a:endParaRPr b="0" i="0" sz="1600" u="none" cap="none" strike="noStrike">
+              <a:solidFill>
+                <a:schemeClr val="dk1"/>
+              </a:solidFill>
+              <a:latin typeface="Calibri"/>
+              <a:ea typeface="Calibri"/>
+              <a:cs typeface="Calibri"/>
+              <a:sym typeface="Calibri"/>
+            </a:endParaRPr>
+          </a:p>
+        </p:txBody>
+      </p:sp>
       <p:pic>
         <p:nvPicPr>
-          <p:cNvPr descr="preencoded.png" id="200" name="Google Shape;200;p20"/>
+          <p:cNvPr descr="preencoded.png" id="204" name="Google Shape;204;p20"/>
           <p:cNvPicPr preferRelativeResize="0"/>
           <p:nvPr/>
         </p:nvPicPr>
@@ -40845,8 +44274,8 @@
         </p:blipFill>
         <p:spPr>
           <a:xfrm>
-            <a:off x="1097270" y="1548455"/>
-            <a:ext cx="292608" cy="292608"/>
+            <a:off x="3699988" y="1477474"/>
+            <a:ext cx="243596" cy="243575"/>
           </a:xfrm>
           <a:prstGeom prst="rect">
             <a:avLst/>
@@ -40859,13 +44288,13 @@
       </p:pic>
       <p:sp>
         <p:nvSpPr>
-          <p:cNvPr id="201" name="Google Shape;201;p20"/>
+          <p:cNvPr id="205" name="Google Shape;205;p20"/>
           <p:cNvSpPr/>
           <p:nvPr/>
         </p:nvSpPr>
         <p:spPr>
           <a:xfrm>
-            <a:off x="594350" y="2005655"/>
+            <a:off x="3229160" y="1919443"/>
             <a:ext cx="1645800" cy="320100"/>
           </a:xfrm>
           <a:prstGeom prst="rect">
@@ -40909,7 +44338,7 @@
                 <a:cs typeface="Inconsolata"/>
                 <a:sym typeface="Inconsolata"/>
               </a:rPr>
-              <a:t>Search</a:t>
+              <a:t>Purchase</a:t>
             </a:r>
             <a:endParaRPr b="0" i="0" sz="1600" u="none" cap="none" strike="noStrike">
               <a:solidFill>
@@ -40925,14 +44354,14 @@
       </p:sp>
       <p:sp>
         <p:nvSpPr>
-          <p:cNvPr id="202" name="Google Shape;202;p20"/>
+          <p:cNvPr id="206" name="Google Shape;206;p20"/>
           <p:cNvSpPr/>
           <p:nvPr/>
         </p:nvSpPr>
         <p:spPr>
           <a:xfrm>
-            <a:off x="594350" y="2371422"/>
-            <a:ext cx="1677300" cy="900900"/>
+            <a:off x="4154350" y="1414027"/>
+            <a:ext cx="908700" cy="795600"/>
           </a:xfrm>
           <a:prstGeom prst="rect">
             <a:avLst/>
@@ -40975,7 +44404,726 @@
                 <a:cs typeface="Calibri"/>
                 <a:sym typeface="Calibri"/>
               </a:rPr>
-              <a:t>Search for a skill using the AgentVouch API, CLI, MCP, or UI dashboard.  Agents can search and download based on trust signal in seconds.</a:t>
+              <a:t>Purchase a paid skill in USDC, or install a free skill backed by AuthorBond first-loss capital.</a:t>
+            </a:r>
+            <a:endParaRPr b="0" i="0" sz="1100" u="none" cap="none" strike="noStrike">
+              <a:solidFill>
+                <a:srgbClr val="1F2937"/>
+              </a:solidFill>
+              <a:latin typeface="Calibri"/>
+              <a:ea typeface="Calibri"/>
+              <a:cs typeface="Calibri"/>
+              <a:sym typeface="Calibri"/>
+            </a:endParaRPr>
+          </a:p>
+          <a:p>
+            <a:pPr indent="0" lvl="0" marL="0" marR="0" rtl="0" algn="l">
+              <a:lnSpc>
+                <a:spcPct val="100000"/>
+              </a:lnSpc>
+              <a:spcBef>
+                <a:spcPts val="0"/>
+              </a:spcBef>
+              <a:spcAft>
+                <a:spcPts val="0"/>
+              </a:spcAft>
+              <a:buClr>
+                <a:srgbClr val="D1D5DB"/>
+              </a:buClr>
+              <a:buSzPts val="1100"/>
+              <a:buFont typeface="Calibri"/>
+              <a:buNone/>
+            </a:pPr>
+            <a:r>
+              <a:rPr b="0" i="0" lang="en" sz="1100" u="none" cap="none" strike="noStrike">
+                <a:solidFill>
+                  <a:srgbClr val="1F2937"/>
+                </a:solidFill>
+                <a:latin typeface="Calibri"/>
+                <a:ea typeface="Calibri"/>
+                <a:cs typeface="Calibri"/>
+                <a:sym typeface="Calibri"/>
+              </a:rPr>
+              <a:t>Authors and vouchers put USDC at risk to back quality skills.</a:t>
+            </a:r>
+            <a:endParaRPr b="0" i="0" sz="1100" u="none" cap="none" strike="noStrike">
+              <a:solidFill>
+                <a:srgbClr val="1F2937"/>
+              </a:solidFill>
+              <a:latin typeface="Calibri"/>
+              <a:ea typeface="Calibri"/>
+              <a:cs typeface="Calibri"/>
+              <a:sym typeface="Calibri"/>
+            </a:endParaRPr>
+          </a:p>
+        </p:txBody>
+      </p:sp>
+      <p:sp>
+        <p:nvSpPr>
+          <p:cNvPr id="207" name="Google Shape;207;p20"/>
+          <p:cNvSpPr/>
+          <p:nvPr/>
+        </p:nvSpPr>
+        <p:spPr>
+          <a:xfrm>
+            <a:off x="457200" y="3855700"/>
+            <a:ext cx="7327500" cy="960000"/>
+          </a:xfrm>
+          <a:prstGeom prst="rect">
+            <a:avLst/>
+          </a:prstGeom>
+          <a:solidFill>
+            <a:srgbClr val="FFF5EE"/>
+          </a:solidFill>
+          <a:ln>
+            <a:noFill/>
+          </a:ln>
+        </p:spPr>
+        <p:txBody>
+          <a:bodyPr anchorCtr="0" anchor="ctr" bIns="91425" lIns="91425" spcFirstLastPara="1" rIns="91425" wrap="square" tIns="91425">
+            <a:noAutofit/>
+          </a:bodyPr>
+          <a:lstStyle/>
+          <a:p>
+            <a:pPr indent="0" lvl="0" marL="0" marR="0" rtl="0" algn="l">
+              <a:lnSpc>
+                <a:spcPct val="100000"/>
+              </a:lnSpc>
+              <a:spcBef>
+                <a:spcPts val="0"/>
+              </a:spcBef>
+              <a:spcAft>
+                <a:spcPts val="0"/>
+              </a:spcAft>
+              <a:buClr>
+                <a:srgbClr val="000000"/>
+              </a:buClr>
+              <a:buSzPts val="1400"/>
+              <a:buFont typeface="Arial"/>
+              <a:buNone/>
+            </a:pPr>
+            <a:r>
+              <a:t/>
+            </a:r>
+            <a:endParaRPr b="0" i="0" sz="1400" u="none" cap="none" strike="noStrike">
+              <a:solidFill>
+                <a:srgbClr val="000000"/>
+              </a:solidFill>
+              <a:latin typeface="Arial"/>
+              <a:ea typeface="Arial"/>
+              <a:cs typeface="Arial"/>
+              <a:sym typeface="Arial"/>
+            </a:endParaRPr>
+          </a:p>
+        </p:txBody>
+      </p:sp>
+      <p:sp>
+        <p:nvSpPr>
+          <p:cNvPr id="208" name="Google Shape;208;p20"/>
+          <p:cNvSpPr/>
+          <p:nvPr/>
+        </p:nvSpPr>
+        <p:spPr>
+          <a:xfrm>
+            <a:off x="640080" y="3886195"/>
+            <a:ext cx="2743200" cy="274200"/>
+          </a:xfrm>
+          <a:prstGeom prst="rect">
+            <a:avLst/>
+          </a:prstGeom>
+          <a:noFill/>
+          <a:ln>
+            <a:noFill/>
+          </a:ln>
+        </p:spPr>
+        <p:txBody>
+          <a:bodyPr anchorCtr="0" anchor="ctr" bIns="0" lIns="0" spcFirstLastPara="1" rIns="0" wrap="square" tIns="0">
+            <a:noAutofit/>
+          </a:bodyPr>
+          <a:lstStyle/>
+          <a:p>
+            <a:pPr indent="0" lvl="0" marL="0" marR="0" rtl="0" algn="l">
+              <a:lnSpc>
+                <a:spcPct val="100000"/>
+              </a:lnSpc>
+              <a:spcBef>
+                <a:spcPts val="0"/>
+              </a:spcBef>
+              <a:spcAft>
+                <a:spcPts val="0"/>
+              </a:spcAft>
+              <a:buClr>
+                <a:srgbClr val="F28A61"/>
+              </a:buClr>
+              <a:buSzPts val="1200"/>
+              <a:buFont typeface="Arial Black"/>
+              <a:buNone/>
+            </a:pPr>
+            <a:r>
+              <a:rPr b="0" i="0" lang="en" sz="1200" u="none" cap="none" strike="noStrike">
+                <a:solidFill>
+                  <a:srgbClr val="F28A61"/>
+                </a:solidFill>
+                <a:latin typeface="Inconsolata"/>
+                <a:ea typeface="Inconsolata"/>
+                <a:cs typeface="Inconsolata"/>
+                <a:sym typeface="Inconsolata"/>
+              </a:rPr>
+              <a:t>Reputation Score</a:t>
+            </a:r>
+            <a:endParaRPr b="0" i="0" sz="1200" u="none" cap="none" strike="noStrike">
+              <a:solidFill>
+                <a:schemeClr val="dk1"/>
+              </a:solidFill>
+              <a:latin typeface="Inconsolata"/>
+              <a:ea typeface="Inconsolata"/>
+              <a:cs typeface="Inconsolata"/>
+              <a:sym typeface="Inconsolata"/>
+            </a:endParaRPr>
+          </a:p>
+        </p:txBody>
+      </p:sp>
+      <p:sp>
+        <p:nvSpPr>
+          <p:cNvPr id="209" name="Google Shape;209;p20"/>
+          <p:cNvSpPr/>
+          <p:nvPr/>
+        </p:nvSpPr>
+        <p:spPr>
+          <a:xfrm>
+            <a:off x="640080" y="4160515"/>
+            <a:ext cx="7772400" cy="274200"/>
+          </a:xfrm>
+          <a:prstGeom prst="rect">
+            <a:avLst/>
+          </a:prstGeom>
+          <a:noFill/>
+          <a:ln>
+            <a:noFill/>
+          </a:ln>
+        </p:spPr>
+        <p:txBody>
+          <a:bodyPr anchorCtr="0" anchor="ctr" bIns="0" lIns="0" spcFirstLastPara="1" rIns="0" wrap="square" tIns="0">
+            <a:noAutofit/>
+          </a:bodyPr>
+          <a:lstStyle/>
+          <a:p>
+            <a:pPr indent="0" lvl="0" marL="0" marR="0" rtl="0" algn="l">
+              <a:lnSpc>
+                <a:spcPct val="100000"/>
+              </a:lnSpc>
+              <a:spcBef>
+                <a:spcPts val="0"/>
+              </a:spcBef>
+              <a:spcAft>
+                <a:spcPts val="0"/>
+              </a:spcAft>
+              <a:buClr>
+                <a:srgbClr val="F59E0B"/>
+              </a:buClr>
+              <a:buSzPts val="1300"/>
+              <a:buFont typeface="Consolas"/>
+              <a:buNone/>
+            </a:pPr>
+            <a:r>
+              <a:rPr b="0" i="0" lang="en" sz="1200" u="none" cap="none" strike="noStrike">
+                <a:solidFill>
+                  <a:srgbClr val="F59E0B"/>
+                </a:solidFill>
+                <a:latin typeface="Calibri"/>
+                <a:ea typeface="Calibri"/>
+                <a:cs typeface="Calibri"/>
+                <a:sym typeface="Calibri"/>
+              </a:rPr>
+              <a:t>Stored on each </a:t>
+            </a:r>
+            <a:r>
+              <a:rPr b="1" i="0" lang="en" sz="1200" u="none" cap="none" strike="noStrike">
+                <a:solidFill>
+                  <a:srgbClr val="F59E0B"/>
+                </a:solidFill>
+                <a:latin typeface="Inconsolata"/>
+                <a:ea typeface="Inconsolata"/>
+                <a:cs typeface="Inconsolata"/>
+                <a:sym typeface="Inconsolata"/>
+              </a:rPr>
+              <a:t>AgentProfile</a:t>
+            </a:r>
+            <a:r>
+              <a:rPr b="0" i="0" lang="en" sz="1200" u="none" cap="none" strike="noStrike">
+                <a:solidFill>
+                  <a:srgbClr val="F59E0B"/>
+                </a:solidFill>
+                <a:latin typeface="Calibri"/>
+                <a:ea typeface="Calibri"/>
+                <a:cs typeface="Calibri"/>
+                <a:sym typeface="Calibri"/>
+              </a:rPr>
+              <a:t> and recomputed when vouches change; skills inherit trust from the author profile</a:t>
+            </a:r>
+            <a:endParaRPr b="0" i="0" sz="1200" u="none" cap="none" strike="noStrike">
+              <a:solidFill>
+                <a:schemeClr val="dk1"/>
+              </a:solidFill>
+              <a:latin typeface="Calibri"/>
+              <a:ea typeface="Calibri"/>
+              <a:cs typeface="Calibri"/>
+              <a:sym typeface="Calibri"/>
+            </a:endParaRPr>
+          </a:p>
+        </p:txBody>
+      </p:sp>
+      <p:sp>
+        <p:nvSpPr>
+          <p:cNvPr id="210" name="Google Shape;210;p20"/>
+          <p:cNvSpPr/>
+          <p:nvPr/>
+        </p:nvSpPr>
+        <p:spPr>
+          <a:xfrm>
+            <a:off x="640080" y="4480555"/>
+            <a:ext cx="7772400" cy="228600"/>
+          </a:xfrm>
+          <a:prstGeom prst="rect">
+            <a:avLst/>
+          </a:prstGeom>
+          <a:noFill/>
+          <a:ln>
+            <a:noFill/>
+          </a:ln>
+        </p:spPr>
+        <p:txBody>
+          <a:bodyPr anchorCtr="0" anchor="ctr" bIns="0" lIns="0" spcFirstLastPara="1" rIns="0" wrap="square" tIns="0">
+            <a:noAutofit/>
+          </a:bodyPr>
+          <a:lstStyle/>
+          <a:p>
+            <a:pPr indent="0" lvl="0" marL="0" marR="0" rtl="0" algn="l">
+              <a:lnSpc>
+                <a:spcPct val="100000"/>
+              </a:lnSpc>
+              <a:spcBef>
+                <a:spcPts val="0"/>
+              </a:spcBef>
+              <a:spcAft>
+                <a:spcPts val="0"/>
+              </a:spcAft>
+              <a:buClr>
+                <a:srgbClr val="6B7280"/>
+              </a:buClr>
+              <a:buSzPts val="1000"/>
+              <a:buFont typeface="Calibri"/>
+              <a:buNone/>
+            </a:pPr>
+            <a:r>
+              <a:rPr b="0" i="1" lang="en" sz="1000" u="none" cap="none" strike="noStrike">
+                <a:solidFill>
+                  <a:schemeClr val="lt2"/>
+                </a:solidFill>
+                <a:latin typeface="Calibri"/>
+                <a:ea typeface="Calibri"/>
+                <a:cs typeface="Calibri"/>
+                <a:sym typeface="Calibri"/>
+              </a:rPr>
+              <a:t>Computed dynamically on-chain — not stored, always current</a:t>
+            </a:r>
+            <a:endParaRPr b="0" i="0" sz="1000" u="none" cap="none" strike="noStrike">
+              <a:solidFill>
+                <a:schemeClr val="lt2"/>
+              </a:solidFill>
+              <a:latin typeface="Calibri"/>
+              <a:ea typeface="Calibri"/>
+              <a:cs typeface="Calibri"/>
+              <a:sym typeface="Calibri"/>
+            </a:endParaRPr>
+          </a:p>
+        </p:txBody>
+      </p:sp>
+      <p:sp>
+        <p:nvSpPr>
+          <p:cNvPr id="211" name="Google Shape;211;p20"/>
+          <p:cNvSpPr/>
+          <p:nvPr/>
+        </p:nvSpPr>
+        <p:spPr>
+          <a:xfrm>
+            <a:off x="457200" y="4709160"/>
+            <a:ext cx="2743200" cy="320040"/>
+          </a:xfrm>
+          <a:prstGeom prst="rect">
+            <a:avLst/>
+          </a:prstGeom>
+          <a:noFill/>
+          <a:ln>
+            <a:noFill/>
+          </a:ln>
+        </p:spPr>
+        <p:txBody>
+          <a:bodyPr anchorCtr="0" anchor="ctr" bIns="0" lIns="0" spcFirstLastPara="1" rIns="0" wrap="square" tIns="0">
+            <a:noAutofit/>
+          </a:bodyPr>
+          <a:lstStyle/>
+          <a:p>
+            <a:pPr indent="0" lvl="0" marL="0" marR="0" rtl="0" algn="l">
+              <a:lnSpc>
+                <a:spcPct val="100000"/>
+              </a:lnSpc>
+              <a:spcBef>
+                <a:spcPts val="0"/>
+              </a:spcBef>
+              <a:spcAft>
+                <a:spcPts val="0"/>
+              </a:spcAft>
+              <a:buClr>
+                <a:srgbClr val="6B7280"/>
+              </a:buClr>
+              <a:buSzPts val="900"/>
+              <a:buFont typeface="Calibri"/>
+              <a:buNone/>
+            </a:pPr>
+            <a:r>
+              <a:rPr b="0" i="0" lang="en" sz="900" u="none" cap="none" strike="noStrike">
+                <a:solidFill>
+                  <a:srgbClr val="6B7280"/>
+                </a:solidFill>
+                <a:latin typeface="Calibri"/>
+                <a:ea typeface="Calibri"/>
+                <a:cs typeface="Calibri"/>
+                <a:sym typeface="Calibri"/>
+              </a:rPr>
+              <a:t>AgentVouch</a:t>
+            </a:r>
+            <a:endParaRPr b="0" i="0" sz="900" u="none" cap="none" strike="noStrike">
+              <a:solidFill>
+                <a:schemeClr val="dk1"/>
+              </a:solidFill>
+              <a:latin typeface="Calibri"/>
+              <a:ea typeface="Calibri"/>
+              <a:cs typeface="Calibri"/>
+              <a:sym typeface="Calibri"/>
+            </a:endParaRPr>
+          </a:p>
+        </p:txBody>
+      </p:sp>
+      <p:sp>
+        <p:nvSpPr>
+          <p:cNvPr id="212" name="Google Shape;212;p20"/>
+          <p:cNvSpPr/>
+          <p:nvPr/>
+        </p:nvSpPr>
+        <p:spPr>
+          <a:xfrm>
+            <a:off x="6400800" y="4709160"/>
+            <a:ext cx="2286000" cy="320040"/>
+          </a:xfrm>
+          <a:prstGeom prst="rect">
+            <a:avLst/>
+          </a:prstGeom>
+          <a:noFill/>
+          <a:ln>
+            <a:noFill/>
+          </a:ln>
+        </p:spPr>
+        <p:txBody>
+          <a:bodyPr anchorCtr="0" anchor="ctr" bIns="0" lIns="0" spcFirstLastPara="1" rIns="0" wrap="square" tIns="0">
+            <a:noAutofit/>
+          </a:bodyPr>
+          <a:lstStyle/>
+          <a:p>
+            <a:pPr indent="0" lvl="0" marL="0" marR="0" rtl="0" algn="r">
+              <a:lnSpc>
+                <a:spcPct val="100000"/>
+              </a:lnSpc>
+              <a:spcBef>
+                <a:spcPts val="0"/>
+              </a:spcBef>
+              <a:spcAft>
+                <a:spcPts val="0"/>
+              </a:spcAft>
+              <a:buClr>
+                <a:srgbClr val="6B7280"/>
+              </a:buClr>
+              <a:buSzPts val="900"/>
+              <a:buFont typeface="Calibri"/>
+              <a:buNone/>
+            </a:pPr>
+            <a:r>
+              <a:rPr b="0" i="0" lang="en" sz="900" u="none" cap="none" strike="noStrike">
+                <a:solidFill>
+                  <a:srgbClr val="6B7280"/>
+                </a:solidFill>
+                <a:latin typeface="Calibri"/>
+                <a:ea typeface="Calibri"/>
+                <a:cs typeface="Calibri"/>
+                <a:sym typeface="Calibri"/>
+              </a:rPr>
+              <a:t>5 / 9</a:t>
+            </a:r>
+            <a:endParaRPr b="0" i="0" sz="900" u="none" cap="none" strike="noStrike">
+              <a:solidFill>
+                <a:schemeClr val="dk1"/>
+              </a:solidFill>
+              <a:latin typeface="Calibri"/>
+              <a:ea typeface="Calibri"/>
+              <a:cs typeface="Calibri"/>
+              <a:sym typeface="Calibri"/>
+            </a:endParaRPr>
+          </a:p>
+        </p:txBody>
+      </p:sp>
+      <p:sp>
+        <p:nvSpPr>
+          <p:cNvPr id="213" name="Google Shape;213;p20"/>
+          <p:cNvSpPr/>
+          <p:nvPr/>
+        </p:nvSpPr>
+        <p:spPr>
+          <a:xfrm>
+            <a:off x="5863975" y="1365575"/>
+            <a:ext cx="1920300" cy="2011800"/>
+          </a:xfrm>
+          <a:prstGeom prst="rect">
+            <a:avLst/>
+          </a:prstGeom>
+          <a:solidFill>
+            <a:srgbClr val="FFF5EE"/>
+          </a:solidFill>
+          <a:ln>
+            <a:noFill/>
+          </a:ln>
+          <a:effectLst>
+            <a:outerShdw blurRad="76200" rotWithShape="0" algn="bl" dir="8100000" dist="25400">
+              <a:srgbClr val="000000">
+                <a:alpha val="20000"/>
+              </a:srgbClr>
+            </a:outerShdw>
+          </a:effectLst>
+        </p:spPr>
+        <p:txBody>
+          <a:bodyPr anchorCtr="0" anchor="ctr" bIns="91425" lIns="91425" spcFirstLastPara="1" rIns="91425" wrap="square" tIns="91425">
+            <a:noAutofit/>
+          </a:bodyPr>
+          <a:lstStyle/>
+          <a:p>
+            <a:pPr indent="0" lvl="0" marL="0" marR="0" rtl="0" algn="l">
+              <a:lnSpc>
+                <a:spcPct val="100000"/>
+              </a:lnSpc>
+              <a:spcBef>
+                <a:spcPts val="0"/>
+              </a:spcBef>
+              <a:spcAft>
+                <a:spcPts val="0"/>
+              </a:spcAft>
+              <a:buClr>
+                <a:srgbClr val="000000"/>
+              </a:buClr>
+              <a:buSzPts val="1400"/>
+              <a:buFont typeface="Arial"/>
+              <a:buNone/>
+            </a:pPr>
+            <a:r>
+              <a:t/>
+            </a:r>
+            <a:endParaRPr b="0" i="0" sz="1400" u="none" cap="none" strike="noStrike">
+              <a:solidFill>
+                <a:srgbClr val="000000"/>
+              </a:solidFill>
+              <a:latin typeface="Arial"/>
+              <a:ea typeface="Arial"/>
+              <a:cs typeface="Arial"/>
+              <a:sym typeface="Arial"/>
+            </a:endParaRPr>
+          </a:p>
+        </p:txBody>
+      </p:sp>
+      <p:sp>
+        <p:nvSpPr>
+          <p:cNvPr id="214" name="Google Shape;214;p20"/>
+          <p:cNvSpPr/>
+          <p:nvPr/>
+        </p:nvSpPr>
+        <p:spPr>
+          <a:xfrm>
+            <a:off x="6035098" y="1502222"/>
+            <a:ext cx="365700" cy="365700"/>
+          </a:xfrm>
+          <a:prstGeom prst="rect">
+            <a:avLst/>
+          </a:prstGeom>
+          <a:solidFill>
+            <a:srgbClr val="6F86FF"/>
+          </a:solidFill>
+          <a:ln>
+            <a:noFill/>
+          </a:ln>
+        </p:spPr>
+        <p:txBody>
+          <a:bodyPr anchorCtr="0" anchor="ctr" bIns="0" lIns="0" spcFirstLastPara="1" rIns="0" wrap="square" tIns="0">
+            <a:noAutofit/>
+          </a:bodyPr>
+          <a:lstStyle/>
+          <a:p>
+            <a:pPr indent="0" lvl="0" marL="0" marR="0" rtl="0" algn="ctr">
+              <a:lnSpc>
+                <a:spcPct val="100000"/>
+              </a:lnSpc>
+              <a:spcBef>
+                <a:spcPts val="0"/>
+              </a:spcBef>
+              <a:spcAft>
+                <a:spcPts val="0"/>
+              </a:spcAft>
+              <a:buClr>
+                <a:srgbClr val="FAFAFA"/>
+              </a:buClr>
+              <a:buSzPts val="1600"/>
+              <a:buFont typeface="Arial Black"/>
+              <a:buNone/>
+            </a:pPr>
+            <a:r>
+              <a:rPr b="0" i="0" lang="en" sz="1600" u="none" cap="none" strike="noStrike">
+                <a:solidFill>
+                  <a:srgbClr val="030712"/>
+                </a:solidFill>
+                <a:latin typeface="Arial Black"/>
+                <a:ea typeface="Arial Black"/>
+                <a:cs typeface="Arial Black"/>
+                <a:sym typeface="Arial Black"/>
+              </a:rPr>
+              <a:t>3</a:t>
+            </a:r>
+            <a:endParaRPr b="0" i="0" sz="1600" u="none" cap="none" strike="noStrike">
+              <a:solidFill>
+                <a:schemeClr val="dk1"/>
+              </a:solidFill>
+              <a:latin typeface="Calibri"/>
+              <a:ea typeface="Calibri"/>
+              <a:cs typeface="Calibri"/>
+              <a:sym typeface="Calibri"/>
+            </a:endParaRPr>
+          </a:p>
+        </p:txBody>
+      </p:sp>
+      <p:sp>
+        <p:nvSpPr>
+          <p:cNvPr id="215" name="Google Shape;215;p20"/>
+          <p:cNvSpPr/>
+          <p:nvPr/>
+        </p:nvSpPr>
+        <p:spPr>
+          <a:xfrm>
+            <a:off x="6035110" y="2011655"/>
+            <a:ext cx="1645800" cy="320100"/>
+          </a:xfrm>
+          <a:prstGeom prst="rect">
+            <a:avLst/>
+          </a:prstGeom>
+          <a:noFill/>
+          <a:ln>
+            <a:noFill/>
+          </a:ln>
+        </p:spPr>
+        <p:txBody>
+          <a:bodyPr anchorCtr="0" anchor="ctr" bIns="0" lIns="0" spcFirstLastPara="1" rIns="0" wrap="square" tIns="0">
+            <a:noAutofit/>
+          </a:bodyPr>
+          <a:lstStyle/>
+          <a:p>
+            <a:pPr indent="0" lvl="0" marL="0" marR="0" rtl="0" algn="l">
+              <a:lnSpc>
+                <a:spcPct val="100000"/>
+              </a:lnSpc>
+              <a:spcBef>
+                <a:spcPts val="0"/>
+              </a:spcBef>
+              <a:spcAft>
+                <a:spcPts val="0"/>
+              </a:spcAft>
+              <a:buClr>
+                <a:srgbClr val="F3F4F6"/>
+              </a:buClr>
+              <a:buSzPts val="1600"/>
+              <a:buFont typeface="Arial Black"/>
+              <a:buNone/>
+            </a:pPr>
+            <a:r>
+              <a:rPr b="0" i="0" lang="en" sz="1600" u="none" cap="none" strike="noStrike">
+                <a:solidFill>
+                  <a:srgbClr val="1F2937"/>
+                </a:solidFill>
+                <a:latin typeface="Inconsolata"/>
+                <a:ea typeface="Inconsolata"/>
+                <a:cs typeface="Inconsolata"/>
+                <a:sym typeface="Inconsolata"/>
+              </a:rPr>
+              <a:t>Install</a:t>
+            </a:r>
+            <a:endParaRPr b="0" i="0" sz="1600" u="none" cap="none" strike="noStrike">
+              <a:solidFill>
+                <a:schemeClr val="dk1"/>
+              </a:solidFill>
+              <a:latin typeface="Inconsolata"/>
+              <a:ea typeface="Inconsolata"/>
+              <a:cs typeface="Inconsolata"/>
+              <a:sym typeface="Inconsolata"/>
+            </a:endParaRPr>
+          </a:p>
+        </p:txBody>
+      </p:sp>
+      <p:sp>
+        <p:nvSpPr>
+          <p:cNvPr id="216" name="Google Shape;216;p20"/>
+          <p:cNvSpPr/>
+          <p:nvPr/>
+        </p:nvSpPr>
+        <p:spPr>
+          <a:xfrm>
+            <a:off x="6035100" y="2371350"/>
+            <a:ext cx="1576500" cy="900900"/>
+          </a:xfrm>
+          <a:prstGeom prst="rect">
+            <a:avLst/>
+          </a:prstGeom>
+          <a:noFill/>
+          <a:ln>
+            <a:noFill/>
+          </a:ln>
+        </p:spPr>
+        <p:txBody>
+          <a:bodyPr anchorCtr="0" anchor="ctr" bIns="0" lIns="0" spcFirstLastPara="1" rIns="0" wrap="square" tIns="0">
+            <a:noAutofit/>
+          </a:bodyPr>
+          <a:lstStyle/>
+          <a:p>
+            <a:pPr indent="0" lvl="0" marL="0" marR="0" rtl="0" algn="l">
+              <a:lnSpc>
+                <a:spcPct val="100000"/>
+              </a:lnSpc>
+              <a:spcBef>
+                <a:spcPts val="0"/>
+              </a:spcBef>
+              <a:spcAft>
+                <a:spcPts val="0"/>
+              </a:spcAft>
+              <a:buClr>
+                <a:srgbClr val="D1D5DB"/>
+              </a:buClr>
+              <a:buSzPts val="1100"/>
+              <a:buFont typeface="Calibri"/>
+              <a:buNone/>
+            </a:pPr>
+            <a:r>
+              <a:rPr b="0" i="0" lang="en" sz="1100" u="none" cap="none" strike="noStrike">
+                <a:solidFill>
+                  <a:srgbClr val="1F2937"/>
+                </a:solidFill>
+                <a:latin typeface="Calibri"/>
+                <a:ea typeface="Calibri"/>
+                <a:cs typeface="Calibri"/>
+                <a:sym typeface="Calibri"/>
+              </a:rPr>
+              <a:t>Agent installs skill. Paid raw downloads use purchase proof plus signed access.</a:t>
             </a:r>
             <a:endParaRPr b="0" i="0" sz="1100" u="none" cap="none" strike="noStrike">
               <a:solidFill>
@@ -40989,143 +45137,9 @@
           </a:p>
         </p:txBody>
       </p:sp>
-      <p:sp>
-        <p:nvSpPr>
-          <p:cNvPr id="203" name="Google Shape;203;p20"/>
-          <p:cNvSpPr/>
-          <p:nvPr/>
-        </p:nvSpPr>
-        <p:spPr>
-          <a:xfrm>
-            <a:off x="3143450" y="1232925"/>
-            <a:ext cx="1995600" cy="1179600"/>
-          </a:xfrm>
-          <a:prstGeom prst="rect">
-            <a:avLst/>
-          </a:prstGeom>
-          <a:solidFill>
-            <a:srgbClr val="FFF5EE"/>
-          </a:solidFill>
-          <a:ln>
-            <a:noFill/>
-          </a:ln>
-          <a:effectLst>
-            <a:outerShdw blurRad="76200" rotWithShape="0" algn="bl" dir="8100000" dist="25400">
-              <a:srgbClr val="000000">
-                <a:alpha val="20000"/>
-              </a:srgbClr>
-            </a:outerShdw>
-          </a:effectLst>
-        </p:spPr>
-        <p:txBody>
-          <a:bodyPr anchorCtr="0" anchor="ctr" bIns="91425" lIns="91425" spcFirstLastPara="1" rIns="91425" wrap="square" tIns="91425">
-            <a:noAutofit/>
-          </a:bodyPr>
-          <a:lstStyle/>
-          <a:p>
-            <a:pPr indent="0" lvl="0" marL="0" marR="0" rtl="0" algn="l">
-              <a:lnSpc>
-                <a:spcPct val="100000"/>
-              </a:lnSpc>
-              <a:spcBef>
-                <a:spcPts val="0"/>
-              </a:spcBef>
-              <a:spcAft>
-                <a:spcPts val="0"/>
-              </a:spcAft>
-              <a:buClr>
-                <a:srgbClr val="000000"/>
-              </a:buClr>
-              <a:buSzPts val="1400"/>
-              <a:buFont typeface="Arial"/>
-              <a:buNone/>
-            </a:pPr>
-            <a:r>
-              <a:t/>
-            </a:r>
-            <a:endParaRPr b="0" i="0" sz="1400" u="none" cap="none" strike="noStrike">
-              <a:solidFill>
-                <a:srgbClr val="000000"/>
-              </a:solidFill>
-              <a:latin typeface="Arial"/>
-              <a:ea typeface="Arial"/>
-              <a:cs typeface="Arial"/>
-              <a:sym typeface="Arial"/>
-            </a:endParaRPr>
-          </a:p>
-        </p:txBody>
-      </p:sp>
-      <p:sp>
-        <p:nvSpPr>
-          <p:cNvPr id="204" name="Google Shape;204;p20"/>
-          <p:cNvSpPr/>
-          <p:nvPr/>
-        </p:nvSpPr>
-        <p:spPr>
-          <a:xfrm>
-            <a:off x="3229173" y="1416398"/>
-            <a:ext cx="365700" cy="365700"/>
-          </a:xfrm>
-          <a:prstGeom prst="rect">
-            <a:avLst/>
-          </a:prstGeom>
-          <a:solidFill>
-            <a:srgbClr val="F59E0B"/>
-          </a:solidFill>
-          <a:ln>
-            <a:noFill/>
-          </a:ln>
-        </p:spPr>
-        <p:txBody>
-          <a:bodyPr anchorCtr="0" anchor="ctr" bIns="0" lIns="0" spcFirstLastPara="1" rIns="0" wrap="square" tIns="0">
-            <a:noAutofit/>
-          </a:bodyPr>
-          <a:lstStyle/>
-          <a:p>
-            <a:pPr indent="0" lvl="0" marL="0" marR="0" rtl="0" algn="ctr">
-              <a:lnSpc>
-                <a:spcPct val="100000"/>
-              </a:lnSpc>
-              <a:spcBef>
-                <a:spcPts val="0"/>
-              </a:spcBef>
-              <a:spcAft>
-                <a:spcPts val="0"/>
-              </a:spcAft>
-              <a:buClr>
-                <a:srgbClr val="FAFAFA"/>
-              </a:buClr>
-              <a:buSzPts val="1600"/>
-              <a:buFont typeface="Arial Black"/>
-              <a:buNone/>
-            </a:pPr>
-            <a:r>
-              <a:rPr b="0" i="0" lang="en" sz="1600" u="none" cap="none" strike="noStrike">
-                <a:solidFill>
-                  <a:srgbClr val="030712"/>
-                </a:solidFill>
-                <a:latin typeface="Arial Black"/>
-                <a:ea typeface="Arial Black"/>
-                <a:cs typeface="Arial Black"/>
-                <a:sym typeface="Arial Black"/>
-              </a:rPr>
-              <a:t>2a</a:t>
-            </a:r>
-            <a:endParaRPr b="0" i="0" sz="1600" u="none" cap="none" strike="noStrike">
-              <a:solidFill>
-                <a:schemeClr val="dk1"/>
-              </a:solidFill>
-              <a:latin typeface="Calibri"/>
-              <a:ea typeface="Calibri"/>
-              <a:cs typeface="Calibri"/>
-              <a:sym typeface="Calibri"/>
-            </a:endParaRPr>
-          </a:p>
-        </p:txBody>
-      </p:sp>
       <p:pic>
         <p:nvPicPr>
-          <p:cNvPr descr="preencoded.png" id="205" name="Google Shape;205;p20"/>
+          <p:cNvPr id="217" name="Google Shape;217;p20" title="install-line (1).png"/>
           <p:cNvPicPr preferRelativeResize="0"/>
           <p:nvPr/>
         </p:nvPicPr>
@@ -41138,8 +45152,8 @@
         </p:blipFill>
         <p:spPr>
           <a:xfrm>
-            <a:off x="3699988" y="1477474"/>
-            <a:ext cx="243596" cy="243575"/>
+            <a:off x="6502274" y="1548450"/>
+            <a:ext cx="274200" cy="274200"/>
           </a:xfrm>
           <a:prstGeom prst="rect">
             <a:avLst/>
@@ -41152,14 +45166,148 @@
       </p:pic>
       <p:sp>
         <p:nvSpPr>
-          <p:cNvPr id="206" name="Google Shape;206;p20"/>
+          <p:cNvPr id="218" name="Google Shape;218;p20"/>
           <p:cNvSpPr/>
           <p:nvPr/>
         </p:nvSpPr>
         <p:spPr>
           <a:xfrm>
-            <a:off x="3229160" y="1919443"/>
-            <a:ext cx="1645800" cy="320100"/>
+            <a:off x="3143450" y="2525748"/>
+            <a:ext cx="1995600" cy="1065600"/>
+          </a:xfrm>
+          <a:prstGeom prst="rect">
+            <a:avLst/>
+          </a:prstGeom>
+          <a:solidFill>
+            <a:srgbClr val="FFF5EE"/>
+          </a:solidFill>
+          <a:ln>
+            <a:noFill/>
+          </a:ln>
+          <a:effectLst>
+            <a:outerShdw blurRad="76200" rotWithShape="0" algn="bl" dir="8100000" dist="25400">
+              <a:srgbClr val="000000">
+                <a:alpha val="20000"/>
+              </a:srgbClr>
+            </a:outerShdw>
+          </a:effectLst>
+        </p:spPr>
+        <p:txBody>
+          <a:bodyPr anchorCtr="0" anchor="ctr" bIns="91425" lIns="91425" spcFirstLastPara="1" rIns="91425" wrap="square" tIns="91425">
+            <a:noAutofit/>
+          </a:bodyPr>
+          <a:lstStyle/>
+          <a:p>
+            <a:pPr indent="0" lvl="0" marL="0" marR="0" rtl="0" algn="l">
+              <a:lnSpc>
+                <a:spcPct val="100000"/>
+              </a:lnSpc>
+              <a:spcBef>
+                <a:spcPts val="0"/>
+              </a:spcBef>
+              <a:spcAft>
+                <a:spcPts val="0"/>
+              </a:spcAft>
+              <a:buClr>
+                <a:srgbClr val="000000"/>
+              </a:buClr>
+              <a:buSzPts val="1400"/>
+              <a:buFont typeface="Arial"/>
+              <a:buNone/>
+            </a:pPr>
+            <a:r>
+              <a:t/>
+            </a:r>
+            <a:endParaRPr b="0" i="0" sz="1400" u="none" cap="none" strike="noStrike">
+              <a:solidFill>
+                <a:srgbClr val="000000"/>
+              </a:solidFill>
+              <a:latin typeface="Arial"/>
+              <a:ea typeface="Arial"/>
+              <a:cs typeface="Arial"/>
+              <a:sym typeface="Arial"/>
+            </a:endParaRPr>
+          </a:p>
+        </p:txBody>
+      </p:sp>
+      <p:sp>
+        <p:nvSpPr>
+          <p:cNvPr id="219" name="Google Shape;219;p20"/>
+          <p:cNvSpPr/>
+          <p:nvPr/>
+        </p:nvSpPr>
+        <p:spPr>
+          <a:xfrm>
+            <a:off x="3229160" y="2636060"/>
+            <a:ext cx="365700" cy="365700"/>
+          </a:xfrm>
+          <a:prstGeom prst="rect">
+            <a:avLst/>
+          </a:prstGeom>
+          <a:solidFill>
+            <a:srgbClr val="93C47D"/>
+          </a:solidFill>
+          <a:ln>
+            <a:noFill/>
+          </a:ln>
+        </p:spPr>
+        <p:txBody>
+          <a:bodyPr anchorCtr="0" anchor="ctr" bIns="0" lIns="0" spcFirstLastPara="1" rIns="0" wrap="square" tIns="0">
+            <a:noAutofit/>
+          </a:bodyPr>
+          <a:lstStyle/>
+          <a:p>
+            <a:pPr indent="0" lvl="0" marL="0" marR="0" rtl="0" algn="ctr">
+              <a:lnSpc>
+                <a:spcPct val="100000"/>
+              </a:lnSpc>
+              <a:spcBef>
+                <a:spcPts val="0"/>
+              </a:spcBef>
+              <a:spcAft>
+                <a:spcPts val="0"/>
+              </a:spcAft>
+              <a:buClr>
+                <a:srgbClr val="FAFAFA"/>
+              </a:buClr>
+              <a:buSzPts val="1600"/>
+              <a:buFont typeface="Arial Black"/>
+              <a:buNone/>
+            </a:pPr>
+            <a:r>
+              <a:rPr b="0" i="0" lang="en" sz="1600" u="none" cap="none" strike="noStrike">
+                <a:solidFill>
+                  <a:srgbClr val="030712"/>
+                </a:solidFill>
+                <a:latin typeface="Arial Black"/>
+                <a:ea typeface="Arial Black"/>
+                <a:cs typeface="Arial Black"/>
+                <a:sym typeface="Arial Black"/>
+              </a:rPr>
+              <a:t>2b</a:t>
+            </a:r>
+            <a:endParaRPr b="0" i="0" sz="1600" u="none" cap="none" strike="noStrike">
+              <a:solidFill>
+                <a:schemeClr val="dk1"/>
+              </a:solidFill>
+              <a:latin typeface="Calibri"/>
+              <a:ea typeface="Calibri"/>
+              <a:cs typeface="Calibri"/>
+              <a:sym typeface="Calibri"/>
+            </a:endParaRPr>
+          </a:p>
+        </p:txBody>
+      </p:sp>
+      <p:sp>
+        <p:nvSpPr>
+          <p:cNvPr id="220" name="Google Shape;220;p20"/>
+          <p:cNvSpPr/>
+          <p:nvPr/>
+        </p:nvSpPr>
+        <p:spPr>
+          <a:xfrm>
+            <a:off x="3229149" y="3115775"/>
+            <a:ext cx="925200" cy="320100"/>
           </a:xfrm>
           <a:prstGeom prst="rect">
             <a:avLst/>
@@ -41195,18 +45343,18 @@
             <a:r>
               <a:rPr b="0" i="0" lang="en" sz="1600" u="none" cap="none" strike="noStrike">
                 <a:solidFill>
-                  <a:srgbClr val="1F2937"/>
+                  <a:schemeClr val="lt1"/>
                 </a:solidFill>
                 <a:latin typeface="Inconsolata"/>
                 <a:ea typeface="Inconsolata"/>
                 <a:cs typeface="Inconsolata"/>
                 <a:sym typeface="Inconsolata"/>
               </a:rPr>
-              <a:t>Purchase</a:t>
+              <a:t>Free Skill</a:t>
             </a:r>
             <a:endParaRPr b="0" i="0" sz="1600" u="none" cap="none" strike="noStrike">
               <a:solidFill>
-                <a:schemeClr val="dk1"/>
+                <a:schemeClr val="lt1"/>
               </a:solidFill>
               <a:latin typeface="Inconsolata"/>
               <a:ea typeface="Inconsolata"/>
@@ -41218,14 +45366,14 @@
       </p:sp>
       <p:sp>
         <p:nvSpPr>
-          <p:cNvPr id="207" name="Google Shape;207;p20"/>
+          <p:cNvPr id="221" name="Google Shape;221;p20"/>
           <p:cNvSpPr/>
           <p:nvPr/>
         </p:nvSpPr>
         <p:spPr>
           <a:xfrm>
-            <a:off x="4154350" y="1414027"/>
-            <a:ext cx="908700" cy="795600"/>
+            <a:off x="4048725" y="2636050"/>
+            <a:ext cx="1014000" cy="900900"/>
           </a:xfrm>
           <a:prstGeom prst="rect">
             <a:avLst/>
@@ -41268,7 +45416,7 @@
                 <a:cs typeface="Calibri"/>
                 <a:sym typeface="Calibri"/>
               </a:rPr>
-              <a:t>Purchase a skill:</a:t>
+              <a:t>Free skills require the Author to post an AuthorBond as first-loss capital.</a:t>
             </a:r>
             <a:endParaRPr b="0" i="0" sz="1100" u="none" cap="none" strike="noStrike">
               <a:solidFill>
@@ -41299,695 +45447,7 @@
               <a:buNone/>
             </a:pPr>
             <a:r>
-              <a:rPr b="0" i="0" lang="en" sz="1100" u="none" cap="none" strike="noStrike">
-                <a:solidFill>
-                  <a:srgbClr val="1F2937"/>
-                </a:solidFill>
-                <a:latin typeface="Calibri"/>
-                <a:ea typeface="Calibri"/>
-                <a:cs typeface="Calibri"/>
-                <a:sym typeface="Calibri"/>
-              </a:rPr>
-              <a:t>Authors and Vouchers put money on the line to ensure clean skills</a:t>
-            </a:r>
-            <a:endParaRPr b="0" i="0" sz="1100" u="none" cap="none" strike="noStrike">
-              <a:solidFill>
-                <a:srgbClr val="1F2937"/>
-              </a:solidFill>
-              <a:latin typeface="Calibri"/>
-              <a:ea typeface="Calibri"/>
-              <a:cs typeface="Calibri"/>
-              <a:sym typeface="Calibri"/>
-            </a:endParaRPr>
-          </a:p>
-        </p:txBody>
-      </p:sp>
-      <p:sp>
-        <p:nvSpPr>
-          <p:cNvPr id="208" name="Google Shape;208;p20"/>
-          <p:cNvSpPr/>
-          <p:nvPr/>
-        </p:nvSpPr>
-        <p:spPr>
-          <a:xfrm>
-            <a:off x="457200" y="3855700"/>
-            <a:ext cx="7327500" cy="960000"/>
-          </a:xfrm>
-          <a:prstGeom prst="rect">
-            <a:avLst/>
-          </a:prstGeom>
-          <a:solidFill>
-            <a:srgbClr val="FFF5EE"/>
-          </a:solidFill>
-          <a:ln>
-            <a:noFill/>
-          </a:ln>
-        </p:spPr>
-        <p:txBody>
-          <a:bodyPr anchorCtr="0" anchor="ctr" bIns="91425" lIns="91425" spcFirstLastPara="1" rIns="91425" wrap="square" tIns="91425">
-            <a:noAutofit/>
-          </a:bodyPr>
-          <a:lstStyle/>
-          <a:p>
-            <a:pPr indent="0" lvl="0" marL="0" marR="0" rtl="0" algn="l">
-              <a:lnSpc>
-                <a:spcPct val="100000"/>
-              </a:lnSpc>
-              <a:spcBef>
-                <a:spcPts val="0"/>
-              </a:spcBef>
-              <a:spcAft>
-                <a:spcPts val="0"/>
-              </a:spcAft>
-              <a:buClr>
-                <a:srgbClr val="000000"/>
-              </a:buClr>
-              <a:buSzPts val="1400"/>
-              <a:buFont typeface="Arial"/>
-              <a:buNone/>
-            </a:pPr>
-            <a:r>
               <a:t/>
-            </a:r>
-            <a:endParaRPr b="0" i="0" sz="1400" u="none" cap="none" strike="noStrike">
-              <a:solidFill>
-                <a:srgbClr val="000000"/>
-              </a:solidFill>
-              <a:latin typeface="Arial"/>
-              <a:ea typeface="Arial"/>
-              <a:cs typeface="Arial"/>
-              <a:sym typeface="Arial"/>
-            </a:endParaRPr>
-          </a:p>
-        </p:txBody>
-      </p:sp>
-      <p:sp>
-        <p:nvSpPr>
-          <p:cNvPr id="209" name="Google Shape;209;p20"/>
-          <p:cNvSpPr/>
-          <p:nvPr/>
-        </p:nvSpPr>
-        <p:spPr>
-          <a:xfrm>
-            <a:off x="640080" y="3886195"/>
-            <a:ext cx="2743200" cy="274200"/>
-          </a:xfrm>
-          <a:prstGeom prst="rect">
-            <a:avLst/>
-          </a:prstGeom>
-          <a:noFill/>
-          <a:ln>
-            <a:noFill/>
-          </a:ln>
-        </p:spPr>
-        <p:txBody>
-          <a:bodyPr anchorCtr="0" anchor="ctr" bIns="0" lIns="0" spcFirstLastPara="1" rIns="0" wrap="square" tIns="0">
-            <a:noAutofit/>
-          </a:bodyPr>
-          <a:lstStyle/>
-          <a:p>
-            <a:pPr indent="0" lvl="0" marL="0" marR="0" rtl="0" algn="l">
-              <a:lnSpc>
-                <a:spcPct val="100000"/>
-              </a:lnSpc>
-              <a:spcBef>
-                <a:spcPts val="0"/>
-              </a:spcBef>
-              <a:spcAft>
-                <a:spcPts val="0"/>
-              </a:spcAft>
-              <a:buClr>
-                <a:srgbClr val="F28A61"/>
-              </a:buClr>
-              <a:buSzPts val="1200"/>
-              <a:buFont typeface="Arial Black"/>
-              <a:buNone/>
-            </a:pPr>
-            <a:r>
-              <a:rPr b="0" i="0" lang="en" sz="1200" u="none" cap="none" strike="noStrike">
-                <a:solidFill>
-                  <a:srgbClr val="F28A61"/>
-                </a:solidFill>
-                <a:latin typeface="Inconsolata"/>
-                <a:ea typeface="Inconsolata"/>
-                <a:cs typeface="Inconsolata"/>
-                <a:sym typeface="Inconsolata"/>
-              </a:rPr>
-              <a:t>Reputation Score</a:t>
-            </a:r>
-            <a:endParaRPr b="0" i="0" sz="1200" u="none" cap="none" strike="noStrike">
-              <a:solidFill>
-                <a:schemeClr val="dk1"/>
-              </a:solidFill>
-              <a:latin typeface="Inconsolata"/>
-              <a:ea typeface="Inconsolata"/>
-              <a:cs typeface="Inconsolata"/>
-              <a:sym typeface="Inconsolata"/>
-            </a:endParaRPr>
-          </a:p>
-        </p:txBody>
-      </p:sp>
-      <p:sp>
-        <p:nvSpPr>
-          <p:cNvPr id="210" name="Google Shape;210;p20"/>
-          <p:cNvSpPr/>
-          <p:nvPr/>
-        </p:nvSpPr>
-        <p:spPr>
-          <a:xfrm>
-            <a:off x="640080" y="4160515"/>
-            <a:ext cx="7772400" cy="274200"/>
-          </a:xfrm>
-          <a:prstGeom prst="rect">
-            <a:avLst/>
-          </a:prstGeom>
-          <a:noFill/>
-          <a:ln>
-            <a:noFill/>
-          </a:ln>
-        </p:spPr>
-        <p:txBody>
-          <a:bodyPr anchorCtr="0" anchor="ctr" bIns="0" lIns="0" spcFirstLastPara="1" rIns="0" wrap="square" tIns="0">
-            <a:noAutofit/>
-          </a:bodyPr>
-          <a:lstStyle/>
-          <a:p>
-            <a:pPr indent="0" lvl="0" marL="0" marR="0" rtl="0" algn="l">
-              <a:lnSpc>
-                <a:spcPct val="100000"/>
-              </a:lnSpc>
-              <a:spcBef>
-                <a:spcPts val="0"/>
-              </a:spcBef>
-              <a:spcAft>
-                <a:spcPts val="0"/>
-              </a:spcAft>
-              <a:buClr>
-                <a:srgbClr val="F59E0B"/>
-              </a:buClr>
-              <a:buSzPts val="1300"/>
-              <a:buFont typeface="Consolas"/>
-              <a:buNone/>
-            </a:pPr>
-            <a:r>
-              <a:rPr b="0" i="0" lang="en" sz="1200" u="none" cap="none" strike="noStrike">
-                <a:solidFill>
-                  <a:srgbClr val="F59E0B"/>
-                </a:solidFill>
-                <a:latin typeface="Calibri"/>
-                <a:ea typeface="Calibri"/>
-                <a:cs typeface="Calibri"/>
-                <a:sym typeface="Calibri"/>
-              </a:rPr>
-              <a:t>Stored on each </a:t>
-            </a:r>
-            <a:r>
-              <a:rPr b="1" i="0" lang="en" sz="1200" u="none" cap="none" strike="noStrike">
-                <a:solidFill>
-                  <a:srgbClr val="F59E0B"/>
-                </a:solidFill>
-                <a:latin typeface="Inconsolata"/>
-                <a:ea typeface="Inconsolata"/>
-                <a:cs typeface="Inconsolata"/>
-                <a:sym typeface="Inconsolata"/>
-              </a:rPr>
-              <a:t>AgentProfile</a:t>
-            </a:r>
-            <a:r>
-              <a:rPr b="0" i="0" lang="en" sz="1200" u="none" cap="none" strike="noStrike">
-                <a:solidFill>
-                  <a:srgbClr val="F59E0B"/>
-                </a:solidFill>
-                <a:latin typeface="Calibri"/>
-                <a:ea typeface="Calibri"/>
-                <a:cs typeface="Calibri"/>
-                <a:sym typeface="Calibri"/>
-              </a:rPr>
-              <a:t> and recomputed when vouches change; skills inherit trust from the author profile</a:t>
-            </a:r>
-            <a:endParaRPr b="0" i="0" sz="1200" u="none" cap="none" strike="noStrike">
-              <a:solidFill>
-                <a:schemeClr val="dk1"/>
-              </a:solidFill>
-              <a:latin typeface="Calibri"/>
-              <a:ea typeface="Calibri"/>
-              <a:cs typeface="Calibri"/>
-              <a:sym typeface="Calibri"/>
-            </a:endParaRPr>
-          </a:p>
-        </p:txBody>
-      </p:sp>
-      <p:sp>
-        <p:nvSpPr>
-          <p:cNvPr id="211" name="Google Shape;211;p20"/>
-          <p:cNvSpPr/>
-          <p:nvPr/>
-        </p:nvSpPr>
-        <p:spPr>
-          <a:xfrm>
-            <a:off x="640080" y="4480555"/>
-            <a:ext cx="7772400" cy="228600"/>
-          </a:xfrm>
-          <a:prstGeom prst="rect">
-            <a:avLst/>
-          </a:prstGeom>
-          <a:noFill/>
-          <a:ln>
-            <a:noFill/>
-          </a:ln>
-        </p:spPr>
-        <p:txBody>
-          <a:bodyPr anchorCtr="0" anchor="ctr" bIns="0" lIns="0" spcFirstLastPara="1" rIns="0" wrap="square" tIns="0">
-            <a:noAutofit/>
-          </a:bodyPr>
-          <a:lstStyle/>
-          <a:p>
-            <a:pPr indent="0" lvl="0" marL="0" marR="0" rtl="0" algn="l">
-              <a:lnSpc>
-                <a:spcPct val="100000"/>
-              </a:lnSpc>
-              <a:spcBef>
-                <a:spcPts val="0"/>
-              </a:spcBef>
-              <a:spcAft>
-                <a:spcPts val="0"/>
-              </a:spcAft>
-              <a:buClr>
-                <a:srgbClr val="6B7280"/>
-              </a:buClr>
-              <a:buSzPts val="1000"/>
-              <a:buFont typeface="Calibri"/>
-              <a:buNone/>
-            </a:pPr>
-            <a:r>
-              <a:rPr b="0" i="1" lang="en" sz="1000" u="none" cap="none" strike="noStrike">
-                <a:solidFill>
-                  <a:schemeClr val="lt2"/>
-                </a:solidFill>
-                <a:latin typeface="Calibri"/>
-                <a:ea typeface="Calibri"/>
-                <a:cs typeface="Calibri"/>
-                <a:sym typeface="Calibri"/>
-              </a:rPr>
-              <a:t>Computed dynamically on-chain — not stored, always current</a:t>
-            </a:r>
-            <a:endParaRPr b="0" i="0" sz="1000" u="none" cap="none" strike="noStrike">
-              <a:solidFill>
-                <a:schemeClr val="lt2"/>
-              </a:solidFill>
-              <a:latin typeface="Calibri"/>
-              <a:ea typeface="Calibri"/>
-              <a:cs typeface="Calibri"/>
-              <a:sym typeface="Calibri"/>
-            </a:endParaRPr>
-          </a:p>
-        </p:txBody>
-      </p:sp>
-      <p:sp>
-        <p:nvSpPr>
-          <p:cNvPr id="212" name="Google Shape;212;p20"/>
-          <p:cNvSpPr/>
-          <p:nvPr/>
-        </p:nvSpPr>
-        <p:spPr>
-          <a:xfrm>
-            <a:off x="457200" y="4709160"/>
-            <a:ext cx="2743200" cy="320040"/>
-          </a:xfrm>
-          <a:prstGeom prst="rect">
-            <a:avLst/>
-          </a:prstGeom>
-          <a:noFill/>
-          <a:ln>
-            <a:noFill/>
-          </a:ln>
-        </p:spPr>
-        <p:txBody>
-          <a:bodyPr anchorCtr="0" anchor="ctr" bIns="0" lIns="0" spcFirstLastPara="1" rIns="0" wrap="square" tIns="0">
-            <a:noAutofit/>
-          </a:bodyPr>
-          <a:lstStyle/>
-          <a:p>
-            <a:pPr indent="0" lvl="0" marL="0" marR="0" rtl="0" algn="l">
-              <a:lnSpc>
-                <a:spcPct val="100000"/>
-              </a:lnSpc>
-              <a:spcBef>
-                <a:spcPts val="0"/>
-              </a:spcBef>
-              <a:spcAft>
-                <a:spcPts val="0"/>
-              </a:spcAft>
-              <a:buClr>
-                <a:srgbClr val="6B7280"/>
-              </a:buClr>
-              <a:buSzPts val="900"/>
-              <a:buFont typeface="Calibri"/>
-              <a:buNone/>
-            </a:pPr>
-            <a:r>
-              <a:rPr b="0" i="0" lang="en" sz="900" u="none" cap="none" strike="noStrike">
-                <a:solidFill>
-                  <a:srgbClr val="6B7280"/>
-                </a:solidFill>
-                <a:latin typeface="Calibri"/>
-                <a:ea typeface="Calibri"/>
-                <a:cs typeface="Calibri"/>
-                <a:sym typeface="Calibri"/>
-              </a:rPr>
-              <a:t>AgentVouch</a:t>
-            </a:r>
-            <a:endParaRPr b="0" i="0" sz="900" u="none" cap="none" strike="noStrike">
-              <a:solidFill>
-                <a:schemeClr val="dk1"/>
-              </a:solidFill>
-              <a:latin typeface="Calibri"/>
-              <a:ea typeface="Calibri"/>
-              <a:cs typeface="Calibri"/>
-              <a:sym typeface="Calibri"/>
-            </a:endParaRPr>
-          </a:p>
-        </p:txBody>
-      </p:sp>
-      <p:sp>
-        <p:nvSpPr>
-          <p:cNvPr id="213" name="Google Shape;213;p20"/>
-          <p:cNvSpPr/>
-          <p:nvPr/>
-        </p:nvSpPr>
-        <p:spPr>
-          <a:xfrm>
-            <a:off x="6400800" y="4709160"/>
-            <a:ext cx="2286000" cy="320040"/>
-          </a:xfrm>
-          <a:prstGeom prst="rect">
-            <a:avLst/>
-          </a:prstGeom>
-          <a:noFill/>
-          <a:ln>
-            <a:noFill/>
-          </a:ln>
-        </p:spPr>
-        <p:txBody>
-          <a:bodyPr anchorCtr="0" anchor="ctr" bIns="0" lIns="0" spcFirstLastPara="1" rIns="0" wrap="square" tIns="0">
-            <a:noAutofit/>
-          </a:bodyPr>
-          <a:lstStyle/>
-          <a:p>
-            <a:pPr indent="0" lvl="0" marL="0" marR="0" rtl="0" algn="r">
-              <a:lnSpc>
-                <a:spcPct val="100000"/>
-              </a:lnSpc>
-              <a:spcBef>
-                <a:spcPts val="0"/>
-              </a:spcBef>
-              <a:spcAft>
-                <a:spcPts val="0"/>
-              </a:spcAft>
-              <a:buClr>
-                <a:srgbClr val="6B7280"/>
-              </a:buClr>
-              <a:buSzPts val="900"/>
-              <a:buFont typeface="Calibri"/>
-              <a:buNone/>
-            </a:pPr>
-            <a:r>
-              <a:rPr b="0" i="0" lang="en" sz="900" u="none" cap="none" strike="noStrike">
-                <a:solidFill>
-                  <a:srgbClr val="6B7280"/>
-                </a:solidFill>
-                <a:latin typeface="Calibri"/>
-                <a:ea typeface="Calibri"/>
-                <a:cs typeface="Calibri"/>
-                <a:sym typeface="Calibri"/>
-              </a:rPr>
-              <a:t>5 / 9</a:t>
-            </a:r>
-            <a:endParaRPr b="0" i="0" sz="900" u="none" cap="none" strike="noStrike">
-              <a:solidFill>
-                <a:schemeClr val="dk1"/>
-              </a:solidFill>
-              <a:latin typeface="Calibri"/>
-              <a:ea typeface="Calibri"/>
-              <a:cs typeface="Calibri"/>
-              <a:sym typeface="Calibri"/>
-            </a:endParaRPr>
-          </a:p>
-        </p:txBody>
-      </p:sp>
-      <p:sp>
-        <p:nvSpPr>
-          <p:cNvPr id="214" name="Google Shape;214;p20"/>
-          <p:cNvSpPr/>
-          <p:nvPr/>
-        </p:nvSpPr>
-        <p:spPr>
-          <a:xfrm>
-            <a:off x="5863975" y="1365575"/>
-            <a:ext cx="1920300" cy="2011800"/>
-          </a:xfrm>
-          <a:prstGeom prst="rect">
-            <a:avLst/>
-          </a:prstGeom>
-          <a:solidFill>
-            <a:srgbClr val="FFF5EE"/>
-          </a:solidFill>
-          <a:ln>
-            <a:noFill/>
-          </a:ln>
-          <a:effectLst>
-            <a:outerShdw blurRad="76200" rotWithShape="0" algn="bl" dir="8100000" dist="25400">
-              <a:srgbClr val="000000">
-                <a:alpha val="20000"/>
-              </a:srgbClr>
-            </a:outerShdw>
-          </a:effectLst>
-        </p:spPr>
-        <p:txBody>
-          <a:bodyPr anchorCtr="0" anchor="ctr" bIns="91425" lIns="91425" spcFirstLastPara="1" rIns="91425" wrap="square" tIns="91425">
-            <a:noAutofit/>
-          </a:bodyPr>
-          <a:lstStyle/>
-          <a:p>
-            <a:pPr indent="0" lvl="0" marL="0" marR="0" rtl="0" algn="l">
-              <a:lnSpc>
-                <a:spcPct val="100000"/>
-              </a:lnSpc>
-              <a:spcBef>
-                <a:spcPts val="0"/>
-              </a:spcBef>
-              <a:spcAft>
-                <a:spcPts val="0"/>
-              </a:spcAft>
-              <a:buClr>
-                <a:srgbClr val="000000"/>
-              </a:buClr>
-              <a:buSzPts val="1400"/>
-              <a:buFont typeface="Arial"/>
-              <a:buNone/>
-            </a:pPr>
-            <a:r>
-              <a:t/>
-            </a:r>
-            <a:endParaRPr b="0" i="0" sz="1400" u="none" cap="none" strike="noStrike">
-              <a:solidFill>
-                <a:srgbClr val="000000"/>
-              </a:solidFill>
-              <a:latin typeface="Arial"/>
-              <a:ea typeface="Arial"/>
-              <a:cs typeface="Arial"/>
-              <a:sym typeface="Arial"/>
-            </a:endParaRPr>
-          </a:p>
-        </p:txBody>
-      </p:sp>
-      <p:sp>
-        <p:nvSpPr>
-          <p:cNvPr id="215" name="Google Shape;215;p20"/>
-          <p:cNvSpPr/>
-          <p:nvPr/>
-        </p:nvSpPr>
-        <p:spPr>
-          <a:xfrm>
-            <a:off x="6035098" y="1502222"/>
-            <a:ext cx="365700" cy="365700"/>
-          </a:xfrm>
-          <a:prstGeom prst="rect">
-            <a:avLst/>
-          </a:prstGeom>
-          <a:solidFill>
-            <a:srgbClr val="6F86FF"/>
-          </a:solidFill>
-          <a:ln>
-            <a:noFill/>
-          </a:ln>
-        </p:spPr>
-        <p:txBody>
-          <a:bodyPr anchorCtr="0" anchor="ctr" bIns="0" lIns="0" spcFirstLastPara="1" rIns="0" wrap="square" tIns="0">
-            <a:noAutofit/>
-          </a:bodyPr>
-          <a:lstStyle/>
-          <a:p>
-            <a:pPr indent="0" lvl="0" marL="0" marR="0" rtl="0" algn="ctr">
-              <a:lnSpc>
-                <a:spcPct val="100000"/>
-              </a:lnSpc>
-              <a:spcBef>
-                <a:spcPts val="0"/>
-              </a:spcBef>
-              <a:spcAft>
-                <a:spcPts val="0"/>
-              </a:spcAft>
-              <a:buClr>
-                <a:srgbClr val="FAFAFA"/>
-              </a:buClr>
-              <a:buSzPts val="1600"/>
-              <a:buFont typeface="Arial Black"/>
-              <a:buNone/>
-            </a:pPr>
-            <a:r>
-              <a:rPr b="0" i="0" lang="en" sz="1600" u="none" cap="none" strike="noStrike">
-                <a:solidFill>
-                  <a:srgbClr val="030712"/>
-                </a:solidFill>
-                <a:latin typeface="Arial Black"/>
-                <a:ea typeface="Arial Black"/>
-                <a:cs typeface="Arial Black"/>
-                <a:sym typeface="Arial Black"/>
-              </a:rPr>
-              <a:t>3</a:t>
-            </a:r>
-            <a:endParaRPr b="0" i="0" sz="1600" u="none" cap="none" strike="noStrike">
-              <a:solidFill>
-                <a:schemeClr val="dk1"/>
-              </a:solidFill>
-              <a:latin typeface="Calibri"/>
-              <a:ea typeface="Calibri"/>
-              <a:cs typeface="Calibri"/>
-              <a:sym typeface="Calibri"/>
-            </a:endParaRPr>
-          </a:p>
-        </p:txBody>
-      </p:sp>
-      <p:sp>
-        <p:nvSpPr>
-          <p:cNvPr id="216" name="Google Shape;216;p20"/>
-          <p:cNvSpPr/>
-          <p:nvPr/>
-        </p:nvSpPr>
-        <p:spPr>
-          <a:xfrm>
-            <a:off x="6035110" y="2011655"/>
-            <a:ext cx="1645800" cy="320100"/>
-          </a:xfrm>
-          <a:prstGeom prst="rect">
-            <a:avLst/>
-          </a:prstGeom>
-          <a:noFill/>
-          <a:ln>
-            <a:noFill/>
-          </a:ln>
-        </p:spPr>
-        <p:txBody>
-          <a:bodyPr anchorCtr="0" anchor="ctr" bIns="0" lIns="0" spcFirstLastPara="1" rIns="0" wrap="square" tIns="0">
-            <a:noAutofit/>
-          </a:bodyPr>
-          <a:lstStyle/>
-          <a:p>
-            <a:pPr indent="0" lvl="0" marL="0" marR="0" rtl="0" algn="l">
-              <a:lnSpc>
-                <a:spcPct val="100000"/>
-              </a:lnSpc>
-              <a:spcBef>
-                <a:spcPts val="0"/>
-              </a:spcBef>
-              <a:spcAft>
-                <a:spcPts val="0"/>
-              </a:spcAft>
-              <a:buClr>
-                <a:srgbClr val="F3F4F6"/>
-              </a:buClr>
-              <a:buSzPts val="1600"/>
-              <a:buFont typeface="Arial Black"/>
-              <a:buNone/>
-            </a:pPr>
-            <a:r>
-              <a:rPr b="0" i="0" lang="en" sz="1600" u="none" cap="none" strike="noStrike">
-                <a:solidFill>
-                  <a:srgbClr val="1F2937"/>
-                </a:solidFill>
-                <a:latin typeface="Inconsolata"/>
-                <a:ea typeface="Inconsolata"/>
-                <a:cs typeface="Inconsolata"/>
-                <a:sym typeface="Inconsolata"/>
-              </a:rPr>
-              <a:t>Install</a:t>
-            </a:r>
-            <a:endParaRPr b="0" i="0" sz="1600" u="none" cap="none" strike="noStrike">
-              <a:solidFill>
-                <a:schemeClr val="dk1"/>
-              </a:solidFill>
-              <a:latin typeface="Inconsolata"/>
-              <a:ea typeface="Inconsolata"/>
-              <a:cs typeface="Inconsolata"/>
-              <a:sym typeface="Inconsolata"/>
-            </a:endParaRPr>
-          </a:p>
-        </p:txBody>
-      </p:sp>
-      <p:sp>
-        <p:nvSpPr>
-          <p:cNvPr id="217" name="Google Shape;217;p20"/>
-          <p:cNvSpPr/>
-          <p:nvPr/>
-        </p:nvSpPr>
-        <p:spPr>
-          <a:xfrm>
-            <a:off x="6035100" y="2371350"/>
-            <a:ext cx="1576500" cy="900900"/>
-          </a:xfrm>
-          <a:prstGeom prst="rect">
-            <a:avLst/>
-          </a:prstGeom>
-          <a:noFill/>
-          <a:ln>
-            <a:noFill/>
-          </a:ln>
-        </p:spPr>
-        <p:txBody>
-          <a:bodyPr anchorCtr="0" anchor="ctr" bIns="0" lIns="0" spcFirstLastPara="1" rIns="0" wrap="square" tIns="0">
-            <a:noAutofit/>
-          </a:bodyPr>
-          <a:lstStyle/>
-          <a:p>
-            <a:pPr indent="0" lvl="0" marL="0" marR="0" rtl="0" algn="l">
-              <a:lnSpc>
-                <a:spcPct val="100000"/>
-              </a:lnSpc>
-              <a:spcBef>
-                <a:spcPts val="0"/>
-              </a:spcBef>
-              <a:spcAft>
-                <a:spcPts val="0"/>
-              </a:spcAft>
-              <a:buClr>
-                <a:srgbClr val="D1D5DB"/>
-              </a:buClr>
-              <a:buSzPts val="1100"/>
-              <a:buFont typeface="Calibri"/>
-              <a:buNone/>
-            </a:pPr>
-            <a:r>
-              <a:rPr b="0" i="0" lang="en" sz="1100" u="none" cap="none" strike="noStrike">
-                <a:solidFill>
-                  <a:srgbClr val="1F2937"/>
-                </a:solidFill>
-                <a:latin typeface="Calibri"/>
-                <a:ea typeface="Calibri"/>
-                <a:cs typeface="Calibri"/>
-                <a:sym typeface="Calibri"/>
-              </a:rPr>
-              <a:t>Agent installs skill.  Skill updates are included in the purchase</a:t>
             </a:r>
             <a:endParaRPr b="0" i="0" sz="1100" u="none" cap="none" strike="noStrike">
               <a:solidFill>
@@ -42003,7 +45463,7 @@
       </p:sp>
       <p:pic>
         <p:nvPicPr>
-          <p:cNvPr id="218" name="Google Shape;218;p20" title="install-line (1).png"/>
+          <p:cNvPr id="222" name="Google Shape;222;p20"/>
           <p:cNvPicPr preferRelativeResize="0"/>
           <p:nvPr/>
         </p:nvPicPr>
@@ -42015,9 +45475,9 @@
           <a:stretch/>
         </p:blipFill>
         <p:spPr>
-          <a:xfrm>
-            <a:off x="6502274" y="1548450"/>
-            <a:ext cx="274200" cy="274200"/>
+          <a:xfrm rot="5400000">
+            <a:off x="2620475" y="2283800"/>
+            <a:ext cx="365700" cy="365700"/>
           </a:xfrm>
           <a:prstGeom prst="rect">
             <a:avLst/>
@@ -42028,303 +45488,6 @@
           </a:ln>
         </p:spPr>
       </p:pic>
-      <p:sp>
-        <p:nvSpPr>
-          <p:cNvPr id="219" name="Google Shape;219;p20"/>
-          <p:cNvSpPr/>
-          <p:nvPr/>
-        </p:nvSpPr>
-        <p:spPr>
-          <a:xfrm>
-            <a:off x="3143450" y="2525748"/>
-            <a:ext cx="1995600" cy="1065600"/>
-          </a:xfrm>
-          <a:prstGeom prst="rect">
-            <a:avLst/>
-          </a:prstGeom>
-          <a:solidFill>
-            <a:srgbClr val="FFF5EE"/>
-          </a:solidFill>
-          <a:ln>
-            <a:noFill/>
-          </a:ln>
-          <a:effectLst>
-            <a:outerShdw blurRad="76200" rotWithShape="0" algn="bl" dir="8100000" dist="25400">
-              <a:srgbClr val="000000">
-                <a:alpha val="20000"/>
-              </a:srgbClr>
-            </a:outerShdw>
-          </a:effectLst>
-        </p:spPr>
-        <p:txBody>
-          <a:bodyPr anchorCtr="0" anchor="ctr" bIns="91425" lIns="91425" spcFirstLastPara="1" rIns="91425" wrap="square" tIns="91425">
-            <a:noAutofit/>
-          </a:bodyPr>
-          <a:lstStyle/>
-          <a:p>
-            <a:pPr indent="0" lvl="0" marL="0" marR="0" rtl="0" algn="l">
-              <a:lnSpc>
-                <a:spcPct val="100000"/>
-              </a:lnSpc>
-              <a:spcBef>
-                <a:spcPts val="0"/>
-              </a:spcBef>
-              <a:spcAft>
-                <a:spcPts val="0"/>
-              </a:spcAft>
-              <a:buClr>
-                <a:srgbClr val="000000"/>
-              </a:buClr>
-              <a:buSzPts val="1400"/>
-              <a:buFont typeface="Arial"/>
-              <a:buNone/>
-            </a:pPr>
-            <a:r>
-              <a:t/>
-            </a:r>
-            <a:endParaRPr b="0" i="0" sz="1400" u="none" cap="none" strike="noStrike">
-              <a:solidFill>
-                <a:srgbClr val="000000"/>
-              </a:solidFill>
-              <a:latin typeface="Arial"/>
-              <a:ea typeface="Arial"/>
-              <a:cs typeface="Arial"/>
-              <a:sym typeface="Arial"/>
-            </a:endParaRPr>
-          </a:p>
-        </p:txBody>
-      </p:sp>
-      <p:sp>
-        <p:nvSpPr>
-          <p:cNvPr id="220" name="Google Shape;220;p20"/>
-          <p:cNvSpPr/>
-          <p:nvPr/>
-        </p:nvSpPr>
-        <p:spPr>
-          <a:xfrm>
-            <a:off x="3229160" y="2636060"/>
-            <a:ext cx="365700" cy="365700"/>
-          </a:xfrm>
-          <a:prstGeom prst="rect">
-            <a:avLst/>
-          </a:prstGeom>
-          <a:solidFill>
-            <a:srgbClr val="93C47D"/>
-          </a:solidFill>
-          <a:ln>
-            <a:noFill/>
-          </a:ln>
-        </p:spPr>
-        <p:txBody>
-          <a:bodyPr anchorCtr="0" anchor="ctr" bIns="0" lIns="0" spcFirstLastPara="1" rIns="0" wrap="square" tIns="0">
-            <a:noAutofit/>
-          </a:bodyPr>
-          <a:lstStyle/>
-          <a:p>
-            <a:pPr indent="0" lvl="0" marL="0" marR="0" rtl="0" algn="ctr">
-              <a:lnSpc>
-                <a:spcPct val="100000"/>
-              </a:lnSpc>
-              <a:spcBef>
-                <a:spcPts val="0"/>
-              </a:spcBef>
-              <a:spcAft>
-                <a:spcPts val="0"/>
-              </a:spcAft>
-              <a:buClr>
-                <a:srgbClr val="FAFAFA"/>
-              </a:buClr>
-              <a:buSzPts val="1600"/>
-              <a:buFont typeface="Arial Black"/>
-              <a:buNone/>
-            </a:pPr>
-            <a:r>
-              <a:rPr b="0" i="0" lang="en" sz="1600" u="none" cap="none" strike="noStrike">
-                <a:solidFill>
-                  <a:srgbClr val="030712"/>
-                </a:solidFill>
-                <a:latin typeface="Arial Black"/>
-                <a:ea typeface="Arial Black"/>
-                <a:cs typeface="Arial Black"/>
-                <a:sym typeface="Arial Black"/>
-              </a:rPr>
-              <a:t>2b</a:t>
-            </a:r>
-            <a:endParaRPr b="0" i="0" sz="1600" u="none" cap="none" strike="noStrike">
-              <a:solidFill>
-                <a:schemeClr val="dk1"/>
-              </a:solidFill>
-              <a:latin typeface="Calibri"/>
-              <a:ea typeface="Calibri"/>
-              <a:cs typeface="Calibri"/>
-              <a:sym typeface="Calibri"/>
-            </a:endParaRPr>
-          </a:p>
-        </p:txBody>
-      </p:sp>
-      <p:sp>
-        <p:nvSpPr>
-          <p:cNvPr id="221" name="Google Shape;221;p20"/>
-          <p:cNvSpPr/>
-          <p:nvPr/>
-        </p:nvSpPr>
-        <p:spPr>
-          <a:xfrm>
-            <a:off x="3229149" y="3115775"/>
-            <a:ext cx="925200" cy="320100"/>
-          </a:xfrm>
-          <a:prstGeom prst="rect">
-            <a:avLst/>
-          </a:prstGeom>
-          <a:noFill/>
-          <a:ln>
-            <a:noFill/>
-          </a:ln>
-        </p:spPr>
-        <p:txBody>
-          <a:bodyPr anchorCtr="0" anchor="ctr" bIns="0" lIns="0" spcFirstLastPara="1" rIns="0" wrap="square" tIns="0">
-            <a:noAutofit/>
-          </a:bodyPr>
-          <a:lstStyle/>
-          <a:p>
-            <a:pPr indent="0" lvl="0" marL="0" marR="0" rtl="0" algn="l">
-              <a:lnSpc>
-                <a:spcPct val="100000"/>
-              </a:lnSpc>
-              <a:spcBef>
-                <a:spcPts val="0"/>
-              </a:spcBef>
-              <a:spcAft>
-                <a:spcPts val="0"/>
-              </a:spcAft>
-              <a:buClr>
-                <a:srgbClr val="F3F4F6"/>
-              </a:buClr>
-              <a:buSzPts val="1600"/>
-              <a:buFont typeface="Arial Black"/>
-              <a:buNone/>
-            </a:pPr>
-            <a:r>
-              <a:rPr b="0" i="0" lang="en" sz="1600" u="none" cap="none" strike="noStrike">
-                <a:solidFill>
-                  <a:schemeClr val="lt1"/>
-                </a:solidFill>
-                <a:latin typeface="Inconsolata"/>
-                <a:ea typeface="Inconsolata"/>
-                <a:cs typeface="Inconsolata"/>
-                <a:sym typeface="Inconsolata"/>
-              </a:rPr>
-              <a:t>Free Skill</a:t>
-            </a:r>
-            <a:endParaRPr b="0" i="0" sz="1600" u="none" cap="none" strike="noStrike">
-              <a:solidFill>
-                <a:schemeClr val="lt1"/>
-              </a:solidFill>
-              <a:latin typeface="Inconsolata"/>
-              <a:ea typeface="Inconsolata"/>
-              <a:cs typeface="Inconsolata"/>
-              <a:sym typeface="Inconsolata"/>
-            </a:endParaRPr>
-          </a:p>
-        </p:txBody>
-      </p:sp>
-      <p:sp>
-        <p:nvSpPr>
-          <p:cNvPr id="222" name="Google Shape;222;p20"/>
-          <p:cNvSpPr/>
-          <p:nvPr/>
-        </p:nvSpPr>
-        <p:spPr>
-          <a:xfrm>
-            <a:off x="4048725" y="2636050"/>
-            <a:ext cx="1014000" cy="900900"/>
-          </a:xfrm>
-          <a:prstGeom prst="rect">
-            <a:avLst/>
-          </a:prstGeom>
-          <a:noFill/>
-          <a:ln>
-            <a:noFill/>
-          </a:ln>
-        </p:spPr>
-        <p:txBody>
-          <a:bodyPr anchorCtr="0" anchor="ctr" bIns="0" lIns="0" spcFirstLastPara="1" rIns="0" wrap="square" tIns="0">
-            <a:noAutofit/>
-          </a:bodyPr>
-          <a:lstStyle/>
-          <a:p>
-            <a:pPr indent="0" lvl="0" marL="0" marR="0" rtl="0" algn="l">
-              <a:lnSpc>
-                <a:spcPct val="100000"/>
-              </a:lnSpc>
-              <a:spcBef>
-                <a:spcPts val="0"/>
-              </a:spcBef>
-              <a:spcAft>
-                <a:spcPts val="0"/>
-              </a:spcAft>
-              <a:buClr>
-                <a:srgbClr val="D1D5DB"/>
-              </a:buClr>
-              <a:buSzPts val="1100"/>
-              <a:buFont typeface="Calibri"/>
-              <a:buNone/>
-            </a:pPr>
-            <a:r>
-              <a:rPr b="0" i="0" lang="en" sz="1100" u="none" cap="none" strike="noStrike">
-                <a:solidFill>
-                  <a:srgbClr val="1F2937"/>
-                </a:solidFill>
-                <a:latin typeface="Calibri"/>
-                <a:ea typeface="Calibri"/>
-                <a:cs typeface="Calibri"/>
-                <a:sym typeface="Calibri"/>
-              </a:rPr>
-              <a:t>Free skills require the Author to post an AuthorBond as first-loss capital.</a:t>
-            </a:r>
-            <a:endParaRPr b="0" i="0" sz="1100" u="none" cap="none" strike="noStrike">
-              <a:solidFill>
-                <a:srgbClr val="1F2937"/>
-              </a:solidFill>
-              <a:latin typeface="Calibri"/>
-              <a:ea typeface="Calibri"/>
-              <a:cs typeface="Calibri"/>
-              <a:sym typeface="Calibri"/>
-            </a:endParaRPr>
-          </a:p>
-          <a:p>
-            <a:pPr indent="0" lvl="0" marL="0" marR="0" rtl="0" algn="l">
-              <a:lnSpc>
-                <a:spcPct val="100000"/>
-              </a:lnSpc>
-              <a:spcBef>
-                <a:spcPts val="0"/>
-              </a:spcBef>
-              <a:spcAft>
-                <a:spcPts val="0"/>
-              </a:spcAft>
-              <a:buClr>
-                <a:srgbClr val="D1D5DB"/>
-              </a:buClr>
-              <a:buSzPts val="1100"/>
-              <a:buFont typeface="Calibri"/>
-              <a:buNone/>
-            </a:pPr>
-            <a:r>
-              <a:t/>
-            </a:r>
-            <a:endParaRPr b="0" i="0" sz="1100" u="none" cap="none" strike="noStrike">
-              <a:solidFill>
-                <a:schemeClr val="dk1"/>
-              </a:solidFill>
-              <a:latin typeface="Calibri"/>
-              <a:ea typeface="Calibri"/>
-              <a:cs typeface="Calibri"/>
-              <a:sym typeface="Calibri"/>
-            </a:endParaRPr>
-          </a:p>
-        </p:txBody>
-      </p:sp>
       <p:pic>
         <p:nvPicPr>
           <p:cNvPr id="223" name="Google Shape;223;p20"/>
@@ -42339,9 +45502,9 @@
           <a:stretch/>
         </p:blipFill>
         <p:spPr>
-          <a:xfrm rot="5400000">
-            <a:off x="2620475" y="2283800"/>
-            <a:ext cx="365700" cy="365700"/>
+          <a:xfrm>
+            <a:off x="5296925" y="2262062"/>
+            <a:ext cx="409175" cy="409175"/>
           </a:xfrm>
           <a:prstGeom prst="rect">
             <a:avLst/>
@@ -42367,8 +45530,8 @@
         </p:blipFill>
         <p:spPr>
           <a:xfrm>
-            <a:off x="5296925" y="2262062"/>
-            <a:ext cx="409175" cy="409175"/>
+            <a:off x="3661738" y="2640575"/>
+            <a:ext cx="320100" cy="320100"/>
           </a:xfrm>
           <a:prstGeom prst="rect">
             <a:avLst/>
@@ -42385,17 +45548,18 @@
           <p:cNvPicPr preferRelativeResize="0"/>
           <p:nvPr/>
         </p:nvPicPr>
-        <p:blipFill rotWithShape="1">
+        <p:blipFill>
           <a:blip r:embed="rId9">
             <a:alphaModFix/>
           </a:blip>
-          <a:srcRect b="0" l="0" r="0" t="0"/>
-          <a:stretch/>
+          <a:stretch>
+            <a:fillRect/>
+          </a:stretch>
         </p:blipFill>
         <p:spPr>
           <a:xfrm>
-            <a:off x="3661738" y="2640575"/>
-            <a:ext cx="320100" cy="320100"/>
+            <a:off x="1120999" y="1502725"/>
+            <a:ext cx="409175" cy="409175"/>
           </a:xfrm>
           <a:prstGeom prst="rect">
             <a:avLst/>
@@ -42683,7 +45847,7 @@
                 <a:cs typeface="Calibri"/>
                 <a:sym typeface="Calibri"/>
               </a:rPr>
-              <a:t>A revenue model that rewards honest vouching</a:t>
+              <a:t>A USDC revenue model that rewards honest vouching</a:t>
             </a:r>
             <a:endParaRPr b="0" i="0" sz="1400" u="none" cap="none" strike="noStrike">
               <a:solidFill>
@@ -42940,7 +46104,7 @@
                 <a:cs typeface="Calibri"/>
                 <a:sym typeface="Calibri"/>
               </a:rPr>
-              <a:t>Immediate payment on every purchase. Creates incentive to build quality skills.</a:t>
+              <a:t>Direct author payment today; withdrawable proceeds escrow is Milestone 13 WIP.</a:t>
             </a:r>
             <a:endParaRPr b="0" i="0" sz="1200" u="none" cap="none" strike="noStrike">
               <a:solidFill>
@@ -43197,7 +46361,7 @@
                 <a:cs typeface="Calibri"/>
                 <a:sym typeface="Calibri"/>
               </a:rPr>
-              <a:t>Distributed proportionally to stake. Passive income for trustworthy vouchers.</a:t>
+              <a:t>Distributed proportionally to linked vouch stake. Passive income for trustworthy vouchers.</a:t>
             </a:r>
             <a:endParaRPr b="0" i="0" sz="1200" u="none" cap="none" strike="noStrike">
               <a:solidFill>
@@ -44412,7 +47576,7 @@
                 <a:cs typeface="Calibri"/>
                 <a:sym typeface="Calibri"/>
               </a:rPr>
-              <a:t>Agents can buy listed skills on-chain natively, no human checkout needed</a:t>
+              <a:t>Agents buy listed skills on-chain with USDC, no human checkout needed</a:t>
             </a:r>
             <a:endParaRPr b="0" i="0" sz="1300" u="none" cap="none" strike="noStrike">
               <a:solidFill>
@@ -45176,7 +48340,7 @@
                 <a:cs typeface="Consolas"/>
                 <a:sym typeface="Consolas"/>
               </a:rPr>
-              <a:t>PaymentRequirement</a:t>
+              <a:t>Direct purchase required</a:t>
             </a:r>
             <a:endParaRPr b="0" i="0" sz="700" u="none" cap="none" strike="noStrike">
               <a:solidFill>
@@ -45216,7 +48380,7 @@
                 <a:cs typeface="Consolas"/>
                 <a:sym typeface="Consolas"/>
               </a:rPr>
-              <a:t>{recipient, amount}</a:t>
+              <a:t>{price_usdc_micros, listing}</a:t>
             </a:r>
             <a:endParaRPr b="0" i="0" sz="700" u="none" cap="none" strike="noStrike">
               <a:solidFill>
@@ -45607,7 +48771,7 @@
                 <a:cs typeface="Consolas"/>
                 <a:sym typeface="Consolas"/>
               </a:rPr>
-              <a:t>purchaseSkill tx</a:t>
+              <a:t>purchase_skill tx</a:t>
             </a:r>
             <a:endParaRPr b="0" i="0" sz="700" u="none" cap="none" strike="noStrike">
               <a:solidFill>
@@ -46029,7 +49193,7 @@
                 <a:cs typeface="Consolas"/>
                 <a:sym typeface="Consolas"/>
               </a:rPr>
-              <a:t>X-Payment-Proof header</a:t>
+              <a:t>X-AgentVouch-Auth header</a:t>
             </a:r>
             <a:endParaRPr b="0" i="0" sz="700" u="none" cap="none" strike="noStrike">
               <a:solidFill>
@@ -46069,7 +49233,7 @@
                 <a:cs typeface="Consolas"/>
                 <a:sym typeface="Consolas"/>
               </a:rPr>
-              <a:t>(buyer, txSig)</a:t>
+              <a:t>(buyer, listing, timestamp)</a:t>
             </a:r>
             <a:endParaRPr b="0" i="0" sz="700" u="none" cap="none" strike="noStrike">
               <a:solidFill>
@@ -46643,7 +49807,7 @@
                 <a:cs typeface="Inconsolata"/>
                 <a:sym typeface="Inconsolata"/>
               </a:rPr>
-              <a:t>For listed paid skills, the raw endpoint can require an on-chain purchase.</a:t>
+              <a:t>For protocol-listed paid skills, the raw endpoint requires a verified on-chain purchase.</a:t>
             </a:r>
             <a:endParaRPr b="0" i="0" sz="1400" u="none" cap="none" strike="noStrike">
               <a:solidFill>
@@ -47206,7 +50370,7 @@
                 <a:cs typeface="Consolas"/>
                 <a:sym typeface="Consolas"/>
               </a:rPr>
-              <a:t>Yes. The buyer agent needs a funded Solana wallet. Just ask your agent to create a Solana wallet and send it funds.</a:t>
+              <a:t>Yes. The buyer agent needs USDC for purchases and a small amount of SOL for rent and fees.</a:t>
             </a:r>
             <a:endParaRPr b="0" i="0" sz="700" u="none" cap="none" strike="noStrike">
               <a:solidFill>
@@ -47556,7 +50720,7 @@
                 <a:cs typeface="Consolas"/>
                 <a:sym typeface="Consolas"/>
               </a:rPr>
-              <a:t>Not today. This version uses wallet funding, not fiat rails</a:t>
+              <a:t>Not today. This version uses wallet funding and USDC settlement, not fiat rails.</a:t>
             </a:r>
             <a:endParaRPr b="0" i="0" sz="700" u="none" cap="none" strike="noStrike">
               <a:solidFill>
@@ -47703,6 +50867,285 @@
 </file>
 
 <file path=ppt/theme/theme1.xml><?xml version="1.0" encoding="utf-8"?>
+<a:theme xmlns:a="http://schemas.openxmlformats.org/drawingml/2006/main" xmlns:r="http://schemas.openxmlformats.org/officeDocument/2006/relationships" name="Simple Light">
+  <a:themeElements>
+    <a:clrScheme name="Simple Light">
+      <a:dk1>
+        <a:srgbClr val="000000"/>
+      </a:dk1>
+      <a:lt1>
+        <a:srgbClr val="FFFFFF"/>
+      </a:lt1>
+      <a:dk2>
+        <a:srgbClr val="595959"/>
+      </a:dk2>
+      <a:lt2>
+        <a:srgbClr val="EEEEEE"/>
+      </a:lt2>
+      <a:accent1>
+        <a:srgbClr val="4285F4"/>
+      </a:accent1>
+      <a:accent2>
+        <a:srgbClr val="212121"/>
+      </a:accent2>
+      <a:accent3>
+        <a:srgbClr val="78909C"/>
+      </a:accent3>
+      <a:accent4>
+        <a:srgbClr val="FFAB40"/>
+      </a:accent4>
+      <a:accent5>
+        <a:srgbClr val="0097A7"/>
+      </a:accent5>
+      <a:accent6>
+        <a:srgbClr val="EEFF41"/>
+      </a:accent6>
+      <a:hlink>
+        <a:srgbClr val="0097A7"/>
+      </a:hlink>
+      <a:folHlink>
+        <a:srgbClr val="0097A7"/>
+      </a:folHlink>
+    </a:clrScheme>
+    <a:fontScheme name="Office">
+      <a:majorFont>
+        <a:latin typeface="Arial"/>
+        <a:ea typeface=""/>
+        <a:cs typeface=""/>
+        <a:font script="Jpan" typeface="ＭＳ Ｐゴシック"/>
+        <a:font script="Hang" typeface="맑은 고딕"/>
+        <a:font script="Hans" typeface="宋体"/>
+        <a:font script="Hant" typeface="新細明體"/>
+        <a:font script="Arab" typeface="Times New Roman"/>
+        <a:font script="Hebr" typeface="Times New Roman"/>
+        <a:font script="Thai" typeface="Angsana New"/>
+        <a:font script="Ethi" typeface="Nyala"/>
+        <a:font script="Beng" typeface="Vrinda"/>
+        <a:font script="Gujr" typeface="Shruti"/>
+        <a:font script="Khmr" typeface="MoolBoran"/>
+        <a:font script="Knda" typeface="Tunga"/>
+        <a:font script="Guru" typeface="Raavi"/>
+        <a:font script="Cans" typeface="Euphemia"/>
+        <a:font script="Cher" typeface="Plantagenet Cherokee"/>
+        <a:font script="Yiii" typeface="Microsoft Yi Baiti"/>
+        <a:font script="Tibt" typeface="Microsoft Himalaya"/>
+        <a:font script="Thaa" typeface="MV Boli"/>
+        <a:font script="Deva" typeface="Mangal"/>
+        <a:font script="Telu" typeface="Gautami"/>
+        <a:font script="Taml" typeface="Latha"/>
+        <a:font script="Syrc" typeface="Estrangelo Edessa"/>
+        <a:font script="Orya" typeface="Kalinga"/>
+        <a:font script="Mlym" typeface="Kartika"/>
+        <a:font script="Laoo" typeface="DokChampa"/>
+        <a:font script="Sinh" typeface="Iskoola Pota"/>
+        <a:font script="Mong" typeface="Mongolian Baiti"/>
+        <a:font script="Viet" typeface="Times New Roman"/>
+        <a:font script="Uigh" typeface="Microsoft Uighur"/>
+        <a:font script="Geor" typeface="Sylfaen"/>
+      </a:majorFont>
+      <a:minorFont>
+        <a:latin typeface="Arial"/>
+        <a:ea typeface=""/>
+        <a:cs typeface=""/>
+        <a:font script="Jpan" typeface="ＭＳ Ｐゴシック"/>
+        <a:font script="Hang" typeface="맑은 고딕"/>
+        <a:font script="Hans" typeface="宋体"/>
+        <a:font script="Hant" typeface="新細明體"/>
+        <a:font script="Arab" typeface="Arial"/>
+        <a:font script="Hebr" typeface="Arial"/>
+        <a:font script="Thai" typeface="Cordia New"/>
+        <a:font script="Ethi" typeface="Nyala"/>
+        <a:font script="Beng" typeface="Vrinda"/>
+        <a:font script="Gujr" typeface="Shruti"/>
+        <a:font script="Khmr" typeface="DaunPenh"/>
+        <a:font script="Knda" typeface="Tunga"/>
+        <a:font script="Guru" typeface="Raavi"/>
+        <a:font script="Cans" typeface="Euphemia"/>
+        <a:font script="Cher" typeface="Plantagenet Cherokee"/>
+        <a:font script="Yiii" typeface="Microsoft Yi Baiti"/>
+        <a:font script="Tibt" typeface="Microsoft Himalaya"/>
+        <a:font script="Thaa" typeface="MV Boli"/>
+        <a:font script="Deva" typeface="Mangal"/>
+        <a:font script="Telu" typeface="Gautami"/>
+        <a:font script="Taml" typeface="Latha"/>
+        <a:font script="Syrc" typeface="Estrangelo Edessa"/>
+        <a:font script="Orya" typeface="Kalinga"/>
+        <a:font script="Mlym" typeface="Kartika"/>
+        <a:font script="Laoo" typeface="DokChampa"/>
+        <a:font script="Sinh" typeface="Iskoola Pota"/>
+        <a:font script="Mong" typeface="Mongolian Baiti"/>
+        <a:font script="Viet" typeface="Arial"/>
+        <a:font script="Uigh" typeface="Microsoft Uighur"/>
+        <a:font script="Geor" typeface="Sylfaen"/>
+      </a:minorFont>
+    </a:fontScheme>
+    <a:fmtScheme name="Office">
+      <a:fillStyleLst>
+        <a:solidFill>
+          <a:schemeClr val="phClr"/>
+        </a:solidFill>
+        <a:gradFill rotWithShape="1">
+          <a:gsLst>
+            <a:gs pos="0">
+              <a:schemeClr val="phClr">
+                <a:tint val="50000"/>
+                <a:satMod val="300000"/>
+              </a:schemeClr>
+            </a:gs>
+            <a:gs pos="35000">
+              <a:schemeClr val="phClr">
+                <a:tint val="37000"/>
+                <a:satMod val="300000"/>
+              </a:schemeClr>
+            </a:gs>
+            <a:gs pos="100000">
+              <a:schemeClr val="phClr">
+                <a:tint val="15000"/>
+                <a:satMod val="350000"/>
+              </a:schemeClr>
+            </a:gs>
+          </a:gsLst>
+          <a:lin ang="16200000" scaled="1"/>
+        </a:gradFill>
+        <a:gradFill rotWithShape="1">
+          <a:gsLst>
+            <a:gs pos="0">
+              <a:schemeClr val="phClr">
+                <a:tint val="100000"/>
+                <a:shade val="100000"/>
+                <a:satMod val="130000"/>
+              </a:schemeClr>
+            </a:gs>
+            <a:gs pos="100000">
+              <a:schemeClr val="phClr">
+                <a:tint val="50000"/>
+                <a:shade val="100000"/>
+                <a:satMod val="350000"/>
+              </a:schemeClr>
+            </a:gs>
+          </a:gsLst>
+          <a:lin ang="16200000" scaled="0"/>
+        </a:gradFill>
+      </a:fillStyleLst>
+      <a:lnStyleLst>
+        <a:ln w="9525" cap="flat" cmpd="sng" algn="ctr">
+          <a:solidFill>
+            <a:schemeClr val="phClr">
+              <a:shade val="95000"/>
+              <a:satMod val="105000"/>
+            </a:schemeClr>
+          </a:solidFill>
+          <a:prstDash val="solid"/>
+        </a:ln>
+        <a:ln w="25400" cap="flat" cmpd="sng" algn="ctr">
+          <a:solidFill>
+            <a:schemeClr val="phClr"/>
+          </a:solidFill>
+          <a:prstDash val="solid"/>
+        </a:ln>
+        <a:ln w="38100" cap="flat" cmpd="sng" algn="ctr">
+          <a:solidFill>
+            <a:schemeClr val="phClr"/>
+          </a:solidFill>
+          <a:prstDash val="solid"/>
+        </a:ln>
+      </a:lnStyleLst>
+      <a:effectStyleLst>
+        <a:effectStyle>
+          <a:effectLst>
+            <a:outerShdw blurRad="40000" dist="20000" dir="5400000" rotWithShape="0">
+              <a:srgbClr val="000000">
+                <a:alpha val="38000"/>
+              </a:srgbClr>
+            </a:outerShdw>
+          </a:effectLst>
+        </a:effectStyle>
+        <a:effectStyle>
+          <a:effectLst>
+            <a:outerShdw blurRad="40000" dist="23000" dir="5400000" rotWithShape="0">
+              <a:srgbClr val="000000">
+                <a:alpha val="35000"/>
+              </a:srgbClr>
+            </a:outerShdw>
+          </a:effectLst>
+        </a:effectStyle>
+        <a:effectStyle>
+          <a:effectLst>
+            <a:outerShdw blurRad="40000" dist="23000" dir="5400000" rotWithShape="0">
+              <a:srgbClr val="000000">
+                <a:alpha val="35000"/>
+              </a:srgbClr>
+            </a:outerShdw>
+          </a:effectLst>
+          <a:scene3d>
+            <a:camera prst="orthographicFront">
+              <a:rot lat="0" lon="0" rev="0"/>
+            </a:camera>
+            <a:lightRig rig="threePt" dir="t">
+              <a:rot lat="0" lon="0" rev="1200000"/>
+            </a:lightRig>
+          </a:scene3d>
+          <a:sp3d>
+            <a:bevelT w="63500" h="25400"/>
+          </a:sp3d>
+        </a:effectStyle>
+      </a:effectStyleLst>
+      <a:bgFillStyleLst>
+        <a:solidFill>
+          <a:schemeClr val="phClr"/>
+        </a:solidFill>
+        <a:gradFill rotWithShape="1">
+          <a:gsLst>
+            <a:gs pos="0">
+              <a:schemeClr val="phClr">
+                <a:tint val="40000"/>
+                <a:satMod val="350000"/>
+              </a:schemeClr>
+            </a:gs>
+            <a:gs pos="40000">
+              <a:schemeClr val="phClr">
+                <a:tint val="45000"/>
+                <a:shade val="99000"/>
+                <a:satMod val="350000"/>
+              </a:schemeClr>
+            </a:gs>
+            <a:gs pos="100000">
+              <a:schemeClr val="phClr">
+                <a:shade val="20000"/>
+                <a:satMod val="255000"/>
+              </a:schemeClr>
+            </a:gs>
+          </a:gsLst>
+          <a:path path="circle">
+            <a:fillToRect l="50000" t="-80000" r="50000" b="180000"/>
+          </a:path>
+        </a:gradFill>
+        <a:gradFill rotWithShape="1">
+          <a:gsLst>
+            <a:gs pos="0">
+              <a:schemeClr val="phClr">
+                <a:tint val="80000"/>
+                <a:satMod val="300000"/>
+              </a:schemeClr>
+            </a:gs>
+            <a:gs pos="100000">
+              <a:schemeClr val="phClr">
+                <a:shade val="30000"/>
+                <a:satMod val="200000"/>
+              </a:schemeClr>
+            </a:gs>
+          </a:gsLst>
+          <a:path path="circle">
+            <a:fillToRect l="50000" t="50000" r="50000" b="50000"/>
+          </a:path>
+        </a:gradFill>
+      </a:bgFillStyleLst>
+    </a:fmtScheme>
+  </a:themeElements>
+</a:theme>
+</file>
+
+<file path=ppt/theme/theme2.xml><?xml version="1.0" encoding="utf-8"?>
 <a:theme xmlns:a="http://schemas.openxmlformats.org/drawingml/2006/main" xmlns:r="http://schemas.openxmlformats.org/officeDocument/2006/relationships">
   <a:themeElements>
     <a:clrScheme name="Default">
@@ -47979,283 +51422,4 @@
     </a:fmtScheme>
   </a:themeElements>
 </a:theme>
-</file>
-
-<file path=ppt/theme/theme2.xml><?xml version="1.0" encoding="utf-8"?>
-<a:theme xmlns:a="http://schemas.openxmlformats.org/drawingml/2006/main" xmlns:r="http://schemas.openxmlformats.org/officeDocument/2006/relationships" name="Simple Light">
-  <a:themeElements>
-    <a:clrScheme name="Simple Light">
-      <a:dk1>
-        <a:srgbClr val="000000"/>
-      </a:dk1>
-      <a:lt1>
-        <a:srgbClr val="FFFFFF"/>
-      </a:lt1>
-      <a:dk2>
-        <a:srgbClr val="595959"/>
-      </a:dk2>
-      <a:lt2>
-        <a:srgbClr val="EEEEEE"/>
-      </a:lt2>
-      <a:accent1>
-        <a:srgbClr val="4285F4"/>
-      </a:accent1>
-      <a:accent2>
-        <a:srgbClr val="212121"/>
-      </a:accent2>
-      <a:accent3>
-        <a:srgbClr val="78909C"/>
-      </a:accent3>
-      <a:accent4>
-        <a:srgbClr val="FFAB40"/>
-      </a:accent4>
-      <a:accent5>
-        <a:srgbClr val="0097A7"/>
-      </a:accent5>
-      <a:accent6>
-        <a:srgbClr val="EEFF41"/>
-      </a:accent6>
-      <a:hlink>
-        <a:srgbClr val="0097A7"/>
-      </a:hlink>
-      <a:folHlink>
-        <a:srgbClr val="0097A7"/>
-      </a:folHlink>
-    </a:clrScheme>
-    <a:fontScheme name="Office">
-      <a:majorFont>
-        <a:latin typeface="Arial"/>
-        <a:ea typeface=""/>
-        <a:cs typeface=""/>
-        <a:font script="Jpan" typeface="ＭＳ Ｐゴシック"/>
-        <a:font script="Hang" typeface="맑은 고딕"/>
-        <a:font script="Hans" typeface="宋体"/>
-        <a:font script="Hant" typeface="新細明體"/>
-        <a:font script="Arab" typeface="Times New Roman"/>
-        <a:font script="Hebr" typeface="Times New Roman"/>
-        <a:font script="Thai" typeface="Angsana New"/>
-        <a:font script="Ethi" typeface="Nyala"/>
-        <a:font script="Beng" typeface="Vrinda"/>
-        <a:font script="Gujr" typeface="Shruti"/>
-        <a:font script="Khmr" typeface="MoolBoran"/>
-        <a:font script="Knda" typeface="Tunga"/>
-        <a:font script="Guru" typeface="Raavi"/>
-        <a:font script="Cans" typeface="Euphemia"/>
-        <a:font script="Cher" typeface="Plantagenet Cherokee"/>
-        <a:font script="Yiii" typeface="Microsoft Yi Baiti"/>
-        <a:font script="Tibt" typeface="Microsoft Himalaya"/>
-        <a:font script="Thaa" typeface="MV Boli"/>
-        <a:font script="Deva" typeface="Mangal"/>
-        <a:font script="Telu" typeface="Gautami"/>
-        <a:font script="Taml" typeface="Latha"/>
-        <a:font script="Syrc" typeface="Estrangelo Edessa"/>
-        <a:font script="Orya" typeface="Kalinga"/>
-        <a:font script="Mlym" typeface="Kartika"/>
-        <a:font script="Laoo" typeface="DokChampa"/>
-        <a:font script="Sinh" typeface="Iskoola Pota"/>
-        <a:font script="Mong" typeface="Mongolian Baiti"/>
-        <a:font script="Viet" typeface="Times New Roman"/>
-        <a:font script="Uigh" typeface="Microsoft Uighur"/>
-        <a:font script="Geor" typeface="Sylfaen"/>
-      </a:majorFont>
-      <a:minorFont>
-        <a:latin typeface="Arial"/>
-        <a:ea typeface=""/>
-        <a:cs typeface=""/>
-        <a:font script="Jpan" typeface="ＭＳ Ｐゴシック"/>
-        <a:font script="Hang" typeface="맑은 고딕"/>
-        <a:font script="Hans" typeface="宋体"/>
-        <a:font script="Hant" typeface="新細明體"/>
-        <a:font script="Arab" typeface="Arial"/>
-        <a:font script="Hebr" typeface="Arial"/>
-        <a:font script="Thai" typeface="Cordia New"/>
-        <a:font script="Ethi" typeface="Nyala"/>
-        <a:font script="Beng" typeface="Vrinda"/>
-        <a:font script="Gujr" typeface="Shruti"/>
-        <a:font script="Khmr" typeface="DaunPenh"/>
-        <a:font script="Knda" typeface="Tunga"/>
-        <a:font script="Guru" typeface="Raavi"/>
-        <a:font script="Cans" typeface="Euphemia"/>
-        <a:font script="Cher" typeface="Plantagenet Cherokee"/>
-        <a:font script="Yiii" typeface="Microsoft Yi Baiti"/>
-        <a:font script="Tibt" typeface="Microsoft Himalaya"/>
-        <a:font script="Thaa" typeface="MV Boli"/>
-        <a:font script="Deva" typeface="Mangal"/>
-        <a:font script="Telu" typeface="Gautami"/>
-        <a:font script="Taml" typeface="Latha"/>
-        <a:font script="Syrc" typeface="Estrangelo Edessa"/>
-        <a:font script="Orya" typeface="Kalinga"/>
-        <a:font script="Mlym" typeface="Kartika"/>
-        <a:font script="Laoo" typeface="DokChampa"/>
-        <a:font script="Sinh" typeface="Iskoola Pota"/>
-        <a:font script="Mong" typeface="Mongolian Baiti"/>
-        <a:font script="Viet" typeface="Arial"/>
-        <a:font script="Uigh" typeface="Microsoft Uighur"/>
-        <a:font script="Geor" typeface="Sylfaen"/>
-      </a:minorFont>
-    </a:fontScheme>
-    <a:fmtScheme name="Office">
-      <a:fillStyleLst>
-        <a:solidFill>
-          <a:schemeClr val="phClr"/>
-        </a:solidFill>
-        <a:gradFill rotWithShape="1">
-          <a:gsLst>
-            <a:gs pos="0">
-              <a:schemeClr val="phClr">
-                <a:tint val="50000"/>
-                <a:satMod val="300000"/>
-              </a:schemeClr>
-            </a:gs>
-            <a:gs pos="35000">
-              <a:schemeClr val="phClr">
-                <a:tint val="37000"/>
-                <a:satMod val="300000"/>
-              </a:schemeClr>
-            </a:gs>
-            <a:gs pos="100000">
-              <a:schemeClr val="phClr">
-                <a:tint val="15000"/>
-                <a:satMod val="350000"/>
-              </a:schemeClr>
-            </a:gs>
-          </a:gsLst>
-          <a:lin ang="16200000" scaled="1"/>
-        </a:gradFill>
-        <a:gradFill rotWithShape="1">
-          <a:gsLst>
-            <a:gs pos="0">
-              <a:schemeClr val="phClr">
-                <a:tint val="100000"/>
-                <a:shade val="100000"/>
-                <a:satMod val="130000"/>
-              </a:schemeClr>
-            </a:gs>
-            <a:gs pos="100000">
-              <a:schemeClr val="phClr">
-                <a:tint val="50000"/>
-                <a:shade val="100000"/>
-                <a:satMod val="350000"/>
-              </a:schemeClr>
-            </a:gs>
-          </a:gsLst>
-          <a:lin ang="16200000" scaled="0"/>
-        </a:gradFill>
-      </a:fillStyleLst>
-      <a:lnStyleLst>
-        <a:ln w="9525" cap="flat" cmpd="sng" algn="ctr">
-          <a:solidFill>
-            <a:schemeClr val="phClr">
-              <a:shade val="95000"/>
-              <a:satMod val="105000"/>
-            </a:schemeClr>
-          </a:solidFill>
-          <a:prstDash val="solid"/>
-        </a:ln>
-        <a:ln w="25400" cap="flat" cmpd="sng" algn="ctr">
-          <a:solidFill>
-            <a:schemeClr val="phClr"/>
-          </a:solidFill>
-          <a:prstDash val="solid"/>
-        </a:ln>
-        <a:ln w="38100" cap="flat" cmpd="sng" algn="ctr">
-          <a:solidFill>
-            <a:schemeClr val="phClr"/>
-          </a:solidFill>
-          <a:prstDash val="solid"/>
-        </a:ln>
-      </a:lnStyleLst>
-      <a:effectStyleLst>
-        <a:effectStyle>
-          <a:effectLst>
-            <a:outerShdw blurRad="40000" dist="20000" dir="5400000" rotWithShape="0">
-              <a:srgbClr val="000000">
-                <a:alpha val="38000"/>
-              </a:srgbClr>
-            </a:outerShdw>
-          </a:effectLst>
-        </a:effectStyle>
-        <a:effectStyle>
-          <a:effectLst>
-            <a:outerShdw blurRad="40000" dist="23000" dir="5400000" rotWithShape="0">
-              <a:srgbClr val="000000">
-                <a:alpha val="35000"/>
-              </a:srgbClr>
-            </a:outerShdw>
-          </a:effectLst>
-        </a:effectStyle>
-        <a:effectStyle>
-          <a:effectLst>
-            <a:outerShdw blurRad="40000" dist="23000" dir="5400000" rotWithShape="0">
-              <a:srgbClr val="000000">
-                <a:alpha val="35000"/>
-              </a:srgbClr>
-            </a:outerShdw>
-          </a:effectLst>
-          <a:scene3d>
-            <a:camera prst="orthographicFront">
-              <a:rot lat="0" lon="0" rev="0"/>
-            </a:camera>
-            <a:lightRig rig="threePt" dir="t">
-              <a:rot lat="0" lon="0" rev="1200000"/>
-            </a:lightRig>
-          </a:scene3d>
-          <a:sp3d>
-            <a:bevelT w="63500" h="25400"/>
-          </a:sp3d>
-        </a:effectStyle>
-      </a:effectStyleLst>
-      <a:bgFillStyleLst>
-        <a:solidFill>
-          <a:schemeClr val="phClr"/>
-        </a:solidFill>
-        <a:gradFill rotWithShape="1">
-          <a:gsLst>
-            <a:gs pos="0">
-              <a:schemeClr val="phClr">
-                <a:tint val="40000"/>
-                <a:satMod val="350000"/>
-              </a:schemeClr>
-            </a:gs>
-            <a:gs pos="40000">
-              <a:schemeClr val="phClr">
-                <a:tint val="45000"/>
-                <a:shade val="99000"/>
-                <a:satMod val="350000"/>
-              </a:schemeClr>
-            </a:gs>
-            <a:gs pos="100000">
-              <a:schemeClr val="phClr">
-                <a:shade val="20000"/>
-                <a:satMod val="255000"/>
-              </a:schemeClr>
-            </a:gs>
-          </a:gsLst>
-          <a:path path="circle">
-            <a:fillToRect l="50000" t="-80000" r="50000" b="180000"/>
-          </a:path>
-        </a:gradFill>
-        <a:gradFill rotWithShape="1">
-          <a:gsLst>
-            <a:gs pos="0">
-              <a:schemeClr val="phClr">
-                <a:tint val="80000"/>
-                <a:satMod val="300000"/>
-              </a:schemeClr>
-            </a:gs>
-            <a:gs pos="100000">
-              <a:schemeClr val="phClr">
-                <a:shade val="30000"/>
-                <a:satMod val="200000"/>
-              </a:schemeClr>
-            </a:gs>
-          </a:gsLst>
-          <a:path path="circle">
-            <a:fillToRect l="50000" t="50000" r="50000" b="50000"/>
-          </a:path>
-        </a:gradFill>
-      </a:bgFillStyleLst>
-    </a:fmtScheme>
-  </a:themeElements>
-</a:theme>
 </file>